--- a/Ch07_Renaissance.pptx
+++ b/Ch07_Renaissance.pptx
@@ -2186,7 +2186,7 @@
               <a:buNone/>
             </a:pPr>
             <a:r>
-              <a:rPr lang="en-US" sz="1100" spc="300" kern="0" dirty="0">
+              <a:rPr lang="en-US" sz="1400" spc="300" kern="0" dirty="0">
                 <a:solidFill>
                   <a:srgbClr val="E8D8A8"/>
                 </a:solidFill>
@@ -2196,7 +2196,7 @@
               </a:rPr>
               <a:t>A HISTORY OF WESTERN MUSIC · TENTH EDITION</a:t>
             </a:r>
-            <a:endParaRPr lang="en-US" sz="1100" dirty="0"/>
+            <a:endParaRPr lang="en-US" sz="1400" dirty="0"/>
           </a:p>
         </p:txBody>
       </p:sp>
@@ -2340,7 +2340,7 @@
               <a:buNone/>
             </a:pPr>
             <a:r>
-              <a:rPr lang="en-US" sz="1300" i="1" dirty="0">
+              <a:rPr lang="en-US" sz="1400" i="1" dirty="0">
                 <a:solidFill>
                   <a:srgbClr val="E8D8A8"/>
                 </a:solidFill>
@@ -2350,7 +2350,7 @@
               </a:rPr>
               <a:t>Humanism · Patronage · New Counterpoint · Printing · Europe 1400–1600</a:t>
             </a:r>
-            <a:endParaRPr lang="en-US" sz="1300" dirty="0"/>
+            <a:endParaRPr lang="en-US" sz="1400" dirty="0"/>
           </a:p>
         </p:txBody>
       </p:sp>
@@ -2372,14 +2372,14 @@
           <a:ln/>
         </p:spPr>
         <p:txBody>
-          <a:bodyPr wrap="square" rtlCol="0" anchor="ctr"/>
+          <a:bodyPr wrap="square" rtlCol="0" anchor="t"/>
           <a:lstStyle/>
           <a:p>
             <a:pPr algn="ctr" indent="0" marL="0">
               <a:buNone/>
             </a:pPr>
             <a:r>
-              <a:rPr lang="en-US" sz="1100" dirty="0">
+              <a:rPr lang="en-US" sz="1400" dirty="0">
                 <a:solidFill>
                   <a:srgbClr val="C8A020"/>
                 </a:solidFill>
@@ -2389,7 +2389,7 @@
               </a:rPr>
               <a:t>Textbook pp. 134–158</a:t>
             </a:r>
-            <a:endParaRPr lang="en-US" sz="1100" dirty="0"/>
+            <a:endParaRPr lang="en-US" sz="1400" dirty="0"/>
           </a:p>
         </p:txBody>
       </p:sp>
@@ -2529,7 +2529,7 @@
               <a:buNone/>
             </a:pPr>
             <a:r>
-              <a:rPr lang="en-US" sz="1300" dirty="0">
+              <a:rPr lang="en-US" sz="1400" dirty="0">
                 <a:solidFill>
                   <a:srgbClr val="38495C"/>
                 </a:solidFill>
@@ -2539,7 +2539,7 @@
               </a:rPr>
               <a:t>Text Declamation, Emotion, and the Influence of Ancient Writings</a:t>
             </a:r>
-            <a:endParaRPr lang="en-US" sz="1300" dirty="0"/>
+            <a:endParaRPr lang="en-US" sz="1400" dirty="0"/>
           </a:p>
         </p:txBody>
       </p:sp>
@@ -2606,14 +2606,14 @@
           <a:ln/>
         </p:spPr>
         <p:txBody>
-          <a:bodyPr wrap="square" rtlCol="0" anchor="ctr"/>
-          <a:lstStyle/>
-          <a:p>
-            <a:pPr indent="0" marL="0">
-              <a:buNone/>
-            </a:pPr>
-            <a:r>
-              <a:rPr lang="en-US" sz="1200" b="1" dirty="0">
+          <a:bodyPr wrap="square" lIns="0" tIns="0" rIns="0" bIns="0" rtlCol="0" anchor="ctr"/>
+          <a:lstStyle/>
+          <a:p>
+            <a:pPr indent="0" marL="0">
+              <a:buNone/>
+            </a:pPr>
+            <a:r>
+              <a:rPr lang="en-US" sz="1400" b="1" dirty="0">
                 <a:solidFill>
                   <a:srgbClr val="2E5A5A"/>
                 </a:solidFill>
@@ -2621,9 +2621,9 @@
                 <a:ea typeface="Georgia" pitchFamily="34" charset="-122"/>
                 <a:cs typeface="Georgia" pitchFamily="34" charset="-120"/>
               </a:rPr>
-              <a:t>📣 Text Declamation 文字宣告</a:t>
-            </a:r>
-            <a:endParaRPr lang="en-US" sz="1200" dirty="0"/>
+              <a:t>■ Text Declamation 文字宣告</a:t>
+            </a:r>
+            <a:endParaRPr lang="en-US" sz="1400" dirty="0"/>
           </a:p>
         </p:txBody>
       </p:sp>
@@ -2645,14 +2645,14 @@
           <a:ln/>
         </p:spPr>
         <p:txBody>
-          <a:bodyPr wrap="square" rtlCol="0" anchor="ctr"/>
-          <a:lstStyle/>
-          <a:p>
-            <a:pPr indent="0" marL="0">
-              <a:buNone/>
-            </a:pPr>
-            <a:r>
-              <a:rPr lang="en-US" sz="900" dirty="0">
+          <a:bodyPr wrap="square" rtlCol="0" anchor="t"/>
+          <a:lstStyle/>
+          <a:p>
+            <a:pPr indent="0" marL="0">
+              <a:buNone/>
+            </a:pPr>
+            <a:r>
+              <a:rPr lang="en-US" sz="1400" dirty="0">
                 <a:solidFill>
                   <a:srgbClr val="1C2A3A"/>
                 </a:solidFill>
@@ -2662,7 +2662,7 @@
               </a:rPr>
               <a:t>formes fixes 逐漸消失 · 依文字重音與節奏作曲 · 15 世紀末期自然宣告成為準則 · 模仿對位與主調織度讓所有聲部同時宣告</a:t>
             </a:r>
-            <a:endParaRPr lang="en-US" sz="900" dirty="0"/>
+            <a:endParaRPr lang="en-US" sz="1400" dirty="0"/>
           </a:p>
         </p:txBody>
       </p:sp>
@@ -2709,14 +2709,14 @@
           <a:ln/>
         </p:spPr>
         <p:txBody>
-          <a:bodyPr wrap="square" rtlCol="0" anchor="ctr"/>
-          <a:lstStyle/>
-          <a:p>
-            <a:pPr indent="0" marL="0">
-              <a:buNone/>
-            </a:pPr>
-            <a:r>
-              <a:rPr lang="en-US" sz="1200" b="1" dirty="0">
+          <a:bodyPr wrap="square" lIns="0" tIns="0" rIns="0" bIns="0" rtlCol="0" anchor="ctr"/>
+          <a:lstStyle/>
+          <a:p>
+            <a:pPr indent="0" marL="0">
+              <a:buNone/>
+            </a:pPr>
+            <a:r>
+              <a:rPr lang="en-US" sz="1400" b="1" dirty="0">
                 <a:solidFill>
                   <a:srgbClr val="2E5A5A"/>
                 </a:solidFill>
@@ -2724,9 +2724,9 @@
                 <a:ea typeface="Georgia" pitchFamily="34" charset="-122"/>
                 <a:cs typeface="Georgia" pitchFamily="34" charset="-120"/>
               </a:rPr>
-              <a:t>💔 Emotional Expression 情感表達</a:t>
-            </a:r>
-            <a:endParaRPr lang="en-US" sz="1200" dirty="0"/>
+              <a:t>■ Emotional Expression 情感表達</a:t>
+            </a:r>
+            <a:endParaRPr lang="en-US" sz="1400" dirty="0"/>
           </a:p>
         </p:txBody>
       </p:sp>
@@ -2748,14 +2748,14 @@
           <a:ln/>
         </p:spPr>
         <p:txBody>
-          <a:bodyPr wrap="square" rtlCol="0" anchor="ctr"/>
-          <a:lstStyle/>
-          <a:p>
-            <a:pPr indent="0" marL="0">
-              <a:buNone/>
-            </a:pPr>
-            <a:r>
-              <a:rPr lang="en-US" sz="900" dirty="0">
+          <a:bodyPr wrap="square" rtlCol="0" anchor="t"/>
+          <a:lstStyle/>
+          <a:p>
+            <a:pPr indent="0" marL="0">
+              <a:buNone/>
+            </a:pPr>
+            <a:r>
+              <a:rPr lang="en-US" sz="1400" dirty="0">
                 <a:solidFill>
                   <a:srgbClr val="1C2A3A"/>
                 </a:solidFill>
@@ -2765,7 +2765,7 @@
               </a:rPr>
               <a:t>中世紀音樂少見表情意識 · 15–16 世紀起作曲家使用特定音程、和聲、旋律線條傳達文字情緒 · Cicero、Quintilian 修辭學支持</a:t>
             </a:r>
-            <a:endParaRPr lang="en-US" sz="900" dirty="0"/>
+            <a:endParaRPr lang="en-US" sz="1400" dirty="0"/>
           </a:p>
         </p:txBody>
       </p:sp>
@@ -2812,14 +2812,14 @@
           <a:ln/>
         </p:spPr>
         <p:txBody>
-          <a:bodyPr wrap="square" rtlCol="0" anchor="ctr"/>
-          <a:lstStyle/>
-          <a:p>
-            <a:pPr indent="0" marL="0">
-              <a:buNone/>
-            </a:pPr>
-            <a:r>
-              <a:rPr lang="en-US" sz="1200" b="1" dirty="0">
+          <a:bodyPr wrap="square" lIns="0" tIns="0" rIns="0" bIns="0" rtlCol="0" anchor="ctr"/>
+          <a:lstStyle/>
+          <a:p>
+            <a:pPr indent="0" marL="0">
+              <a:buNone/>
+            </a:pPr>
+            <a:r>
+              <a:rPr lang="en-US" sz="1400" b="1" dirty="0">
                 <a:solidFill>
                   <a:srgbClr val="2E5A5A"/>
                 </a:solidFill>
@@ -2827,9 +2827,9 @@
                 <a:ea typeface="Georgia" pitchFamily="34" charset="-122"/>
                 <a:cs typeface="Georgia" pitchFamily="34" charset="-120"/>
               </a:rPr>
-              <a:t>🎭 Expressive Power of Modes</a:t>
-            </a:r>
-            <a:endParaRPr lang="en-US" sz="1200" dirty="0"/>
+              <a:t>■ Expressive Power of Modes</a:t>
+            </a:r>
+            <a:endParaRPr lang="en-US" sz="1400" dirty="0"/>
           </a:p>
         </p:txBody>
       </p:sp>
@@ -2851,14 +2851,14 @@
           <a:ln/>
         </p:spPr>
         <p:txBody>
-          <a:bodyPr wrap="square" rtlCol="0" anchor="ctr"/>
-          <a:lstStyle/>
-          <a:p>
-            <a:pPr indent="0" marL="0">
-              <a:buNone/>
-            </a:pPr>
-            <a:r>
-              <a:rPr lang="en-US" sz="900" dirty="0">
+          <a:bodyPr wrap="square" rtlCol="0" anchor="t"/>
+          <a:lstStyle/>
+          <a:p>
+            <a:pPr indent="0" marL="0">
+              <a:buNone/>
+            </a:pPr>
+            <a:r>
+              <a:rPr lang="en-US" sz="1400" dirty="0">
                 <a:solidFill>
                   <a:srgbClr val="1C2A3A"/>
                 </a:solidFill>
@@ -2868,7 +2868,7 @@
               </a:rPr>
               <a:t>Plato、Aristotle 認為各 harmoniai 具不同 ethos · 作曲家據古代權威選擇調式傳達情感 · 後來延伸至大小調、各調性格的觀念</a:t>
             </a:r>
-            <a:endParaRPr lang="en-US" sz="900" dirty="0"/>
+            <a:endParaRPr lang="en-US" sz="1400" dirty="0"/>
           </a:p>
         </p:txBody>
       </p:sp>
@@ -2915,14 +2915,14 @@
           <a:ln/>
         </p:spPr>
         <p:txBody>
-          <a:bodyPr wrap="square" rtlCol="0" anchor="ctr"/>
-          <a:lstStyle/>
-          <a:p>
-            <a:pPr indent="0" marL="0">
-              <a:buNone/>
-            </a:pPr>
-            <a:r>
-              <a:rPr lang="en-US" sz="1200" b="1" dirty="0">
+          <a:bodyPr wrap="square" lIns="0" tIns="0" rIns="0" bIns="0" rtlCol="0" anchor="ctr"/>
+          <a:lstStyle/>
+          <a:p>
+            <a:pPr indent="0" marL="0">
+              <a:buNone/>
+            </a:pPr>
+            <a:r>
+              <a:rPr lang="en-US" sz="1400" b="1" dirty="0">
                 <a:solidFill>
                   <a:srgbClr val="2E5A5A"/>
                 </a:solidFill>
@@ -2930,9 +2930,9 @@
                 <a:ea typeface="Georgia" pitchFamily="34" charset="-122"/>
                 <a:cs typeface="Georgia" pitchFamily="34" charset="-120"/>
               </a:rPr>
-              <a:t>♯ Chromaticism 半音主義</a:t>
-            </a:r>
-            <a:endParaRPr lang="en-US" sz="1200" dirty="0"/>
+              <a:t>■ Chromaticism 半音主義</a:t>
+            </a:r>
+            <a:endParaRPr lang="en-US" sz="1400" dirty="0"/>
           </a:p>
         </p:txBody>
       </p:sp>
@@ -2954,14 +2954,14 @@
           <a:ln/>
         </p:spPr>
         <p:txBody>
-          <a:bodyPr wrap="square" rtlCol="0" anchor="ctr"/>
-          <a:lstStyle/>
-          <a:p>
-            <a:pPr indent="0" marL="0">
-              <a:buNone/>
-            </a:pPr>
-            <a:r>
-              <a:rPr lang="en-US" sz="900" dirty="0">
+          <a:bodyPr wrap="square" rtlCol="0" anchor="t"/>
+          <a:lstStyle/>
+          <a:p>
+            <a:pPr indent="0" marL="0">
+              <a:buNone/>
+            </a:pPr>
+            <a:r>
+              <a:rPr lang="en-US" sz="1400" dirty="0">
                 <a:solidFill>
                   <a:srgbClr val="1C2A3A"/>
                 </a:solidFill>
@@ -2969,9 +2969,9 @@
                 <a:ea typeface="Calibri" pitchFamily="34" charset="-122"/>
                 <a:cs typeface="Calibri" pitchFamily="34" charset="-120"/>
               </a:rPr>
-              <a:t>古希臘 chromatic genus 啟發 · 16 世紀中葉作曲家開始使用直接半音進行（如 B→B♭）作為表情手法 · Gregorian 以來首見</a:t>
-            </a:r>
-            <a:endParaRPr lang="en-US" sz="900" dirty="0"/>
+              <a:t>古希臘 chromatic genus 啟發 · 16 世紀中葉作曲家開始使用直接半音進行（如 B→B■）作為表情手法 · Gregorian 以來首見</a:t>
+            </a:r>
+            <a:endParaRPr lang="en-US" sz="1400" dirty="0"/>
           </a:p>
         </p:txBody>
       </p:sp>
@@ -3111,7 +3111,7 @@
               <a:buNone/>
             </a:pPr>
             <a:r>
-              <a:rPr lang="en-US" sz="1300" dirty="0">
+              <a:rPr lang="en-US" sz="1400" dirty="0">
                 <a:solidFill>
                   <a:srgbClr val="E8D8A8"/>
                 </a:solidFill>
@@ -3121,7 +3121,7 @@
               </a:rPr>
               <a:t>Petrucci · Attaingnant · The Technological Revolution</a:t>
             </a:r>
-            <a:endParaRPr lang="en-US" sz="1300" dirty="0"/>
+            <a:endParaRPr lang="en-US" sz="1400" dirty="0"/>
           </a:p>
         </p:txBody>
       </p:sp>
@@ -3174,23 +3174,23 @@
         <p:spPr>
           <a:xfrm>
             <a:off x="411480" y="1261872"/>
-            <a:ext cx="8321040" cy="292608"/>
-          </a:xfrm>
-          <a:prstGeom prst="rect">
-            <a:avLst/>
-          </a:prstGeom>
-          <a:noFill/>
-          <a:ln/>
-        </p:spPr>
-        <p:txBody>
-          <a:bodyPr wrap="square" rtlCol="0" anchor="ctr"/>
-          <a:lstStyle/>
-          <a:p>
-            <a:pPr indent="0" marL="0">
-              <a:buNone/>
-            </a:pPr>
-            <a:r>
-              <a:rPr lang="en-US" sz="1300" b="1" dirty="0">
+            <a:ext cx="8321040" cy="365760"/>
+          </a:xfrm>
+          <a:prstGeom prst="rect">
+            <a:avLst/>
+          </a:prstGeom>
+          <a:noFill/>
+          <a:ln/>
+        </p:spPr>
+        <p:txBody>
+          <a:bodyPr wrap="square" lIns="0" tIns="0" rIns="0" bIns="0" rtlCol="0" anchor="ctr"/>
+          <a:lstStyle/>
+          <a:p>
+            <a:pPr indent="0" marL="0">
+              <a:buNone/>
+            </a:pPr>
+            <a:r>
+              <a:rPr lang="en-US" sz="1400" b="1" dirty="0">
                 <a:solidFill>
                   <a:srgbClr val="C8A020"/>
                 </a:solidFill>
@@ -3198,9 +3198,9 @@
                 <a:ea typeface="Georgia" pitchFamily="34" charset="-122"/>
                 <a:cs typeface="Georgia" pitchFamily="34" charset="-120"/>
               </a:rPr>
-              <a:t>🖨 印刷技術的發展 Development of Printing Technology</a:t>
-            </a:r>
-            <a:endParaRPr lang="en-US" sz="1300" dirty="0"/>
+              <a:t>■ 印刷技術的發展 Development of Printing Technology</a:t>
+            </a:r>
+            <a:endParaRPr lang="en-US" sz="1400" dirty="0"/>
           </a:p>
         </p:txBody>
       </p:sp>
@@ -3212,27 +3212,27 @@
         </p:nvSpPr>
         <p:spPr>
           <a:xfrm>
-            <a:off x="457200" y="1572768"/>
-            <a:ext cx="8229600" cy="1280160"/>
-          </a:xfrm>
-          <a:prstGeom prst="rect">
-            <a:avLst/>
-          </a:prstGeom>
-          <a:noFill/>
-          <a:ln/>
-        </p:spPr>
-        <p:txBody>
-          <a:bodyPr wrap="square" rtlCol="0" anchor="ctr"/>
+            <a:off x="457200" y="1719072"/>
+            <a:ext cx="8229600" cy="1133856"/>
+          </a:xfrm>
+          <a:prstGeom prst="rect">
+            <a:avLst/>
+          </a:prstGeom>
+          <a:noFill/>
+          <a:ln/>
+        </p:spPr>
+        <p:txBody>
+          <a:bodyPr wrap="square" rtlCol="0" anchor="t"/>
           <a:lstStyle/>
           <a:p>
             <a:pPr indent="0" marL="0">
               <a:spcAft>
-                <a:spcPts val="200"/>
+                <a:spcPts val="100"/>
               </a:spcAft>
               <a:buNone/>
             </a:pPr>
             <a:r>
-              <a:rPr lang="en-US" sz="900" dirty="0">
+              <a:rPr lang="en-US" sz="1400" dirty="0">
                 <a:solidFill>
                   <a:srgbClr val="E8D8A8"/>
                 </a:solidFill>
@@ -3242,17 +3242,17 @@
               </a:rPr>
               <a:t>• ca. 1450：Johann Gutenberg 在歐洲完善活字印刷術</a:t>
             </a:r>
-            <a:endParaRPr lang="en-US" sz="900" dirty="0"/>
+            <a:endParaRPr lang="en-US" sz="1400" dirty="0"/>
           </a:p>
           <a:p>
             <a:pPr indent="0" marL="0">
               <a:spcAft>
-                <a:spcPts val="200"/>
+                <a:spcPts val="100"/>
               </a:spcAft>
               <a:buNone/>
             </a:pPr>
             <a:r>
-              <a:rPr lang="en-US" sz="900" dirty="0">
+              <a:rPr lang="en-US" sz="1400" dirty="0">
                 <a:solidFill>
                   <a:srgbClr val="E8D8A8"/>
                 </a:solidFill>
@@ -3262,17 +3262,17 @@
               </a:rPr>
               <a:t>• 1470s：活字首次用於音樂——禮拜用書的 chant 記譜</a:t>
             </a:r>
-            <a:endParaRPr lang="en-US" sz="900" dirty="0"/>
+            <a:endParaRPr lang="en-US" sz="1400" dirty="0"/>
           </a:p>
           <a:p>
             <a:pPr indent="0" marL="0">
               <a:spcAft>
-                <a:spcPts val="200"/>
+                <a:spcPts val="100"/>
               </a:spcAft>
               <a:buNone/>
             </a:pPr>
             <a:r>
-              <a:rPr lang="en-US" sz="900" dirty="0">
+              <a:rPr lang="en-US" sz="1400" dirty="0">
                 <a:solidFill>
                   <a:srgbClr val="E8D8A8"/>
                 </a:solidFill>
@@ -3282,17 +3282,17 @@
               </a:rPr>
               <a:t>• 1501：Ottaviano Petrucci（1466–1539）在威尼斯出版 Harmonice musices odhecaton A——第一本完全用活字印刷的複音樂譜（96 首作品）</a:t>
             </a:r>
-            <a:endParaRPr lang="en-US" sz="900" dirty="0"/>
+            <a:endParaRPr lang="en-US" sz="1400" dirty="0"/>
           </a:p>
           <a:p>
             <a:pPr indent="0" marL="0">
               <a:spcAft>
-                <a:spcPts val="200"/>
+                <a:spcPts val="100"/>
               </a:spcAft>
               <a:buNone/>
             </a:pPr>
             <a:r>
-              <a:rPr lang="en-US" sz="900" dirty="0">
+              <a:rPr lang="en-US" sz="1400" dirty="0">
                 <a:solidFill>
                   <a:srgbClr val="E8D8A8"/>
                 </a:solidFill>
@@ -3302,17 +3302,17 @@
               </a:rPr>
               <a:t>  三次壓印：譜線、文字、音符與花體字母分三次印刷——費時但精美</a:t>
             </a:r>
-            <a:endParaRPr lang="en-US" sz="900" dirty="0"/>
+            <a:endParaRPr lang="en-US" sz="1400" dirty="0"/>
           </a:p>
           <a:p>
             <a:pPr indent="0" marL="0">
               <a:spcAft>
-                <a:spcPts val="200"/>
+                <a:spcPts val="100"/>
               </a:spcAft>
               <a:buNone/>
             </a:pPr>
             <a:r>
-              <a:rPr lang="en-US" sz="900" dirty="0">
+              <a:rPr lang="en-US" sz="1400" dirty="0">
                 <a:solidFill>
                   <a:srgbClr val="E8D8A8"/>
                 </a:solidFill>
@@ -3322,17 +3322,17 @@
               </a:rPr>
               <a:t>• ca. 1520：John Rastell 在倫敦首創「單次壓印」</a:t>
             </a:r>
-            <a:endParaRPr lang="en-US" sz="900" dirty="0"/>
+            <a:endParaRPr lang="en-US" sz="1400" dirty="0"/>
           </a:p>
           <a:p>
             <a:pPr indent="0" marL="0">
               <a:spcAft>
-                <a:spcPts val="200"/>
+                <a:spcPts val="100"/>
               </a:spcAft>
               <a:buNone/>
             </a:pPr>
             <a:r>
-              <a:rPr lang="en-US" sz="900" dirty="0">
+              <a:rPr lang="en-US" sz="1400" dirty="0">
                 <a:solidFill>
                   <a:srgbClr val="E8D8A8"/>
                 </a:solidFill>
@@ -3342,7 +3342,7 @@
               </a:rPr>
               <a:t>• 1528：Pierre Attaingnant（ca. 1494–1551/52）在巴黎大規模使用單次壓印——譜線斷續但便宜實用——成為後續標準</a:t>
             </a:r>
-            <a:endParaRPr lang="en-US" sz="900" dirty="0"/>
+            <a:endParaRPr lang="en-US" sz="1400" dirty="0"/>
           </a:p>
         </p:txBody>
       </p:sp>
@@ -3375,23 +3375,23 @@
         <p:spPr>
           <a:xfrm>
             <a:off x="411480" y="3044952"/>
-            <a:ext cx="8321040" cy="292608"/>
-          </a:xfrm>
-          <a:prstGeom prst="rect">
-            <a:avLst/>
-          </a:prstGeom>
-          <a:noFill/>
-          <a:ln/>
-        </p:spPr>
-        <p:txBody>
-          <a:bodyPr wrap="square" rtlCol="0" anchor="ctr"/>
-          <a:lstStyle/>
-          <a:p>
-            <a:pPr indent="0" marL="0">
-              <a:buNone/>
-            </a:pPr>
-            <a:r>
-              <a:rPr lang="en-US" sz="1300" b="1" dirty="0">
+            <a:ext cx="8321040" cy="365760"/>
+          </a:xfrm>
+          <a:prstGeom prst="rect">
+            <a:avLst/>
+          </a:prstGeom>
+          <a:noFill/>
+          <a:ln/>
+        </p:spPr>
+        <p:txBody>
+          <a:bodyPr wrap="square" lIns="0" tIns="0" rIns="0" bIns="0" rtlCol="0" anchor="ctr"/>
+          <a:lstStyle/>
+          <a:p>
+            <a:pPr indent="0" marL="0">
+              <a:buNone/>
+            </a:pPr>
+            <a:r>
+              <a:rPr lang="en-US" sz="1400" b="1" dirty="0">
                 <a:solidFill>
                   <a:srgbClr val="C8A020"/>
                 </a:solidFill>
@@ -3399,9 +3399,9 @@
                 <a:ea typeface="Georgia" pitchFamily="34" charset="-122"/>
                 <a:cs typeface="Georgia" pitchFamily="34" charset="-120"/>
               </a:rPr>
-              <a:t>💡 印刷術的衝擊 Impact of Music Printing</a:t>
-            </a:r>
-            <a:endParaRPr lang="en-US" sz="1300" dirty="0"/>
+              <a:t>■ 印刷術的衝擊 Impact of Music Printing</a:t>
+            </a:r>
+            <a:endParaRPr lang="en-US" sz="1400" dirty="0"/>
           </a:p>
         </p:txBody>
       </p:sp>
@@ -3413,27 +3413,27 @@
         </p:nvSpPr>
         <p:spPr>
           <a:xfrm>
-            <a:off x="457200" y="3337560"/>
-            <a:ext cx="8229600" cy="1417320"/>
-          </a:xfrm>
-          <a:prstGeom prst="rect">
-            <a:avLst/>
-          </a:prstGeom>
-          <a:noFill/>
-          <a:ln/>
-        </p:spPr>
-        <p:txBody>
-          <a:bodyPr wrap="square" rtlCol="0" anchor="ctr"/>
+            <a:off x="457200" y="3502152"/>
+            <a:ext cx="8229600" cy="1252728"/>
+          </a:xfrm>
+          <a:prstGeom prst="rect">
+            <a:avLst/>
+          </a:prstGeom>
+          <a:noFill/>
+          <a:ln/>
+        </p:spPr>
+        <p:txBody>
+          <a:bodyPr wrap="square" rtlCol="0" anchor="t"/>
           <a:lstStyle/>
           <a:p>
             <a:pPr indent="0" marL="0">
               <a:spcAft>
-                <a:spcPts val="200"/>
+                <a:spcPts val="100"/>
               </a:spcAft>
               <a:buNone/>
             </a:pPr>
             <a:r>
-              <a:rPr lang="en-US" sz="900" dirty="0">
+              <a:rPr lang="en-US" sz="1400" dirty="0">
                 <a:solidFill>
                   <a:srgbClr val="E8D8A8"/>
                 </a:solidFill>
@@ -3443,17 +3443,17 @@
               </a:rPr>
               <a:t>• 樂譜價格大幅降低——業餘愛好者可負擔</a:t>
             </a:r>
-            <a:endParaRPr lang="en-US" sz="900" dirty="0"/>
+            <a:endParaRPr lang="en-US" sz="1400" dirty="0"/>
           </a:p>
           <a:p>
             <a:pPr indent="0" marL="0">
               <a:spcAft>
-                <a:spcPts val="200"/>
+                <a:spcPts val="100"/>
               </a:spcAft>
               <a:buNone/>
             </a:pPr>
             <a:r>
-              <a:rPr lang="en-US" sz="900" dirty="0">
+              <a:rPr lang="en-US" sz="1400" dirty="0">
                 <a:solidFill>
                   <a:srgbClr val="E8D8A8"/>
                 </a:solidFill>
@@ -3461,19 +3461,19 @@
                 <a:ea typeface="Calibri" pitchFamily="34" charset="-122"/>
                 <a:cs typeface="Calibri" pitchFamily="34" charset="-120"/>
               </a:rPr>
-              <a:t>• 音樂識讀能力普及——中產階級家庭成為音樂活動場域</a:t>
-            </a:r>
-            <a:endParaRPr lang="en-US" sz="900" dirty="0"/>
+              <a:t>• 音樂識讀能力普及——中產階級家庭成為音樂場域</a:t>
+            </a:r>
+            <a:endParaRPr lang="en-US" sz="1400" dirty="0"/>
           </a:p>
           <a:p>
             <a:pPr indent="0" marL="0">
               <a:spcAft>
-                <a:spcPts val="200"/>
+                <a:spcPts val="100"/>
               </a:spcAft>
               <a:buNone/>
             </a:pPr>
             <a:r>
-              <a:rPr lang="en-US" sz="900" dirty="0">
+              <a:rPr lang="en-US" sz="1400" dirty="0">
                 <a:solidFill>
                   <a:srgbClr val="E8D8A8"/>
                 </a:solidFill>
@@ -3481,19 +3481,19 @@
                 <a:ea typeface="Calibri" pitchFamily="34" charset="-122"/>
                 <a:cs typeface="Calibri" pitchFamily="34" charset="-120"/>
               </a:rPr>
-              <a:t>• 作曲家的名聲可跨越地域傳播——音樂作為「作品」概念成形</a:t>
-            </a:r>
-            <a:endParaRPr lang="en-US" sz="900" dirty="0"/>
+              <a:t>• 作曲家名聲跨越地域——音樂「作品」概念成形</a:t>
+            </a:r>
+            <a:endParaRPr lang="en-US" sz="1400" dirty="0"/>
           </a:p>
           <a:p>
             <a:pPr indent="0" marL="0">
               <a:spcAft>
-                <a:spcPts val="200"/>
+                <a:spcPts val="100"/>
               </a:spcAft>
               <a:buNone/>
             </a:pPr>
             <a:r>
-              <a:rPr lang="en-US" sz="900" dirty="0">
+              <a:rPr lang="en-US" sz="1400" dirty="0">
                 <a:solidFill>
                   <a:srgbClr val="E8D8A8"/>
                 </a:solidFill>
@@ -3501,19 +3501,19 @@
                 <a:ea typeface="Calibri" pitchFamily="34" charset="-122"/>
                 <a:cs typeface="Calibri" pitchFamily="34" charset="-120"/>
               </a:rPr>
-              <a:t>• 新音樂類型蓬勃發展：國家語言的 madrigal、frottola、chanson、villancico、lute song</a:t>
-            </a:r>
-            <a:endParaRPr lang="en-US" sz="900" dirty="0"/>
+              <a:t>• 新類型蓬勃：madrigal、chanson、villancico、lute song</a:t>
+            </a:r>
+            <a:endParaRPr lang="en-US" sz="1400" dirty="0"/>
           </a:p>
           <a:p>
             <a:pPr indent="0" marL="0">
               <a:spcAft>
-                <a:spcPts val="200"/>
+                <a:spcPts val="100"/>
               </a:spcAft>
               <a:buNone/>
             </a:pPr>
             <a:r>
-              <a:rPr lang="en-US" sz="900" dirty="0">
+              <a:rPr lang="en-US" sz="1400" dirty="0">
                 <a:solidFill>
                   <a:srgbClr val="E8D8A8"/>
                 </a:solidFill>
@@ -3521,19 +3521,19 @@
                 <a:ea typeface="Calibri" pitchFamily="34" charset="-122"/>
                 <a:cs typeface="Calibri" pitchFamily="34" charset="-120"/>
               </a:rPr>
-              <a:t>• 記譜器樂音樂首次大量問世：variations、prelude、toccata、ricercare、canzona、sonata</a:t>
-            </a:r>
-            <a:endParaRPr lang="en-US" sz="900" dirty="0"/>
+              <a:t>• 器樂譜首次大量問世：toccata、ricercare、canzona</a:t>
+            </a:r>
+            <a:endParaRPr lang="en-US" sz="1400" dirty="0"/>
           </a:p>
           <a:p>
             <a:pPr indent="0" marL="0">
               <a:spcAft>
-                <a:spcPts val="200"/>
+                <a:spcPts val="100"/>
               </a:spcAft>
               <a:buNone/>
             </a:pPr>
             <a:r>
-              <a:rPr lang="en-US" sz="900" dirty="0">
+              <a:rPr lang="en-US" sz="1400" dirty="0">
                 <a:solidFill>
                   <a:srgbClr val="E8D8A8"/>
                 </a:solidFill>
@@ -3541,19 +3541,19 @@
                 <a:ea typeface="Calibri" pitchFamily="34" charset="-122"/>
                 <a:cs typeface="Calibri" pitchFamily="34" charset="-120"/>
               </a:rPr>
-              <a:t>• 16 世紀末印刷中心：Venice、Paris、Rome、Nuremberg、Lyons、Louvain、Antwerp、London</a:t>
-            </a:r>
-            <a:endParaRPr lang="en-US" sz="900" dirty="0"/>
+              <a:t>• 印刷中心：Venice、Paris、Rome、Nuremberg、London</a:t>
+            </a:r>
+            <a:endParaRPr lang="en-US" sz="1400" dirty="0"/>
           </a:p>
           <a:p>
             <a:pPr indent="0" marL="0">
               <a:spcAft>
-                <a:spcPts val="200"/>
+                <a:spcPts val="100"/>
               </a:spcAft>
               <a:buNone/>
             </a:pPr>
             <a:r>
-              <a:rPr lang="en-US" sz="900" dirty="0">
+              <a:rPr lang="en-US" sz="1400" dirty="0">
                 <a:solidFill>
                   <a:srgbClr val="E8D8A8"/>
                 </a:solidFill>
@@ -3561,9 +3561,9 @@
                 <a:ea typeface="Calibri" pitchFamily="34" charset="-122"/>
                 <a:cs typeface="Calibri" pitchFamily="34" charset="-120"/>
               </a:rPr>
-              <a:t>• 宗教改革借助印刷——Protestant 與 Catholic 新音樂類型（chorale、anthem、metrical psalm）快速流傳</a:t>
-            </a:r>
-            <a:endParaRPr lang="en-US" sz="900" dirty="0"/>
+              <a:t>• 宗教改革借助印刷快速傳播新音樂類型</a:t>
+            </a:r>
+            <a:endParaRPr lang="en-US" sz="1400" dirty="0"/>
           </a:p>
         </p:txBody>
       </p:sp>
@@ -3741,14 +3741,14 @@
           <a:ln/>
         </p:spPr>
         <p:txBody>
-          <a:bodyPr wrap="square" rtlCol="0" anchor="ctr"/>
-          <a:lstStyle/>
-          <a:p>
-            <a:pPr indent="0" marL="0">
-              <a:buNone/>
-            </a:pPr>
-            <a:r>
-              <a:rPr lang="en-US" sz="1200" b="1" dirty="0">
+          <a:bodyPr wrap="square" lIns="0" tIns="0" rIns="0" bIns="0" rtlCol="0" anchor="ctr"/>
+          <a:lstStyle/>
+          <a:p>
+            <a:pPr indent="0" marL="0">
+              <a:buNone/>
+            </a:pPr>
+            <a:r>
+              <a:rPr lang="en-US" sz="1400" b="1" dirty="0">
                 <a:solidFill>
                   <a:srgbClr val="7A2830"/>
                 </a:solidFill>
@@ -3758,7 +3758,7 @@
               </a:rPr>
               <a:t>Johannes Tinctoris</a:t>
             </a:r>
-            <a:endParaRPr lang="en-US" sz="1200" dirty="0"/>
+            <a:endParaRPr lang="en-US" sz="1400" dirty="0"/>
           </a:p>
         </p:txBody>
       </p:sp>
@@ -3787,7 +3787,7 @@
               <a:buNone/>
             </a:pPr>
             <a:r>
-              <a:rPr lang="en-US" sz="900" dirty="0">
+              <a:rPr lang="en-US" sz="1400" dirty="0">
                 <a:solidFill>
                   <a:srgbClr val="38495C"/>
                 </a:solidFill>
@@ -3797,7 +3797,7 @@
               </a:rPr>
               <a:t>ca. 1435–1511</a:t>
             </a:r>
-            <a:endParaRPr lang="en-US" sz="900" dirty="0"/>
+            <a:endParaRPr lang="en-US" sz="1400" dirty="0"/>
           </a:p>
         </p:txBody>
       </p:sp>
@@ -3819,14 +3819,14 @@
           <a:ln/>
         </p:spPr>
         <p:txBody>
-          <a:bodyPr wrap="square" rtlCol="0" anchor="ctr"/>
-          <a:lstStyle/>
-          <a:p>
-            <a:pPr indent="0" marL="0">
-              <a:buNone/>
-            </a:pPr>
-            <a:r>
-              <a:rPr lang="en-US" sz="850" dirty="0">
+          <a:bodyPr wrap="square" rtlCol="0" anchor="t"/>
+          <a:lstStyle/>
+          <a:p>
+            <a:pPr indent="0" marL="0">
+              <a:buNone/>
+            </a:pPr>
+            <a:r>
+              <a:rPr lang="en-US" sz="1400" dirty="0">
                 <a:solidFill>
                   <a:srgbClr val="1C2A3A"/>
                 </a:solidFill>
@@ -3836,7 +3836,7 @@
               </a:rPr>
               <a:t>Liber de arte contrapuncti (1477) · 12 部論著 · 新對位法典範</a:t>
             </a:r>
-            <a:endParaRPr lang="en-US" sz="850" dirty="0"/>
+            <a:endParaRPr lang="en-US" sz="1400" dirty="0"/>
           </a:p>
         </p:txBody>
       </p:sp>
@@ -3883,14 +3883,14 @@
           <a:ln/>
         </p:spPr>
         <p:txBody>
-          <a:bodyPr wrap="square" rtlCol="0" anchor="ctr"/>
-          <a:lstStyle/>
-          <a:p>
-            <a:pPr indent="0" marL="0">
-              <a:buNone/>
-            </a:pPr>
-            <a:r>
-              <a:rPr lang="en-US" sz="1200" b="1" dirty="0">
+          <a:bodyPr wrap="square" lIns="0" tIns="0" rIns="0" bIns="0" rtlCol="0" anchor="ctr"/>
+          <a:lstStyle/>
+          <a:p>
+            <a:pPr indent="0" marL="0">
+              <a:buNone/>
+            </a:pPr>
+            <a:r>
+              <a:rPr lang="en-US" sz="1400" b="1" dirty="0">
                 <a:solidFill>
                   <a:srgbClr val="7A2830"/>
                 </a:solidFill>
@@ -3900,7 +3900,7 @@
               </a:rPr>
               <a:t>Franchino Gaffurio</a:t>
             </a:r>
-            <a:endParaRPr lang="en-US" sz="1200" dirty="0"/>
+            <a:endParaRPr lang="en-US" sz="1400" dirty="0"/>
           </a:p>
         </p:txBody>
       </p:sp>
@@ -3929,7 +3929,7 @@
               <a:buNone/>
             </a:pPr>
             <a:r>
-              <a:rPr lang="en-US" sz="900" dirty="0">
+              <a:rPr lang="en-US" sz="1400" dirty="0">
                 <a:solidFill>
                   <a:srgbClr val="38495C"/>
                 </a:solidFill>
@@ -3939,7 +3939,7 @@
               </a:rPr>
               <a:t>1451–1522</a:t>
             </a:r>
-            <a:endParaRPr lang="en-US" sz="900" dirty="0"/>
+            <a:endParaRPr lang="en-US" sz="1400" dirty="0"/>
           </a:p>
         </p:txBody>
       </p:sp>
@@ -3961,14 +3961,14 @@
           <a:ln/>
         </p:spPr>
         <p:txBody>
-          <a:bodyPr wrap="square" rtlCol="0" anchor="ctr"/>
-          <a:lstStyle/>
-          <a:p>
-            <a:pPr indent="0" marL="0">
-              <a:buNone/>
-            </a:pPr>
-            <a:r>
-              <a:rPr lang="en-US" sz="850" dirty="0">
+          <a:bodyPr wrap="square" rtlCol="0" anchor="t"/>
+          <a:lstStyle/>
+          <a:p>
+            <a:pPr indent="0" marL="0">
+              <a:buNone/>
+            </a:pPr>
+            <a:r>
+              <a:rPr lang="en-US" sz="1400" dirty="0">
                 <a:solidFill>
                   <a:srgbClr val="1C2A3A"/>
                 </a:solidFill>
@@ -3978,7 +3978,7 @@
               </a:rPr>
               <a:t>Theorica musice (1492) · 融合古希臘理論與當代實踐</a:t>
             </a:r>
-            <a:endParaRPr lang="en-US" sz="850" dirty="0"/>
+            <a:endParaRPr lang="en-US" sz="1400" dirty="0"/>
           </a:p>
         </p:txBody>
       </p:sp>
@@ -4025,14 +4025,14 @@
           <a:ln/>
         </p:spPr>
         <p:txBody>
-          <a:bodyPr wrap="square" rtlCol="0" anchor="ctr"/>
-          <a:lstStyle/>
-          <a:p>
-            <a:pPr indent="0" marL="0">
-              <a:buNone/>
-            </a:pPr>
-            <a:r>
-              <a:rPr lang="en-US" sz="1200" b="1" dirty="0">
+          <a:bodyPr wrap="square" lIns="0" tIns="0" rIns="0" bIns="0" rtlCol="0" anchor="ctr"/>
+          <a:lstStyle/>
+          <a:p>
+            <a:pPr indent="0" marL="0">
+              <a:buNone/>
+            </a:pPr>
+            <a:r>
+              <a:rPr lang="en-US" sz="1400" b="1" dirty="0">
                 <a:solidFill>
                   <a:srgbClr val="7A2830"/>
                 </a:solidFill>
@@ -4042,7 +4042,7 @@
               </a:rPr>
               <a:t>Pietro Aaron</a:t>
             </a:r>
-            <a:endParaRPr lang="en-US" sz="1200" dirty="0"/>
+            <a:endParaRPr lang="en-US" sz="1400" dirty="0"/>
           </a:p>
         </p:txBody>
       </p:sp>
@@ -4071,7 +4071,7 @@
               <a:buNone/>
             </a:pPr>
             <a:r>
-              <a:rPr lang="en-US" sz="900" dirty="0">
+              <a:rPr lang="en-US" sz="1400" dirty="0">
                 <a:solidFill>
                   <a:srgbClr val="38495C"/>
                 </a:solidFill>
@@ -4081,7 +4081,7 @@
               </a:rPr>
               <a:t>ca. 1480–ca. 1550</a:t>
             </a:r>
-            <a:endParaRPr lang="en-US" sz="900" dirty="0"/>
+            <a:endParaRPr lang="en-US" sz="1400" dirty="0"/>
           </a:p>
         </p:txBody>
       </p:sp>
@@ -4103,14 +4103,14 @@
           <a:ln/>
         </p:spPr>
         <p:txBody>
-          <a:bodyPr wrap="square" rtlCol="0" anchor="ctr"/>
-          <a:lstStyle/>
-          <a:p>
-            <a:pPr indent="0" marL="0">
-              <a:buNone/>
-            </a:pPr>
-            <a:r>
-              <a:rPr lang="en-US" sz="850" dirty="0">
+          <a:bodyPr wrap="square" rtlCol="0" anchor="t"/>
+          <a:lstStyle/>
+          <a:p>
+            <a:pPr indent="0" marL="0">
+              <a:buNone/>
+            </a:pPr>
+            <a:r>
+              <a:rPr lang="en-US" sz="1400" dirty="0">
                 <a:solidFill>
                   <a:srgbClr val="1C2A3A"/>
                 </a:solidFill>
@@ -4120,7 +4120,7 @@
               </a:rPr>
               <a:t>Toscanello in musica (1523) · 首位以義大利文寫作的理論家</a:t>
             </a:r>
-            <a:endParaRPr lang="en-US" sz="850" dirty="0"/>
+            <a:endParaRPr lang="en-US" sz="1400" dirty="0"/>
           </a:p>
         </p:txBody>
       </p:sp>
@@ -4167,14 +4167,14 @@
           <a:ln/>
         </p:spPr>
         <p:txBody>
-          <a:bodyPr wrap="square" rtlCol="0" anchor="ctr"/>
-          <a:lstStyle/>
-          <a:p>
-            <a:pPr indent="0" marL="0">
-              <a:buNone/>
-            </a:pPr>
-            <a:r>
-              <a:rPr lang="en-US" sz="1200" b="1" dirty="0">
+          <a:bodyPr wrap="square" lIns="0" tIns="0" rIns="0" bIns="0" rtlCol="0" anchor="ctr"/>
+          <a:lstStyle/>
+          <a:p>
+            <a:pPr indent="0" marL="0">
+              <a:buNone/>
+            </a:pPr>
+            <a:r>
+              <a:rPr lang="en-US" sz="1400" b="1" dirty="0">
                 <a:solidFill>
                   <a:srgbClr val="7A2830"/>
                 </a:solidFill>
@@ -4184,7 +4184,7 @@
               </a:rPr>
               <a:t>Heinrich Glareanus</a:t>
             </a:r>
-            <a:endParaRPr lang="en-US" sz="1200" dirty="0"/>
+            <a:endParaRPr lang="en-US" sz="1400" dirty="0"/>
           </a:p>
         </p:txBody>
       </p:sp>
@@ -4213,7 +4213,7 @@
               <a:buNone/>
             </a:pPr>
             <a:r>
-              <a:rPr lang="en-US" sz="900" dirty="0">
+              <a:rPr lang="en-US" sz="1400" dirty="0">
                 <a:solidFill>
                   <a:srgbClr val="38495C"/>
                 </a:solidFill>
@@ -4223,7 +4223,7 @@
               </a:rPr>
               <a:t>1488–1563</a:t>
             </a:r>
-            <a:endParaRPr lang="en-US" sz="900" dirty="0"/>
+            <a:endParaRPr lang="en-US" sz="1400" dirty="0"/>
           </a:p>
         </p:txBody>
       </p:sp>
@@ -4245,14 +4245,14 @@
           <a:ln/>
         </p:spPr>
         <p:txBody>
-          <a:bodyPr wrap="square" rtlCol="0" anchor="ctr"/>
-          <a:lstStyle/>
-          <a:p>
-            <a:pPr indent="0" marL="0">
-              <a:buNone/>
-            </a:pPr>
-            <a:r>
-              <a:rPr lang="en-US" sz="850" dirty="0">
+          <a:bodyPr wrap="square" rtlCol="0" anchor="t"/>
+          <a:lstStyle/>
+          <a:p>
+            <a:pPr indent="0" marL="0">
+              <a:buNone/>
+            </a:pPr>
+            <a:r>
+              <a:rPr lang="en-US" sz="1400" dirty="0">
                 <a:solidFill>
                   <a:srgbClr val="1C2A3A"/>
                 </a:solidFill>
@@ -4262,7 +4262,7 @@
               </a:rPr>
               <a:t>Dodecachordon (1547) · 新增 Aeolian、Ionian 四個調式</a:t>
             </a:r>
-            <a:endParaRPr lang="en-US" sz="850" dirty="0"/>
+            <a:endParaRPr lang="en-US" sz="1400" dirty="0"/>
           </a:p>
         </p:txBody>
       </p:sp>
@@ -4309,14 +4309,14 @@
           <a:ln/>
         </p:spPr>
         <p:txBody>
-          <a:bodyPr wrap="square" rtlCol="0" anchor="ctr"/>
-          <a:lstStyle/>
-          <a:p>
-            <a:pPr indent="0" marL="0">
-              <a:buNone/>
-            </a:pPr>
-            <a:r>
-              <a:rPr lang="en-US" sz="1200" b="1" dirty="0">
+          <a:bodyPr wrap="square" lIns="0" tIns="0" rIns="0" bIns="0" rtlCol="0" anchor="ctr"/>
+          <a:lstStyle/>
+          <a:p>
+            <a:pPr indent="0" marL="0">
+              <a:buNone/>
+            </a:pPr>
+            <a:r>
+              <a:rPr lang="en-US" sz="1400" b="1" dirty="0">
                 <a:solidFill>
                   <a:srgbClr val="7A2830"/>
                 </a:solidFill>
@@ -4326,7 +4326,7 @@
               </a:rPr>
               <a:t>Gioseffo Zarlino</a:t>
             </a:r>
-            <a:endParaRPr lang="en-US" sz="1200" dirty="0"/>
+            <a:endParaRPr lang="en-US" sz="1400" dirty="0"/>
           </a:p>
         </p:txBody>
       </p:sp>
@@ -4355,7 +4355,7 @@
               <a:buNone/>
             </a:pPr>
             <a:r>
-              <a:rPr lang="en-US" sz="900" dirty="0">
+              <a:rPr lang="en-US" sz="1400" dirty="0">
                 <a:solidFill>
                   <a:srgbClr val="38495C"/>
                 </a:solidFill>
@@ -4365,7 +4365,7 @@
               </a:rPr>
               <a:t>1517–1590</a:t>
             </a:r>
-            <a:endParaRPr lang="en-US" sz="900" dirty="0"/>
+            <a:endParaRPr lang="en-US" sz="1400" dirty="0"/>
           </a:p>
         </p:txBody>
       </p:sp>
@@ -4387,14 +4387,14 @@
           <a:ln/>
         </p:spPr>
         <p:txBody>
-          <a:bodyPr wrap="square" rtlCol="0" anchor="ctr"/>
-          <a:lstStyle/>
-          <a:p>
-            <a:pPr indent="0" marL="0">
-              <a:buNone/>
-            </a:pPr>
-            <a:r>
-              <a:rPr lang="en-US" sz="850" dirty="0">
+          <a:bodyPr wrap="square" rtlCol="0" anchor="t"/>
+          <a:lstStyle/>
+          <a:p>
+            <a:pPr indent="0" marL="0">
+              <a:buNone/>
+            </a:pPr>
+            <a:r>
+              <a:rPr lang="en-US" sz="1400" dirty="0">
                 <a:solidFill>
                   <a:srgbClr val="1C2A3A"/>
                 </a:solidFill>
@@ -4404,7 +4404,7 @@
               </a:rPr>
               <a:t>Le istitutioni harmoniche (1558) · 對位法與和聲理論的集大成者</a:t>
             </a:r>
-            <a:endParaRPr lang="en-US" sz="850" dirty="0"/>
+            <a:endParaRPr lang="en-US" sz="1400" dirty="0"/>
           </a:p>
         </p:txBody>
       </p:sp>
@@ -4451,14 +4451,14 @@
           <a:ln/>
         </p:spPr>
         <p:txBody>
-          <a:bodyPr wrap="square" rtlCol="0" anchor="ctr"/>
-          <a:lstStyle/>
-          <a:p>
-            <a:pPr indent="0" marL="0">
-              <a:buNone/>
-            </a:pPr>
-            <a:r>
-              <a:rPr lang="en-US" sz="1200" b="1" dirty="0">
+          <a:bodyPr wrap="square" lIns="0" tIns="0" rIns="0" bIns="0" rtlCol="0" anchor="ctr"/>
+          <a:lstStyle/>
+          <a:p>
+            <a:pPr indent="0" marL="0">
+              <a:buNone/>
+            </a:pPr>
+            <a:r>
+              <a:rPr lang="en-US" sz="1400" b="1" dirty="0">
                 <a:solidFill>
                   <a:srgbClr val="7A2830"/>
                 </a:solidFill>
@@ -4468,7 +4468,7 @@
               </a:rPr>
               <a:t>Johann Gutenberg</a:t>
             </a:r>
-            <a:endParaRPr lang="en-US" sz="1200" dirty="0"/>
+            <a:endParaRPr lang="en-US" sz="1400" dirty="0"/>
           </a:p>
         </p:txBody>
       </p:sp>
@@ -4497,7 +4497,7 @@
               <a:buNone/>
             </a:pPr>
             <a:r>
-              <a:rPr lang="en-US" sz="900" dirty="0">
+              <a:rPr lang="en-US" sz="1400" dirty="0">
                 <a:solidFill>
                   <a:srgbClr val="38495C"/>
                 </a:solidFill>
@@ -4507,7 +4507,7 @@
               </a:rPr>
               <a:t>ca. 1400–1468</a:t>
             </a:r>
-            <a:endParaRPr lang="en-US" sz="900" dirty="0"/>
+            <a:endParaRPr lang="en-US" sz="1400" dirty="0"/>
           </a:p>
         </p:txBody>
       </p:sp>
@@ -4529,14 +4529,14 @@
           <a:ln/>
         </p:spPr>
         <p:txBody>
-          <a:bodyPr wrap="square" rtlCol="0" anchor="ctr"/>
-          <a:lstStyle/>
-          <a:p>
-            <a:pPr indent="0" marL="0">
-              <a:buNone/>
-            </a:pPr>
-            <a:r>
-              <a:rPr lang="en-US" sz="850" dirty="0">
+          <a:bodyPr wrap="square" rtlCol="0" anchor="t"/>
+          <a:lstStyle/>
+          <a:p>
+            <a:pPr indent="0" marL="0">
+              <a:buNone/>
+            </a:pPr>
+            <a:r>
+              <a:rPr lang="en-US" sz="1400" dirty="0">
                 <a:solidFill>
                   <a:srgbClr val="1C2A3A"/>
                 </a:solidFill>
@@ -4546,7 +4546,7 @@
               </a:rPr>
               <a:t>活字印刷術的完善者——改變知識傳播</a:t>
             </a:r>
-            <a:endParaRPr lang="en-US" sz="850" dirty="0"/>
+            <a:endParaRPr lang="en-US" sz="1400" dirty="0"/>
           </a:p>
         </p:txBody>
       </p:sp>
@@ -4593,14 +4593,14 @@
           <a:ln/>
         </p:spPr>
         <p:txBody>
-          <a:bodyPr wrap="square" rtlCol="0" anchor="ctr"/>
-          <a:lstStyle/>
-          <a:p>
-            <a:pPr indent="0" marL="0">
-              <a:buNone/>
-            </a:pPr>
-            <a:r>
-              <a:rPr lang="en-US" sz="1200" b="1" dirty="0">
+          <a:bodyPr wrap="square" lIns="0" tIns="0" rIns="0" bIns="0" rtlCol="0" anchor="ctr"/>
+          <a:lstStyle/>
+          <a:p>
+            <a:pPr indent="0" marL="0">
+              <a:buNone/>
+            </a:pPr>
+            <a:r>
+              <a:rPr lang="en-US" sz="1400" b="1" dirty="0">
                 <a:solidFill>
                   <a:srgbClr val="7A2830"/>
                 </a:solidFill>
@@ -4610,7 +4610,7 @@
               </a:rPr>
               <a:t>Ottaviano Petrucci</a:t>
             </a:r>
-            <a:endParaRPr lang="en-US" sz="1200" dirty="0"/>
+            <a:endParaRPr lang="en-US" sz="1400" dirty="0"/>
           </a:p>
         </p:txBody>
       </p:sp>
@@ -4639,7 +4639,7 @@
               <a:buNone/>
             </a:pPr>
             <a:r>
-              <a:rPr lang="en-US" sz="900" dirty="0">
+              <a:rPr lang="en-US" sz="1400" dirty="0">
                 <a:solidFill>
                   <a:srgbClr val="38495C"/>
                 </a:solidFill>
@@ -4649,7 +4649,7 @@
               </a:rPr>
               <a:t>1466–1539</a:t>
             </a:r>
-            <a:endParaRPr lang="en-US" sz="900" dirty="0"/>
+            <a:endParaRPr lang="en-US" sz="1400" dirty="0"/>
           </a:p>
         </p:txBody>
       </p:sp>
@@ -4671,14 +4671,14 @@
           <a:ln/>
         </p:spPr>
         <p:txBody>
-          <a:bodyPr wrap="square" rtlCol="0" anchor="ctr"/>
-          <a:lstStyle/>
-          <a:p>
-            <a:pPr indent="0" marL="0">
-              <a:buNone/>
-            </a:pPr>
-            <a:r>
-              <a:rPr lang="en-US" sz="850" dirty="0">
+          <a:bodyPr wrap="square" rtlCol="0" anchor="t"/>
+          <a:lstStyle/>
+          <a:p>
+            <a:pPr indent="0" marL="0">
+              <a:buNone/>
+            </a:pPr>
+            <a:r>
+              <a:rPr lang="en-US" sz="1400" dirty="0">
                 <a:solidFill>
                   <a:srgbClr val="1C2A3A"/>
                 </a:solidFill>
@@ -4688,7 +4688,7 @@
               </a:rPr>
               <a:t>1501 威尼斯首本複音樂印刷集——Harmonice musices odhecaton</a:t>
             </a:r>
-            <a:endParaRPr lang="en-US" sz="850" dirty="0"/>
+            <a:endParaRPr lang="en-US" sz="1400" dirty="0"/>
           </a:p>
         </p:txBody>
       </p:sp>
@@ -4735,14 +4735,14 @@
           <a:ln/>
         </p:spPr>
         <p:txBody>
-          <a:bodyPr wrap="square" rtlCol="0" anchor="ctr"/>
-          <a:lstStyle/>
-          <a:p>
-            <a:pPr indent="0" marL="0">
-              <a:buNone/>
-            </a:pPr>
-            <a:r>
-              <a:rPr lang="en-US" sz="1200" b="1" dirty="0">
+          <a:bodyPr wrap="square" lIns="0" tIns="0" rIns="0" bIns="0" rtlCol="0" anchor="ctr"/>
+          <a:lstStyle/>
+          <a:p>
+            <a:pPr indent="0" marL="0">
+              <a:buNone/>
+            </a:pPr>
+            <a:r>
+              <a:rPr lang="en-US" sz="1400" b="1" dirty="0">
                 <a:solidFill>
                   <a:srgbClr val="7A2830"/>
                 </a:solidFill>
@@ -4752,7 +4752,7 @@
               </a:rPr>
               <a:t>Pierre Attaingnant</a:t>
             </a:r>
-            <a:endParaRPr lang="en-US" sz="1200" dirty="0"/>
+            <a:endParaRPr lang="en-US" sz="1400" dirty="0"/>
           </a:p>
         </p:txBody>
       </p:sp>
@@ -4781,7 +4781,7 @@
               <a:buNone/>
             </a:pPr>
             <a:r>
-              <a:rPr lang="en-US" sz="900" dirty="0">
+              <a:rPr lang="en-US" sz="1400" dirty="0">
                 <a:solidFill>
                   <a:srgbClr val="38495C"/>
                 </a:solidFill>
@@ -4791,7 +4791,7 @@
               </a:rPr>
               <a:t>ca. 1494–1551/52</a:t>
             </a:r>
-            <a:endParaRPr lang="en-US" sz="900" dirty="0"/>
+            <a:endParaRPr lang="en-US" sz="1400" dirty="0"/>
           </a:p>
         </p:txBody>
       </p:sp>
@@ -4813,14 +4813,14 @@
           <a:ln/>
         </p:spPr>
         <p:txBody>
-          <a:bodyPr wrap="square" rtlCol="0" anchor="ctr"/>
-          <a:lstStyle/>
-          <a:p>
-            <a:pPr indent="0" marL="0">
-              <a:buNone/>
-            </a:pPr>
-            <a:r>
-              <a:rPr lang="en-US" sz="850" dirty="0">
+          <a:bodyPr wrap="square" rtlCol="0" anchor="t"/>
+          <a:lstStyle/>
+          <a:p>
+            <a:pPr indent="0" marL="0">
+              <a:buNone/>
+            </a:pPr>
+            <a:r>
+              <a:rPr lang="en-US" sz="1400" dirty="0">
                 <a:solidFill>
                   <a:srgbClr val="1C2A3A"/>
                 </a:solidFill>
@@ -4830,7 +4830,7 @@
               </a:rPr>
               <a:t>單次壓印法巴黎推廣者——使樂譜便宜普及</a:t>
             </a:r>
-            <a:endParaRPr lang="en-US" sz="850" dirty="0"/>
+            <a:endParaRPr lang="en-US" sz="1400" dirty="0"/>
           </a:p>
         </p:txBody>
       </p:sp>
@@ -4970,7 +4970,7 @@
               <a:buNone/>
             </a:pPr>
             <a:r>
-              <a:rPr lang="en-US" sz="1300" dirty="0">
+              <a:rPr lang="en-US" sz="1400" dirty="0">
                 <a:solidFill>
                   <a:srgbClr val="E8D8A8"/>
                 </a:solidFill>
@@ -4980,7 +4980,7 @@
               </a:rPr>
               <a:t>Europe and Music 1400–1600</a:t>
             </a:r>
-            <a:endParaRPr lang="en-US" sz="1300" dirty="0"/>
+            <a:endParaRPr lang="en-US" sz="1400" dirty="0"/>
           </a:p>
         </p:txBody>
       </p:sp>
@@ -5022,14 +5022,14 @@
           <a:ln/>
         </p:spPr>
         <p:txBody>
-          <a:bodyPr wrap="square" rtlCol="0" anchor="ctr"/>
-          <a:lstStyle/>
-          <a:p>
-            <a:pPr indent="0" marL="0">
-              <a:buNone/>
-            </a:pPr>
-            <a:r>
-              <a:rPr lang="en-US" sz="1000" b="1" dirty="0">
+          <a:bodyPr wrap="square" lIns="0" tIns="0" rIns="0" bIns="0" rtlCol="0" anchor="ctr"/>
+          <a:lstStyle/>
+          <a:p>
+            <a:pPr indent="0" marL="0">
+              <a:buNone/>
+            </a:pPr>
+            <a:r>
+              <a:rPr lang="en-US" sz="1400" b="1" dirty="0">
                 <a:solidFill>
                   <a:srgbClr val="C8A020"/>
                 </a:solidFill>
@@ -5039,7 +5039,7 @@
               </a:rPr>
               <a:t>ca. 1400</a:t>
             </a:r>
-            <a:endParaRPr lang="en-US" sz="1000" dirty="0"/>
+            <a:endParaRPr lang="en-US" sz="1400" dirty="0"/>
           </a:p>
         </p:txBody>
       </p:sp>
@@ -5061,14 +5061,14 @@
           <a:ln/>
         </p:spPr>
         <p:txBody>
-          <a:bodyPr wrap="square" rtlCol="0" anchor="ctr"/>
-          <a:lstStyle/>
-          <a:p>
-            <a:pPr indent="0" marL="0">
-              <a:buNone/>
-            </a:pPr>
-            <a:r>
-              <a:rPr lang="en-US" sz="900" dirty="0">
+          <a:bodyPr wrap="square" rtlCol="0" anchor="t"/>
+          <a:lstStyle/>
+          <a:p>
+            <a:pPr indent="0" marL="0">
+              <a:buNone/>
+            </a:pPr>
+            <a:r>
+              <a:rPr lang="en-US" sz="1400" dirty="0">
                 <a:solidFill>
                   <a:srgbClr val="E8D8A8"/>
                 </a:solidFill>
@@ -5078,7 +5078,7 @@
               </a:rPr>
               <a:t>歐洲經濟開始復甦</a:t>
             </a:r>
-            <a:endParaRPr lang="en-US" sz="900" dirty="0"/>
+            <a:endParaRPr lang="en-US" sz="1400" dirty="0"/>
           </a:p>
         </p:txBody>
       </p:sp>
@@ -5100,14 +5100,14 @@
           <a:ln/>
         </p:spPr>
         <p:txBody>
-          <a:bodyPr wrap="square" rtlCol="0" anchor="ctr"/>
-          <a:lstStyle/>
-          <a:p>
-            <a:pPr indent="0" marL="0">
-              <a:buNone/>
-            </a:pPr>
-            <a:r>
-              <a:rPr lang="en-US" sz="1000" b="1" dirty="0">
+          <a:bodyPr wrap="square" lIns="0" tIns="0" rIns="0" bIns="0" rtlCol="0" anchor="ctr"/>
+          <a:lstStyle/>
+          <a:p>
+            <a:pPr indent="0" marL="0">
+              <a:buNone/>
+            </a:pPr>
+            <a:r>
+              <a:rPr lang="en-US" sz="1400" b="1" dirty="0">
                 <a:solidFill>
                   <a:srgbClr val="C8A020"/>
                 </a:solidFill>
@@ -5117,7 +5117,7 @@
               </a:rPr>
               <a:t>1417</a:t>
             </a:r>
-            <a:endParaRPr lang="en-US" sz="1000" dirty="0"/>
+            <a:endParaRPr lang="en-US" sz="1400" dirty="0"/>
           </a:p>
         </p:txBody>
       </p:sp>
@@ -5139,14 +5139,14 @@
           <a:ln/>
         </p:spPr>
         <p:txBody>
-          <a:bodyPr wrap="square" rtlCol="0" anchor="ctr"/>
-          <a:lstStyle/>
-          <a:p>
-            <a:pPr indent="0" marL="0">
-              <a:buNone/>
-            </a:pPr>
-            <a:r>
-              <a:rPr lang="en-US" sz="900" dirty="0">
+          <a:bodyPr wrap="square" rtlCol="0" anchor="t"/>
+          <a:lstStyle/>
+          <a:p>
+            <a:pPr indent="0" marL="0">
+              <a:buNone/>
+            </a:pPr>
+            <a:r>
+              <a:rPr lang="en-US" sz="1400" dirty="0">
                 <a:solidFill>
                   <a:srgbClr val="E8D8A8"/>
                 </a:solidFill>
@@ -5156,7 +5156,7 @@
               </a:rPr>
               <a:t>大分裂結束——教宗回歸羅馬</a:t>
             </a:r>
-            <a:endParaRPr lang="en-US" sz="900" dirty="0"/>
+            <a:endParaRPr lang="en-US" sz="1400" dirty="0"/>
           </a:p>
         </p:txBody>
       </p:sp>
@@ -5178,14 +5178,14 @@
           <a:ln/>
         </p:spPr>
         <p:txBody>
-          <a:bodyPr wrap="square" rtlCol="0" anchor="ctr"/>
-          <a:lstStyle/>
-          <a:p>
-            <a:pPr indent="0" marL="0">
-              <a:buNone/>
-            </a:pPr>
-            <a:r>
-              <a:rPr lang="en-US" sz="1000" b="1" dirty="0">
+          <a:bodyPr wrap="square" lIns="0" tIns="0" rIns="0" bIns="0" rtlCol="0" anchor="ctr"/>
+          <a:lstStyle/>
+          <a:p>
+            <a:pPr indent="0" marL="0">
+              <a:buNone/>
+            </a:pPr>
+            <a:r>
+              <a:rPr lang="en-US" sz="1400" b="1" dirty="0">
                 <a:solidFill>
                   <a:srgbClr val="C8A020"/>
                 </a:solidFill>
@@ -5195,7 +5195,7 @@
               </a:rPr>
               <a:t>ca. 1425–28</a:t>
             </a:r>
-            <a:endParaRPr lang="en-US" sz="1000" dirty="0"/>
+            <a:endParaRPr lang="en-US" sz="1400" dirty="0"/>
           </a:p>
         </p:txBody>
       </p:sp>
@@ -5217,14 +5217,14 @@
           <a:ln/>
         </p:spPr>
         <p:txBody>
-          <a:bodyPr wrap="square" rtlCol="0" anchor="ctr"/>
-          <a:lstStyle/>
-          <a:p>
-            <a:pPr indent="0" marL="0">
-              <a:buNone/>
-            </a:pPr>
-            <a:r>
-              <a:rPr lang="en-US" sz="900" dirty="0">
+          <a:bodyPr wrap="square" rtlCol="0" anchor="t"/>
+          <a:lstStyle/>
+          <a:p>
+            <a:pPr indent="0" marL="0">
+              <a:buNone/>
+            </a:pPr>
+            <a:r>
+              <a:rPr lang="en-US" sz="1400" dirty="0">
                 <a:solidFill>
                   <a:srgbClr val="E8D8A8"/>
                 </a:solidFill>
@@ -5234,7 +5234,7 @@
               </a:rPr>
               <a:t>Masaccio《聖三位一體》</a:t>
             </a:r>
-            <a:endParaRPr lang="en-US" sz="900" dirty="0"/>
+            <a:endParaRPr lang="en-US" sz="1400" dirty="0"/>
           </a:p>
         </p:txBody>
       </p:sp>
@@ -5256,14 +5256,14 @@
           <a:ln/>
         </p:spPr>
         <p:txBody>
-          <a:bodyPr wrap="square" rtlCol="0" anchor="ctr"/>
-          <a:lstStyle/>
-          <a:p>
-            <a:pPr indent="0" marL="0">
-              <a:buNone/>
-            </a:pPr>
-            <a:r>
-              <a:rPr lang="en-US" sz="1000" b="1" dirty="0">
+          <a:bodyPr wrap="square" lIns="0" tIns="0" rIns="0" bIns="0" rtlCol="0" anchor="ctr"/>
+          <a:lstStyle/>
+          <a:p>
+            <a:pPr indent="0" marL="0">
+              <a:buNone/>
+            </a:pPr>
+            <a:r>
+              <a:rPr lang="en-US" sz="1400" b="1" dirty="0">
                 <a:solidFill>
                   <a:srgbClr val="C8A020"/>
                 </a:solidFill>
@@ -5273,7 +5273,7 @@
               </a:rPr>
               <a:t>ca. 1440s</a:t>
             </a:r>
-            <a:endParaRPr lang="en-US" sz="1000" dirty="0"/>
+            <a:endParaRPr lang="en-US" sz="1400" dirty="0"/>
           </a:p>
         </p:txBody>
       </p:sp>
@@ -5295,14 +5295,14 @@
           <a:ln/>
         </p:spPr>
         <p:txBody>
-          <a:bodyPr wrap="square" rtlCol="0" anchor="ctr"/>
-          <a:lstStyle/>
-          <a:p>
-            <a:pPr indent="0" marL="0">
-              <a:buNone/>
-            </a:pPr>
-            <a:r>
-              <a:rPr lang="en-US" sz="900" dirty="0">
+          <a:bodyPr wrap="square" rtlCol="0" anchor="t"/>
+          <a:lstStyle/>
+          <a:p>
+            <a:pPr indent="0" marL="0">
+              <a:buNone/>
+            </a:pPr>
+            <a:r>
+              <a:rPr lang="en-US" sz="1400" dirty="0">
                 <a:solidFill>
                   <a:srgbClr val="E8D8A8"/>
                 </a:solidFill>
@@ -5312,7 +5312,7 @@
               </a:rPr>
               <a:t>Donatello《大衛》青銅像</a:t>
             </a:r>
-            <a:endParaRPr lang="en-US" sz="900" dirty="0"/>
+            <a:endParaRPr lang="en-US" sz="1400" dirty="0"/>
           </a:p>
         </p:txBody>
       </p:sp>
@@ -5334,14 +5334,14 @@
           <a:ln/>
         </p:spPr>
         <p:txBody>
-          <a:bodyPr wrap="square" rtlCol="0" anchor="ctr"/>
-          <a:lstStyle/>
-          <a:p>
-            <a:pPr indent="0" marL="0">
-              <a:buNone/>
-            </a:pPr>
-            <a:r>
-              <a:rPr lang="en-US" sz="1000" b="1" dirty="0">
+          <a:bodyPr wrap="square" lIns="0" tIns="0" rIns="0" bIns="0" rtlCol="0" anchor="ctr"/>
+          <a:lstStyle/>
+          <a:p>
+            <a:pPr indent="0" marL="0">
+              <a:buNone/>
+            </a:pPr>
+            <a:r>
+              <a:rPr lang="en-US" sz="1400" b="1" dirty="0">
                 <a:solidFill>
                   <a:srgbClr val="C8A020"/>
                 </a:solidFill>
@@ -5351,7 +5351,7 @@
               </a:rPr>
               <a:t>ca. 1450</a:t>
             </a:r>
-            <a:endParaRPr lang="en-US" sz="1000" dirty="0"/>
+            <a:endParaRPr lang="en-US" sz="1400" dirty="0"/>
           </a:p>
         </p:txBody>
       </p:sp>
@@ -5373,14 +5373,14 @@
           <a:ln/>
         </p:spPr>
         <p:txBody>
-          <a:bodyPr wrap="square" rtlCol="0" anchor="ctr"/>
-          <a:lstStyle/>
-          <a:p>
-            <a:pPr indent="0" marL="0">
-              <a:buNone/>
-            </a:pPr>
-            <a:r>
-              <a:rPr lang="en-US" sz="900" dirty="0">
+          <a:bodyPr wrap="square" rtlCol="0" anchor="t"/>
+          <a:lstStyle/>
+          <a:p>
+            <a:pPr indent="0" marL="0">
+              <a:buNone/>
+            </a:pPr>
+            <a:r>
+              <a:rPr lang="en-US" sz="1400" dirty="0">
                 <a:solidFill>
                   <a:srgbClr val="E8D8A8"/>
                 </a:solidFill>
@@ -5390,7 +5390,7 @@
               </a:rPr>
               <a:t>Gutenberg 完善活字印刷</a:t>
             </a:r>
-            <a:endParaRPr lang="en-US" sz="900" dirty="0"/>
+            <a:endParaRPr lang="en-US" sz="1400" dirty="0"/>
           </a:p>
         </p:txBody>
       </p:sp>
@@ -5412,14 +5412,14 @@
           <a:ln/>
         </p:spPr>
         <p:txBody>
-          <a:bodyPr wrap="square" rtlCol="0" anchor="ctr"/>
-          <a:lstStyle/>
-          <a:p>
-            <a:pPr indent="0" marL="0">
-              <a:buNone/>
-            </a:pPr>
-            <a:r>
-              <a:rPr lang="en-US" sz="1000" b="1" dirty="0">
+          <a:bodyPr wrap="square" lIns="0" tIns="0" rIns="0" bIns="0" rtlCol="0" anchor="ctr"/>
+          <a:lstStyle/>
+          <a:p>
+            <a:pPr indent="0" marL="0">
+              <a:buNone/>
+            </a:pPr>
+            <a:r>
+              <a:rPr lang="en-US" sz="1400" b="1" dirty="0">
                 <a:solidFill>
                   <a:srgbClr val="C8A020"/>
                 </a:solidFill>
@@ -5429,7 +5429,7 @@
               </a:rPr>
               <a:t>1453</a:t>
             </a:r>
-            <a:endParaRPr lang="en-US" sz="1000" dirty="0"/>
+            <a:endParaRPr lang="en-US" sz="1400" dirty="0"/>
           </a:p>
         </p:txBody>
       </p:sp>
@@ -5451,14 +5451,14 @@
           <a:ln/>
         </p:spPr>
         <p:txBody>
-          <a:bodyPr wrap="square" rtlCol="0" anchor="ctr"/>
-          <a:lstStyle/>
-          <a:p>
-            <a:pPr indent="0" marL="0">
-              <a:buNone/>
-            </a:pPr>
-            <a:r>
-              <a:rPr lang="en-US" sz="900" dirty="0">
+          <a:bodyPr wrap="square" rtlCol="0" anchor="t"/>
+          <a:lstStyle/>
+          <a:p>
+            <a:pPr indent="0" marL="0">
+              <a:buNone/>
+            </a:pPr>
+            <a:r>
+              <a:rPr lang="en-US" sz="1400" dirty="0">
                 <a:solidFill>
                   <a:srgbClr val="E8D8A8"/>
                 </a:solidFill>
@@ -5468,7 +5468,7 @@
               </a:rPr>
               <a:t>百年戰爭結束 · 君士坦丁堡陷落</a:t>
             </a:r>
-            <a:endParaRPr lang="en-US" sz="900" dirty="0"/>
+            <a:endParaRPr lang="en-US" sz="1400" dirty="0"/>
           </a:p>
         </p:txBody>
       </p:sp>
@@ -5490,14 +5490,14 @@
           <a:ln/>
         </p:spPr>
         <p:txBody>
-          <a:bodyPr wrap="square" rtlCol="0" anchor="ctr"/>
-          <a:lstStyle/>
-          <a:p>
-            <a:pPr indent="0" marL="0">
-              <a:buNone/>
-            </a:pPr>
-            <a:r>
-              <a:rPr lang="en-US" sz="1000" b="1" dirty="0">
+          <a:bodyPr wrap="square" lIns="0" tIns="0" rIns="0" bIns="0" rtlCol="0" anchor="ctr"/>
+          <a:lstStyle/>
+          <a:p>
+            <a:pPr indent="0" marL="0">
+              <a:buNone/>
+            </a:pPr>
+            <a:r>
+              <a:rPr lang="en-US" sz="1400" b="1" dirty="0">
                 <a:solidFill>
                   <a:srgbClr val="C8A020"/>
                 </a:solidFill>
@@ -5507,7 +5507,7 @@
               </a:rPr>
               <a:t>1477</a:t>
             </a:r>
-            <a:endParaRPr lang="en-US" sz="1000" dirty="0"/>
+            <a:endParaRPr lang="en-US" sz="1400" dirty="0"/>
           </a:p>
         </p:txBody>
       </p:sp>
@@ -5529,14 +5529,14 @@
           <a:ln/>
         </p:spPr>
         <p:txBody>
-          <a:bodyPr wrap="square" rtlCol="0" anchor="ctr"/>
-          <a:lstStyle/>
-          <a:p>
-            <a:pPr indent="0" marL="0">
-              <a:buNone/>
-            </a:pPr>
-            <a:r>
-              <a:rPr lang="en-US" sz="900" dirty="0">
+          <a:bodyPr wrap="square" rtlCol="0" anchor="t"/>
+          <a:lstStyle/>
+          <a:p>
+            <a:pPr indent="0" marL="0">
+              <a:buNone/>
+            </a:pPr>
+            <a:r>
+              <a:rPr lang="en-US" sz="1400" dirty="0">
                 <a:solidFill>
                   <a:srgbClr val="E8D8A8"/>
                 </a:solidFill>
@@ -5546,7 +5546,7 @@
               </a:rPr>
               <a:t>Tinctoris · Liber de arte contrapuncti</a:t>
             </a:r>
-            <a:endParaRPr lang="en-US" sz="900" dirty="0"/>
+            <a:endParaRPr lang="en-US" sz="1400" dirty="0"/>
           </a:p>
         </p:txBody>
       </p:sp>
@@ -5568,14 +5568,14 @@
           <a:ln/>
         </p:spPr>
         <p:txBody>
-          <a:bodyPr wrap="square" rtlCol="0" anchor="ctr"/>
-          <a:lstStyle/>
-          <a:p>
-            <a:pPr indent="0" marL="0">
-              <a:buNone/>
-            </a:pPr>
-            <a:r>
-              <a:rPr lang="en-US" sz="1000" b="1" dirty="0">
+          <a:bodyPr wrap="square" lIns="0" tIns="0" rIns="0" bIns="0" rtlCol="0" anchor="ctr"/>
+          <a:lstStyle/>
+          <a:p>
+            <a:pPr indent="0" marL="0">
+              <a:buNone/>
+            </a:pPr>
+            <a:r>
+              <a:rPr lang="en-US" sz="1400" b="1" dirty="0">
                 <a:solidFill>
                   <a:srgbClr val="C8A020"/>
                 </a:solidFill>
@@ -5585,7 +5585,7 @@
               </a:rPr>
               <a:t>1482</a:t>
             </a:r>
-            <a:endParaRPr lang="en-US" sz="1000" dirty="0"/>
+            <a:endParaRPr lang="en-US" sz="1400" dirty="0"/>
           </a:p>
         </p:txBody>
       </p:sp>
@@ -5607,14 +5607,14 @@
           <a:ln/>
         </p:spPr>
         <p:txBody>
-          <a:bodyPr wrap="square" rtlCol="0" anchor="ctr"/>
-          <a:lstStyle/>
-          <a:p>
-            <a:pPr indent="0" marL="0">
-              <a:buNone/>
-            </a:pPr>
-            <a:r>
-              <a:rPr lang="en-US" sz="900" dirty="0">
+          <a:bodyPr wrap="square" rtlCol="0" anchor="t"/>
+          <a:lstStyle/>
+          <a:p>
+            <a:pPr indent="0" marL="0">
+              <a:buNone/>
+            </a:pPr>
+            <a:r>
+              <a:rPr lang="en-US" sz="1400" dirty="0">
                 <a:solidFill>
                   <a:srgbClr val="E8D8A8"/>
                 </a:solidFill>
@@ -5624,7 +5624,7 @@
               </a:rPr>
               <a:t>Ramis de Pareia 提出純律</a:t>
             </a:r>
-            <a:endParaRPr lang="en-US" sz="900" dirty="0"/>
+            <a:endParaRPr lang="en-US" sz="1400" dirty="0"/>
           </a:p>
         </p:txBody>
       </p:sp>
@@ -5646,14 +5646,14 @@
           <a:ln/>
         </p:spPr>
         <p:txBody>
-          <a:bodyPr wrap="square" rtlCol="0" anchor="ctr"/>
-          <a:lstStyle/>
-          <a:p>
-            <a:pPr indent="0" marL="0">
-              <a:buNone/>
-            </a:pPr>
-            <a:r>
-              <a:rPr lang="en-US" sz="1000" b="1" dirty="0">
+          <a:bodyPr wrap="square" lIns="0" tIns="0" rIns="0" bIns="0" rtlCol="0" anchor="ctr"/>
+          <a:lstStyle/>
+          <a:p>
+            <a:pPr indent="0" marL="0">
+              <a:buNone/>
+            </a:pPr>
+            <a:r>
+              <a:rPr lang="en-US" sz="1400" b="1" dirty="0">
                 <a:solidFill>
                   <a:srgbClr val="C8A020"/>
                 </a:solidFill>
@@ -5663,7 +5663,7 @@
               </a:rPr>
               <a:t>1487</a:t>
             </a:r>
-            <a:endParaRPr lang="en-US" sz="1000" dirty="0"/>
+            <a:endParaRPr lang="en-US" sz="1400" dirty="0"/>
           </a:p>
         </p:txBody>
       </p:sp>
@@ -5685,14 +5685,14 @@
           <a:ln/>
         </p:spPr>
         <p:txBody>
-          <a:bodyPr wrap="square" rtlCol="0" anchor="ctr"/>
-          <a:lstStyle/>
-          <a:p>
-            <a:pPr indent="0" marL="0">
-              <a:buNone/>
-            </a:pPr>
-            <a:r>
-              <a:rPr lang="en-US" sz="900" dirty="0">
+          <a:bodyPr wrap="square" rtlCol="0" anchor="t"/>
+          <a:lstStyle/>
+          <a:p>
+            <a:pPr indent="0" marL="0">
+              <a:buNone/>
+            </a:pPr>
+            <a:r>
+              <a:rPr lang="en-US" sz="1400" dirty="0">
                 <a:solidFill>
                   <a:srgbClr val="E8D8A8"/>
                 </a:solidFill>
@@ -5702,7 +5702,7 @@
               </a:rPr>
               <a:t>葡萄牙繞過好望角</a:t>
             </a:r>
-            <a:endParaRPr lang="en-US" sz="900" dirty="0"/>
+            <a:endParaRPr lang="en-US" sz="1400" dirty="0"/>
           </a:p>
         </p:txBody>
       </p:sp>
@@ -5724,14 +5724,14 @@
           <a:ln/>
         </p:spPr>
         <p:txBody>
-          <a:bodyPr wrap="square" rtlCol="0" anchor="ctr"/>
-          <a:lstStyle/>
-          <a:p>
-            <a:pPr indent="0" marL="0">
-              <a:buNone/>
-            </a:pPr>
-            <a:r>
-              <a:rPr lang="en-US" sz="1000" b="1" dirty="0">
+          <a:bodyPr wrap="square" lIns="0" tIns="0" rIns="0" bIns="0" rtlCol="0" anchor="ctr"/>
+          <a:lstStyle/>
+          <a:p>
+            <a:pPr indent="0" marL="0">
+              <a:buNone/>
+            </a:pPr>
+            <a:r>
+              <a:rPr lang="en-US" sz="1400" b="1" dirty="0">
                 <a:solidFill>
                   <a:srgbClr val="C8A020"/>
                 </a:solidFill>
@@ -5741,7 +5741,7 @@
               </a:rPr>
               <a:t>1492</a:t>
             </a:r>
-            <a:endParaRPr lang="en-US" sz="1000" dirty="0"/>
+            <a:endParaRPr lang="en-US" sz="1400" dirty="0"/>
           </a:p>
         </p:txBody>
       </p:sp>
@@ -5763,14 +5763,14 @@
           <a:ln/>
         </p:spPr>
         <p:txBody>
-          <a:bodyPr wrap="square" rtlCol="0" anchor="ctr"/>
-          <a:lstStyle/>
-          <a:p>
-            <a:pPr indent="0" marL="0">
-              <a:buNone/>
-            </a:pPr>
-            <a:r>
-              <a:rPr lang="en-US" sz="900" dirty="0">
+          <a:bodyPr wrap="square" rtlCol="0" anchor="t"/>
+          <a:lstStyle/>
+          <a:p>
+            <a:pPr indent="0" marL="0">
+              <a:buNone/>
+            </a:pPr>
+            <a:r>
+              <a:rPr lang="en-US" sz="1400" dirty="0">
                 <a:solidFill>
                   <a:srgbClr val="E8D8A8"/>
                 </a:solidFill>
@@ -5780,7 +5780,7 @@
               </a:rPr>
               <a:t>Columbus 抵達西印度群島 · Gaffurio Theorica</a:t>
             </a:r>
-            <a:endParaRPr lang="en-US" sz="900" dirty="0"/>
+            <a:endParaRPr lang="en-US" sz="1400" dirty="0"/>
           </a:p>
         </p:txBody>
       </p:sp>
@@ -5802,14 +5802,14 @@
           <a:ln/>
         </p:spPr>
         <p:txBody>
-          <a:bodyPr wrap="square" rtlCol="0" anchor="ctr"/>
-          <a:lstStyle/>
-          <a:p>
-            <a:pPr indent="0" marL="0">
-              <a:buNone/>
-            </a:pPr>
-            <a:r>
-              <a:rPr lang="en-US" sz="1000" b="1" dirty="0">
+          <a:bodyPr wrap="square" lIns="0" tIns="0" rIns="0" bIns="0" rtlCol="0" anchor="ctr"/>
+          <a:lstStyle/>
+          <a:p>
+            <a:pPr indent="0" marL="0">
+              <a:buNone/>
+            </a:pPr>
+            <a:r>
+              <a:rPr lang="en-US" sz="1400" b="1" dirty="0">
                 <a:solidFill>
                   <a:srgbClr val="C8A020"/>
                 </a:solidFill>
@@ -5819,7 +5819,7 @@
               </a:rPr>
               <a:t>1495</a:t>
             </a:r>
-            <a:endParaRPr lang="en-US" sz="1000" dirty="0"/>
+            <a:endParaRPr lang="en-US" sz="1400" dirty="0"/>
           </a:p>
         </p:txBody>
       </p:sp>
@@ -5841,14 +5841,14 @@
           <a:ln/>
         </p:spPr>
         <p:txBody>
-          <a:bodyPr wrap="square" rtlCol="0" anchor="ctr"/>
-          <a:lstStyle/>
-          <a:p>
-            <a:pPr indent="0" marL="0">
-              <a:buNone/>
-            </a:pPr>
-            <a:r>
-              <a:rPr lang="en-US" sz="900" dirty="0">
+          <a:bodyPr wrap="square" rtlCol="0" anchor="t"/>
+          <a:lstStyle/>
+          <a:p>
+            <a:pPr indent="0" marL="0">
+              <a:buNone/>
+            </a:pPr>
+            <a:r>
+              <a:rPr lang="en-US" sz="1400" dirty="0">
                 <a:solidFill>
                   <a:srgbClr val="E8D8A8"/>
                 </a:solidFill>
@@ -5858,7 +5858,7 @@
               </a:rPr>
               <a:t>Leonardo da Vinci《最後的晚餐》</a:t>
             </a:r>
-            <a:endParaRPr lang="en-US" sz="900" dirty="0"/>
+            <a:endParaRPr lang="en-US" sz="1400" dirty="0"/>
           </a:p>
         </p:txBody>
       </p:sp>
@@ -5880,14 +5880,14 @@
           <a:ln/>
         </p:spPr>
         <p:txBody>
-          <a:bodyPr wrap="square" rtlCol="0" anchor="ctr"/>
-          <a:lstStyle/>
-          <a:p>
-            <a:pPr indent="0" marL="0">
-              <a:buNone/>
-            </a:pPr>
-            <a:r>
-              <a:rPr lang="en-US" sz="1000" b="1" dirty="0">
+          <a:bodyPr wrap="square" lIns="0" tIns="0" rIns="0" bIns="0" rtlCol="0" anchor="ctr"/>
+          <a:lstStyle/>
+          <a:p>
+            <a:pPr indent="0" marL="0">
+              <a:buNone/>
+            </a:pPr>
+            <a:r>
+              <a:rPr lang="en-US" sz="1400" b="1" dirty="0">
                 <a:solidFill>
                   <a:srgbClr val="C8A020"/>
                 </a:solidFill>
@@ -5897,7 +5897,7 @@
               </a:rPr>
               <a:t>1501</a:t>
             </a:r>
-            <a:endParaRPr lang="en-US" sz="1000" dirty="0"/>
+            <a:endParaRPr lang="en-US" sz="1400" dirty="0"/>
           </a:p>
         </p:txBody>
       </p:sp>
@@ -5919,14 +5919,14 @@
           <a:ln/>
         </p:spPr>
         <p:txBody>
-          <a:bodyPr wrap="square" rtlCol="0" anchor="ctr"/>
-          <a:lstStyle/>
-          <a:p>
-            <a:pPr indent="0" marL="0">
-              <a:buNone/>
-            </a:pPr>
-            <a:r>
-              <a:rPr lang="en-US" sz="900" dirty="0">
+          <a:bodyPr wrap="square" rtlCol="0" anchor="t"/>
+          <a:lstStyle/>
+          <a:p>
+            <a:pPr indent="0" marL="0">
+              <a:buNone/>
+            </a:pPr>
+            <a:r>
+              <a:rPr lang="en-US" sz="1400" dirty="0">
                 <a:solidFill>
                   <a:srgbClr val="E8D8A8"/>
                 </a:solidFill>
@@ -5936,7 +5936,7 @@
               </a:rPr>
               <a:t>Petrucci 出版 Odhecaton</a:t>
             </a:r>
-            <a:endParaRPr lang="en-US" sz="900" dirty="0"/>
+            <a:endParaRPr lang="en-US" sz="1400" dirty="0"/>
           </a:p>
         </p:txBody>
       </p:sp>
@@ -5958,14 +5958,14 @@
           <a:ln/>
         </p:spPr>
         <p:txBody>
-          <a:bodyPr wrap="square" rtlCol="0" anchor="ctr"/>
-          <a:lstStyle/>
-          <a:p>
-            <a:pPr indent="0" marL="0">
-              <a:buNone/>
-            </a:pPr>
-            <a:r>
-              <a:rPr lang="en-US" sz="1000" b="1" dirty="0">
+          <a:bodyPr wrap="square" lIns="0" tIns="0" rIns="0" bIns="0" rtlCol="0" anchor="ctr"/>
+          <a:lstStyle/>
+          <a:p>
+            <a:pPr indent="0" marL="0">
+              <a:buNone/>
+            </a:pPr>
+            <a:r>
+              <a:rPr lang="en-US" sz="1400" b="1" dirty="0">
                 <a:solidFill>
                   <a:srgbClr val="C8A020"/>
                 </a:solidFill>
@@ -5975,7 +5975,7 @@
               </a:rPr>
               <a:t>1517</a:t>
             </a:r>
-            <a:endParaRPr lang="en-US" sz="1000" dirty="0"/>
+            <a:endParaRPr lang="en-US" sz="1400" dirty="0"/>
           </a:p>
         </p:txBody>
       </p:sp>
@@ -5997,14 +5997,14 @@
           <a:ln/>
         </p:spPr>
         <p:txBody>
-          <a:bodyPr wrap="square" rtlCol="0" anchor="ctr"/>
-          <a:lstStyle/>
-          <a:p>
-            <a:pPr indent="0" marL="0">
-              <a:buNone/>
-            </a:pPr>
-            <a:r>
-              <a:rPr lang="en-US" sz="900" dirty="0">
+          <a:bodyPr wrap="square" rtlCol="0" anchor="t"/>
+          <a:lstStyle/>
+          <a:p>
+            <a:pPr indent="0" marL="0">
+              <a:buNone/>
+            </a:pPr>
+            <a:r>
+              <a:rPr lang="en-US" sz="1400" dirty="0">
                 <a:solidFill>
                   <a:srgbClr val="E8D8A8"/>
                 </a:solidFill>
@@ -6014,7 +6014,7 @@
               </a:rPr>
               <a:t>Luther 宗教改革開始</a:t>
             </a:r>
-            <a:endParaRPr lang="en-US" sz="900" dirty="0"/>
+            <a:endParaRPr lang="en-US" sz="1400" dirty="0"/>
           </a:p>
         </p:txBody>
       </p:sp>
@@ -6036,14 +6036,14 @@
           <a:ln/>
         </p:spPr>
         <p:txBody>
-          <a:bodyPr wrap="square" rtlCol="0" anchor="ctr"/>
-          <a:lstStyle/>
-          <a:p>
-            <a:pPr indent="0" marL="0">
-              <a:buNone/>
-            </a:pPr>
-            <a:r>
-              <a:rPr lang="en-US" sz="1000" b="1" dirty="0">
+          <a:bodyPr wrap="square" lIns="0" tIns="0" rIns="0" bIns="0" rtlCol="0" anchor="ctr"/>
+          <a:lstStyle/>
+          <a:p>
+            <a:pPr indent="0" marL="0">
+              <a:buNone/>
+            </a:pPr>
+            <a:r>
+              <a:rPr lang="en-US" sz="1400" b="1" dirty="0">
                 <a:solidFill>
                   <a:srgbClr val="C8A020"/>
                 </a:solidFill>
@@ -6053,7 +6053,7 @@
               </a:rPr>
               <a:t>1523</a:t>
             </a:r>
-            <a:endParaRPr lang="en-US" sz="1000" dirty="0"/>
+            <a:endParaRPr lang="en-US" sz="1400" dirty="0"/>
           </a:p>
         </p:txBody>
       </p:sp>
@@ -6075,14 +6075,14 @@
           <a:ln/>
         </p:spPr>
         <p:txBody>
-          <a:bodyPr wrap="square" rtlCol="0" anchor="ctr"/>
-          <a:lstStyle/>
-          <a:p>
-            <a:pPr indent="0" marL="0">
-              <a:buNone/>
-            </a:pPr>
-            <a:r>
-              <a:rPr lang="en-US" sz="900" dirty="0">
+          <a:bodyPr wrap="square" rtlCol="0" anchor="t"/>
+          <a:lstStyle/>
+          <a:p>
+            <a:pPr indent="0" marL="0">
+              <a:buNone/>
+            </a:pPr>
+            <a:r>
+              <a:rPr lang="en-US" sz="1400" dirty="0">
                 <a:solidFill>
                   <a:srgbClr val="E8D8A8"/>
                 </a:solidFill>
@@ -6092,7 +6092,7 @@
               </a:rPr>
               <a:t>Pietro Aaron · Toscanello in musica</a:t>
             </a:r>
-            <a:endParaRPr lang="en-US" sz="900" dirty="0"/>
+            <a:endParaRPr lang="en-US" sz="1400" dirty="0"/>
           </a:p>
         </p:txBody>
       </p:sp>
@@ -6114,14 +6114,14 @@
           <a:ln/>
         </p:spPr>
         <p:txBody>
-          <a:bodyPr wrap="square" rtlCol="0" anchor="ctr"/>
-          <a:lstStyle/>
-          <a:p>
-            <a:pPr indent="0" marL="0">
-              <a:buNone/>
-            </a:pPr>
-            <a:r>
-              <a:rPr lang="en-US" sz="1000" b="1" dirty="0">
+          <a:bodyPr wrap="square" lIns="0" tIns="0" rIns="0" bIns="0" rtlCol="0" anchor="ctr"/>
+          <a:lstStyle/>
+          <a:p>
+            <a:pPr indent="0" marL="0">
+              <a:buNone/>
+            </a:pPr>
+            <a:r>
+              <a:rPr lang="en-US" sz="1400" b="1" dirty="0">
                 <a:solidFill>
                   <a:srgbClr val="C8A020"/>
                 </a:solidFill>
@@ -6131,7 +6131,7 @@
               </a:rPr>
               <a:t>1528</a:t>
             </a:r>
-            <a:endParaRPr lang="en-US" sz="1000" dirty="0"/>
+            <a:endParaRPr lang="en-US" sz="1400" dirty="0"/>
           </a:p>
         </p:txBody>
       </p:sp>
@@ -6153,14 +6153,14 @@
           <a:ln/>
         </p:spPr>
         <p:txBody>
-          <a:bodyPr wrap="square" rtlCol="0" anchor="ctr"/>
-          <a:lstStyle/>
-          <a:p>
-            <a:pPr indent="0" marL="0">
-              <a:buNone/>
-            </a:pPr>
-            <a:r>
-              <a:rPr lang="en-US" sz="900" dirty="0">
+          <a:bodyPr wrap="square" rtlCol="0" anchor="t"/>
+          <a:lstStyle/>
+          <a:p>
+            <a:pPr indent="0" marL="0">
+              <a:buNone/>
+            </a:pPr>
+            <a:r>
+              <a:rPr lang="en-US" sz="1400" dirty="0">
                 <a:solidFill>
                   <a:srgbClr val="E8D8A8"/>
                 </a:solidFill>
@@ -6170,7 +6170,7 @@
               </a:rPr>
               <a:t>Attaingnant 單次壓印法</a:t>
             </a:r>
-            <a:endParaRPr lang="en-US" sz="900" dirty="0"/>
+            <a:endParaRPr lang="en-US" sz="1400" dirty="0"/>
           </a:p>
         </p:txBody>
       </p:sp>
@@ -6192,14 +6192,14 @@
           <a:ln/>
         </p:spPr>
         <p:txBody>
-          <a:bodyPr wrap="square" rtlCol="0" anchor="ctr"/>
-          <a:lstStyle/>
-          <a:p>
-            <a:pPr indent="0" marL="0">
-              <a:buNone/>
-            </a:pPr>
-            <a:r>
-              <a:rPr lang="en-US" sz="1000" b="1" dirty="0">
+          <a:bodyPr wrap="square" lIns="0" tIns="0" rIns="0" bIns="0" rtlCol="0" anchor="ctr"/>
+          <a:lstStyle/>
+          <a:p>
+            <a:pPr indent="0" marL="0">
+              <a:buNone/>
+            </a:pPr>
+            <a:r>
+              <a:rPr lang="en-US" sz="1400" b="1" dirty="0">
                 <a:solidFill>
                   <a:srgbClr val="C8A020"/>
                 </a:solidFill>
@@ -6209,7 +6209,7 @@
               </a:rPr>
               <a:t>1532</a:t>
             </a:r>
-            <a:endParaRPr lang="en-US" sz="1000" dirty="0"/>
+            <a:endParaRPr lang="en-US" sz="1400" dirty="0"/>
           </a:p>
         </p:txBody>
       </p:sp>
@@ -6231,14 +6231,14 @@
           <a:ln/>
         </p:spPr>
         <p:txBody>
-          <a:bodyPr wrap="square" rtlCol="0" anchor="ctr"/>
-          <a:lstStyle/>
-          <a:p>
-            <a:pPr indent="0" marL="0">
-              <a:buNone/>
-            </a:pPr>
-            <a:r>
-              <a:rPr lang="en-US" sz="900" dirty="0">
+          <a:bodyPr wrap="square" rtlCol="0" anchor="t"/>
+          <a:lstStyle/>
+          <a:p>
+            <a:pPr indent="0" marL="0">
+              <a:buNone/>
+            </a:pPr>
+            <a:r>
+              <a:rPr lang="en-US" sz="1400" dirty="0">
                 <a:solidFill>
                   <a:srgbClr val="E8D8A8"/>
                 </a:solidFill>
@@ -6248,7 +6248,7 @@
               </a:rPr>
               <a:t>Machiavelli《君王論》出版</a:t>
             </a:r>
-            <a:endParaRPr lang="en-US" sz="900" dirty="0"/>
+            <a:endParaRPr lang="en-US" sz="1400" dirty="0"/>
           </a:p>
         </p:txBody>
       </p:sp>
@@ -6270,14 +6270,14 @@
           <a:ln/>
         </p:spPr>
         <p:txBody>
-          <a:bodyPr wrap="square" rtlCol="0" anchor="ctr"/>
-          <a:lstStyle/>
-          <a:p>
-            <a:pPr indent="0" marL="0">
-              <a:buNone/>
-            </a:pPr>
-            <a:r>
-              <a:rPr lang="en-US" sz="1000" b="1" dirty="0">
+          <a:bodyPr wrap="square" lIns="0" tIns="0" rIns="0" bIns="0" rtlCol="0" anchor="ctr"/>
+          <a:lstStyle/>
+          <a:p>
+            <a:pPr indent="0" marL="0">
+              <a:buNone/>
+            </a:pPr>
+            <a:r>
+              <a:rPr lang="en-US" sz="1400" b="1" dirty="0">
                 <a:solidFill>
                   <a:srgbClr val="C8A020"/>
                 </a:solidFill>
@@ -6287,7 +6287,7 @@
               </a:rPr>
               <a:t>1547</a:t>
             </a:r>
-            <a:endParaRPr lang="en-US" sz="1000" dirty="0"/>
+            <a:endParaRPr lang="en-US" sz="1400" dirty="0"/>
           </a:p>
         </p:txBody>
       </p:sp>
@@ -6309,14 +6309,14 @@
           <a:ln/>
         </p:spPr>
         <p:txBody>
-          <a:bodyPr wrap="square" rtlCol="0" anchor="ctr"/>
-          <a:lstStyle/>
-          <a:p>
-            <a:pPr indent="0" marL="0">
-              <a:buNone/>
-            </a:pPr>
-            <a:r>
-              <a:rPr lang="en-US" sz="900" dirty="0">
+          <a:bodyPr wrap="square" rtlCol="0" anchor="t"/>
+          <a:lstStyle/>
+          <a:p>
+            <a:pPr indent="0" marL="0">
+              <a:buNone/>
+            </a:pPr>
+            <a:r>
+              <a:rPr lang="en-US" sz="1400" dirty="0">
                 <a:solidFill>
                   <a:srgbClr val="E8D8A8"/>
                 </a:solidFill>
@@ -6326,7 +6326,7 @@
               </a:rPr>
               <a:t>Glareanus · Dodecachordon</a:t>
             </a:r>
-            <a:endParaRPr lang="en-US" sz="900" dirty="0"/>
+            <a:endParaRPr lang="en-US" sz="1400" dirty="0"/>
           </a:p>
         </p:txBody>
       </p:sp>
@@ -6348,14 +6348,14 @@
           <a:ln/>
         </p:spPr>
         <p:txBody>
-          <a:bodyPr wrap="square" rtlCol="0" anchor="ctr"/>
-          <a:lstStyle/>
-          <a:p>
-            <a:pPr indent="0" marL="0">
-              <a:buNone/>
-            </a:pPr>
-            <a:r>
-              <a:rPr lang="en-US" sz="1000" b="1" dirty="0">
+          <a:bodyPr wrap="square" lIns="0" tIns="0" rIns="0" bIns="0" rtlCol="0" anchor="ctr"/>
+          <a:lstStyle/>
+          <a:p>
+            <a:pPr indent="0" marL="0">
+              <a:buNone/>
+            </a:pPr>
+            <a:r>
+              <a:rPr lang="en-US" sz="1400" b="1" dirty="0">
                 <a:solidFill>
                   <a:srgbClr val="C8A020"/>
                 </a:solidFill>
@@ -6365,7 +6365,7 @@
               </a:rPr>
               <a:t>1558</a:t>
             </a:r>
-            <a:endParaRPr lang="en-US" sz="1000" dirty="0"/>
+            <a:endParaRPr lang="en-US" sz="1400" dirty="0"/>
           </a:p>
         </p:txBody>
       </p:sp>
@@ -6387,14 +6387,14 @@
           <a:ln/>
         </p:spPr>
         <p:txBody>
-          <a:bodyPr wrap="square" rtlCol="0" anchor="ctr"/>
-          <a:lstStyle/>
-          <a:p>
-            <a:pPr indent="0" marL="0">
-              <a:buNone/>
-            </a:pPr>
-            <a:r>
-              <a:rPr lang="en-US" sz="900" dirty="0">
+          <a:bodyPr wrap="square" rtlCol="0" anchor="t"/>
+          <a:lstStyle/>
+          <a:p>
+            <a:pPr indent="0" marL="0">
+              <a:buNone/>
+            </a:pPr>
+            <a:r>
+              <a:rPr lang="en-US" sz="1400" dirty="0">
                 <a:solidFill>
                   <a:srgbClr val="E8D8A8"/>
                 </a:solidFill>
@@ -6404,7 +6404,7 @@
               </a:rPr>
               <a:t>Zarlino · Le istitutioni harmoniche</a:t>
             </a:r>
-            <a:endParaRPr lang="en-US" sz="900" dirty="0"/>
+            <a:endParaRPr lang="en-US" sz="1400" dirty="0"/>
           </a:p>
         </p:txBody>
       </p:sp>
@@ -6426,14 +6426,14 @@
           <a:ln/>
         </p:spPr>
         <p:txBody>
-          <a:bodyPr wrap="square" rtlCol="0" anchor="ctr"/>
-          <a:lstStyle/>
-          <a:p>
-            <a:pPr indent="0" marL="0">
-              <a:buNone/>
-            </a:pPr>
-            <a:r>
-              <a:rPr lang="en-US" sz="1000" b="1" dirty="0">
+          <a:bodyPr wrap="square" lIns="0" tIns="0" rIns="0" bIns="0" rtlCol="0" anchor="ctr"/>
+          <a:lstStyle/>
+          <a:p>
+            <a:pPr indent="0" marL="0">
+              <a:buNone/>
+            </a:pPr>
+            <a:r>
+              <a:rPr lang="en-US" sz="1400" b="1" dirty="0">
                 <a:solidFill>
                   <a:srgbClr val="C8A020"/>
                 </a:solidFill>
@@ -6443,7 +6443,7 @@
               </a:rPr>
               <a:t>1594</a:t>
             </a:r>
-            <a:endParaRPr lang="en-US" sz="1000" dirty="0"/>
+            <a:endParaRPr lang="en-US" sz="1400" dirty="0"/>
           </a:p>
         </p:txBody>
       </p:sp>
@@ -6465,14 +6465,14 @@
           <a:ln/>
         </p:spPr>
         <p:txBody>
-          <a:bodyPr wrap="square" rtlCol="0" anchor="ctr"/>
-          <a:lstStyle/>
-          <a:p>
-            <a:pPr indent="0" marL="0">
-              <a:buNone/>
-            </a:pPr>
-            <a:r>
-              <a:rPr lang="en-US" sz="900" dirty="0">
+          <a:bodyPr wrap="square" rtlCol="0" anchor="t"/>
+          <a:lstStyle/>
+          <a:p>
+            <a:pPr indent="0" marL="0">
+              <a:buNone/>
+            </a:pPr>
+            <a:r>
+              <a:rPr lang="en-US" sz="1400" dirty="0">
                 <a:solidFill>
                   <a:srgbClr val="E8D8A8"/>
                 </a:solidFill>
@@ -6482,7 +6482,7 @@
               </a:rPr>
               <a:t>Shakespeare《羅密歐與茱麗葉》</a:t>
             </a:r>
-            <a:endParaRPr lang="en-US" sz="900" dirty="0"/>
+            <a:endParaRPr lang="en-US" sz="1400" dirty="0"/>
           </a:p>
         </p:txBody>
       </p:sp>
@@ -6622,7 +6622,7 @@
               <a:buNone/>
             </a:pPr>
             <a:r>
-              <a:rPr lang="en-US" sz="1300" i="1" dirty="0">
+              <a:rPr lang="en-US" sz="1400" i="1" dirty="0">
                 <a:solidFill>
                   <a:srgbClr val="38495C"/>
                 </a:solidFill>
@@ -6632,7 +6632,7 @@
               </a:rPr>
               <a:t>Chapter Summary</a:t>
             </a:r>
-            <a:endParaRPr lang="en-US" sz="1300" dirty="0"/>
+            <a:endParaRPr lang="en-US" sz="1400" dirty="0"/>
           </a:p>
         </p:txBody>
       </p:sp>
@@ -6706,7 +6706,7 @@
                   <a:srgbClr val="000000"/>
                 </a:solidFill>
               </a:rPr>
-              <a:t>🏛</a:t>
+              <a:t>■</a:t>
             </a:r>
             <a:endParaRPr lang="en-US" sz="1800" dirty="0"/>
           </a:p>
@@ -6730,14 +6730,14 @@
           <a:ln/>
         </p:spPr>
         <p:txBody>
-          <a:bodyPr wrap="square" rtlCol="0" anchor="ctr"/>
-          <a:lstStyle/>
-          <a:p>
-            <a:pPr indent="0" marL="0">
-              <a:buNone/>
-            </a:pPr>
-            <a:r>
-              <a:rPr lang="en-US" sz="1300" b="1" dirty="0">
+          <a:bodyPr wrap="square" lIns="0" tIns="0" rIns="0" bIns="0" rtlCol="0" anchor="ctr"/>
+          <a:lstStyle/>
+          <a:p>
+            <a:pPr indent="0" marL="0">
+              <a:buNone/>
+            </a:pPr>
+            <a:r>
+              <a:rPr lang="en-US" sz="1400" b="1" dirty="0">
                 <a:solidFill>
                   <a:srgbClr val="1C2A3A"/>
                 </a:solidFill>
@@ -6747,7 +6747,7 @@
               </a:rPr>
               <a:t>一個統一的時代</a:t>
             </a:r>
-            <a:endParaRPr lang="en-US" sz="1300" dirty="0"/>
+            <a:endParaRPr lang="en-US" sz="1400" dirty="0"/>
           </a:p>
         </p:txBody>
       </p:sp>
@@ -6769,14 +6769,14 @@
           <a:ln/>
         </p:spPr>
         <p:txBody>
-          <a:bodyPr wrap="square" rtlCol="0" anchor="ctr"/>
-          <a:lstStyle/>
-          <a:p>
-            <a:pPr indent="0" marL="0">
-              <a:buNone/>
-            </a:pPr>
-            <a:r>
-              <a:rPr lang="en-US" sz="1000" dirty="0">
+          <a:bodyPr wrap="square" rtlCol="0" anchor="t"/>
+          <a:lstStyle/>
+          <a:p>
+            <a:pPr indent="0" marL="0">
+              <a:buNone/>
+            </a:pPr>
+            <a:r>
+              <a:rPr lang="en-US" sz="1400" dirty="0">
                 <a:solidFill>
                   <a:srgbClr val="38495C"/>
                 </a:solidFill>
@@ -6786,7 +6786,7 @@
               </a:rPr>
               <a:t>15–16 世紀以新對位法為基石，構成音樂史上的「Renaissance」時代（ca. 1400–1600）</a:t>
             </a:r>
-            <a:endParaRPr lang="en-US" sz="1000" dirty="0"/>
+            <a:endParaRPr lang="en-US" sz="1400" dirty="0"/>
           </a:p>
         </p:txBody>
       </p:sp>
@@ -6840,7 +6840,7 @@
                   <a:srgbClr val="000000"/>
                 </a:solidFill>
               </a:rPr>
-              <a:t>📜</a:t>
+              <a:t>■</a:t>
             </a:r>
             <a:endParaRPr lang="en-US" sz="1800" dirty="0"/>
           </a:p>
@@ -6864,14 +6864,14 @@
           <a:ln/>
         </p:spPr>
         <p:txBody>
-          <a:bodyPr wrap="square" rtlCol="0" anchor="ctr"/>
-          <a:lstStyle/>
-          <a:p>
-            <a:pPr indent="0" marL="0">
-              <a:buNone/>
-            </a:pPr>
-            <a:r>
-              <a:rPr lang="en-US" sz="1300" b="1" dirty="0">
+          <a:bodyPr wrap="square" lIns="0" tIns="0" rIns="0" bIns="0" rtlCol="0" anchor="ctr"/>
+          <a:lstStyle/>
+          <a:p>
+            <a:pPr indent="0" marL="0">
+              <a:buNone/>
+            </a:pPr>
+            <a:r>
+              <a:rPr lang="en-US" sz="1400" b="1" dirty="0">
                 <a:solidFill>
                   <a:srgbClr val="1C2A3A"/>
                 </a:solidFill>
@@ -6881,7 +6881,7 @@
               </a:rPr>
               <a:t>人文主義的力量</a:t>
             </a:r>
-            <a:endParaRPr lang="en-US" sz="1300" dirty="0"/>
+            <a:endParaRPr lang="en-US" sz="1400" dirty="0"/>
           </a:p>
         </p:txBody>
       </p:sp>
@@ -6903,14 +6903,14 @@
           <a:ln/>
         </p:spPr>
         <p:txBody>
-          <a:bodyPr wrap="square" rtlCol="0" anchor="ctr"/>
-          <a:lstStyle/>
-          <a:p>
-            <a:pPr indent="0" marL="0">
-              <a:buNone/>
-            </a:pPr>
-            <a:r>
-              <a:rPr lang="en-US" sz="1000" dirty="0">
+          <a:bodyPr wrap="square" rtlCol="0" anchor="t"/>
+          <a:lstStyle/>
+          <a:p>
+            <a:pPr indent="0" marL="0">
+              <a:buNone/>
+            </a:pPr>
+            <a:r>
+              <a:rPr lang="en-US" sz="1400" dirty="0">
                 <a:solidFill>
                   <a:srgbClr val="38495C"/>
                 </a:solidFill>
@@ -6920,7 +6920,7 @@
               </a:rPr>
               <a:t>古典學術的復興影響音樂美學——詞曲關係、修辭、表情與清晰度成為新準則</a:t>
             </a:r>
-            <a:endParaRPr lang="en-US" sz="1000" dirty="0"/>
+            <a:endParaRPr lang="en-US" sz="1400" dirty="0"/>
           </a:p>
         </p:txBody>
       </p:sp>
@@ -6974,7 +6974,7 @@
                   <a:srgbClr val="000000"/>
                 </a:solidFill>
               </a:rPr>
-              <a:t>🎵</a:t>
+              <a:t>■</a:t>
             </a:r>
             <a:endParaRPr lang="en-US" sz="1800" dirty="0"/>
           </a:p>
@@ -6998,14 +6998,14 @@
           <a:ln/>
         </p:spPr>
         <p:txBody>
-          <a:bodyPr wrap="square" rtlCol="0" anchor="ctr"/>
-          <a:lstStyle/>
-          <a:p>
-            <a:pPr indent="0" marL="0">
-              <a:buNone/>
-            </a:pPr>
-            <a:r>
-              <a:rPr lang="en-US" sz="1300" b="1" dirty="0">
+          <a:bodyPr wrap="square" lIns="0" tIns="0" rIns="0" bIns="0" rtlCol="0" anchor="ctr"/>
+          <a:lstStyle/>
+          <a:p>
+            <a:pPr indent="0" marL="0">
+              <a:buNone/>
+            </a:pPr>
+            <a:r>
+              <a:rPr lang="en-US" sz="1400" b="1" dirty="0">
                 <a:solidFill>
                   <a:srgbClr val="1C2A3A"/>
                 </a:solidFill>
@@ -7015,7 +7015,7 @@
               </a:rPr>
               <a:t>新對位法的建立</a:t>
             </a:r>
-            <a:endParaRPr lang="en-US" sz="1300" dirty="0"/>
+            <a:endParaRPr lang="en-US" sz="1400" dirty="0"/>
           </a:p>
         </p:txBody>
       </p:sp>
@@ -7037,14 +7037,14 @@
           <a:ln/>
         </p:spPr>
         <p:txBody>
-          <a:bodyPr wrap="square" rtlCol="0" anchor="ctr"/>
-          <a:lstStyle/>
-          <a:p>
-            <a:pPr indent="0" marL="0">
-              <a:buNone/>
-            </a:pPr>
-            <a:r>
-              <a:rPr lang="en-US" sz="1000" dirty="0">
+          <a:bodyPr wrap="square" rtlCol="0" anchor="t"/>
+          <a:lstStyle/>
+          <a:p>
+            <a:pPr indent="0" marL="0">
+              <a:buNone/>
+            </a:pPr>
+            <a:r>
+              <a:rPr lang="en-US" sz="1400" dirty="0">
                 <a:solidFill>
                   <a:srgbClr val="38495C"/>
                 </a:solidFill>
@@ -7054,7 +7054,7 @@
               </a:rPr>
               <a:t>三六度協和、嚴格不協和處理、聲部平等——奠定此後數百年和聲與對位的基礎</a:t>
             </a:r>
-            <a:endParaRPr lang="en-US" sz="1000" dirty="0"/>
+            <a:endParaRPr lang="en-US" sz="1400" dirty="0"/>
           </a:p>
         </p:txBody>
       </p:sp>
@@ -7108,7 +7108,7 @@
                   <a:srgbClr val="000000"/>
                 </a:solidFill>
               </a:rPr>
-              <a:t>🖨</a:t>
+              <a:t>■</a:t>
             </a:r>
             <a:endParaRPr lang="en-US" sz="1800" dirty="0"/>
           </a:p>
@@ -7132,14 +7132,14 @@
           <a:ln/>
         </p:spPr>
         <p:txBody>
-          <a:bodyPr wrap="square" rtlCol="0" anchor="ctr"/>
-          <a:lstStyle/>
-          <a:p>
-            <a:pPr indent="0" marL="0">
-              <a:buNone/>
-            </a:pPr>
-            <a:r>
-              <a:rPr lang="en-US" sz="1300" b="1" dirty="0">
+          <a:bodyPr wrap="square" lIns="0" tIns="0" rIns="0" bIns="0" rtlCol="0" anchor="ctr"/>
+          <a:lstStyle/>
+          <a:p>
+            <a:pPr indent="0" marL="0">
+              <a:buNone/>
+            </a:pPr>
+            <a:r>
+              <a:rPr lang="en-US" sz="1400" b="1" dirty="0">
                 <a:solidFill>
                   <a:srgbClr val="1C2A3A"/>
                 </a:solidFill>
@@ -7149,7 +7149,7 @@
               </a:rPr>
               <a:t>印刷術的革命</a:t>
             </a:r>
-            <a:endParaRPr lang="en-US" sz="1300" dirty="0"/>
+            <a:endParaRPr lang="en-US" sz="1400" dirty="0"/>
           </a:p>
         </p:txBody>
       </p:sp>
@@ -7171,14 +7171,14 @@
           <a:ln/>
         </p:spPr>
         <p:txBody>
-          <a:bodyPr wrap="square" rtlCol="0" anchor="ctr"/>
-          <a:lstStyle/>
-          <a:p>
-            <a:pPr indent="0" marL="0">
-              <a:buNone/>
-            </a:pPr>
-            <a:r>
-              <a:rPr lang="en-US" sz="1000" dirty="0">
+          <a:bodyPr wrap="square" rtlCol="0" anchor="t"/>
+          <a:lstStyle/>
+          <a:p>
+            <a:pPr indent="0" marL="0">
+              <a:buNone/>
+            </a:pPr>
+            <a:r>
+              <a:rPr lang="en-US" sz="1400" dirty="0">
                 <a:solidFill>
                   <a:srgbClr val="38495C"/>
                 </a:solidFill>
@@ -7188,7 +7188,7 @@
               </a:rPr>
               <a:t>音樂從精英走向業餘——新類型、國家風格、器樂音樂與宗教改革音樂因此蓬勃</a:t>
             </a:r>
-            <a:endParaRPr lang="en-US" sz="1000" dirty="0"/>
+            <a:endParaRPr lang="en-US" sz="1400" dirty="0"/>
           </a:p>
         </p:txBody>
       </p:sp>
@@ -7242,7 +7242,7 @@
                   <a:srgbClr val="000000"/>
                 </a:solidFill>
               </a:rPr>
-              <a:t>⛪</a:t>
+              <a:t>■</a:t>
             </a:r>
             <a:endParaRPr lang="en-US" sz="1800" dirty="0"/>
           </a:p>
@@ -7266,14 +7266,14 @@
           <a:ln/>
         </p:spPr>
         <p:txBody>
-          <a:bodyPr wrap="square" rtlCol="0" anchor="ctr"/>
-          <a:lstStyle/>
-          <a:p>
-            <a:pPr indent="0" marL="0">
-              <a:buNone/>
-            </a:pPr>
-            <a:r>
-              <a:rPr lang="en-US" sz="1300" b="1" dirty="0">
+          <a:bodyPr wrap="square" lIns="0" tIns="0" rIns="0" bIns="0" rtlCol="0" anchor="ctr"/>
+          <a:lstStyle/>
+          <a:p>
+            <a:pPr indent="0" marL="0">
+              <a:buNone/>
+            </a:pPr>
+            <a:r>
+              <a:rPr lang="en-US" sz="1400" b="1" dirty="0">
                 <a:solidFill>
                   <a:srgbClr val="1C2A3A"/>
                 </a:solidFill>
@@ -7283,7 +7283,7 @@
               </a:rPr>
               <a:t>新舊律制並存</a:t>
             </a:r>
-            <a:endParaRPr lang="en-US" sz="1300" dirty="0"/>
+            <a:endParaRPr lang="en-US" sz="1400" dirty="0"/>
           </a:p>
         </p:txBody>
       </p:sp>
@@ -7305,14 +7305,14 @@
           <a:ln/>
         </p:spPr>
         <p:txBody>
-          <a:bodyPr wrap="square" rtlCol="0" anchor="ctr"/>
-          <a:lstStyle/>
-          <a:p>
-            <a:pPr indent="0" marL="0">
-              <a:buNone/>
-            </a:pPr>
-            <a:r>
-              <a:rPr lang="en-US" sz="1000" dirty="0">
+          <a:bodyPr wrap="square" rtlCol="0" anchor="t"/>
+          <a:lstStyle/>
+          <a:p>
+            <a:pPr indent="0" marL="0">
+              <a:buNone/>
+            </a:pPr>
+            <a:r>
+              <a:rPr lang="en-US" sz="1400" dirty="0">
                 <a:solidFill>
                   <a:srgbClr val="38495C"/>
                 </a:solidFill>
@@ -7322,7 +7322,7 @@
               </a:rPr>
               <a:t>純律、中庸律、平均律的發展反映音樂實踐對理論的主導地位</a:t>
             </a:r>
-            <a:endParaRPr lang="en-US" sz="1000" dirty="0"/>
+            <a:endParaRPr lang="en-US" sz="1400" dirty="0"/>
           </a:p>
         </p:txBody>
       </p:sp>
@@ -7376,7 +7376,7 @@
                   <a:srgbClr val="000000"/>
                 </a:solidFill>
               </a:rPr>
-              <a:t>🌐</a:t>
+              <a:t>■</a:t>
             </a:r>
             <a:endParaRPr lang="en-US" sz="1800" dirty="0"/>
           </a:p>
@@ -7400,14 +7400,14 @@
           <a:ln/>
         </p:spPr>
         <p:txBody>
-          <a:bodyPr wrap="square" rtlCol="0" anchor="ctr"/>
-          <a:lstStyle/>
-          <a:p>
-            <a:pPr indent="0" marL="0">
-              <a:buNone/>
-            </a:pPr>
-            <a:r>
-              <a:rPr lang="en-US" sz="1300" b="1" dirty="0">
+          <a:bodyPr wrap="square" lIns="0" tIns="0" rIns="0" bIns="0" rtlCol="0" anchor="ctr"/>
+          <a:lstStyle/>
+          <a:p>
+            <a:pPr indent="0" marL="0">
+              <a:buNone/>
+            </a:pPr>
+            <a:r>
+              <a:rPr lang="en-US" sz="1400" b="1" dirty="0">
                 <a:solidFill>
                   <a:srgbClr val="1C2A3A"/>
                 </a:solidFill>
@@ -7417,7 +7417,7 @@
               </a:rPr>
               <a:t>音樂成為「作品」</a:t>
             </a:r>
-            <a:endParaRPr lang="en-US" sz="1300" dirty="0"/>
+            <a:endParaRPr lang="en-US" sz="1400" dirty="0"/>
           </a:p>
         </p:txBody>
       </p:sp>
@@ -7439,14 +7439,14 @@
           <a:ln/>
         </p:spPr>
         <p:txBody>
-          <a:bodyPr wrap="square" rtlCol="0" anchor="ctr"/>
-          <a:lstStyle/>
-          <a:p>
-            <a:pPr indent="0" marL="0">
-              <a:buNone/>
-            </a:pPr>
-            <a:r>
-              <a:rPr lang="en-US" sz="1000" dirty="0">
+          <a:bodyPr wrap="square" rtlCol="0" anchor="t"/>
+          <a:lstStyle/>
+          <a:p>
+            <a:pPr indent="0" marL="0">
+              <a:buNone/>
+            </a:pPr>
+            <a:r>
+              <a:rPr lang="en-US" sz="1400" dirty="0">
                 <a:solidFill>
                   <a:srgbClr val="38495C"/>
                 </a:solidFill>
@@ -7456,7 +7456,7 @@
               </a:rPr>
               <a:t>固定記譜 · 作曲家個人身份 · 被收藏、研究、模仿——現代音樂觀念的起點</a:t>
             </a:r>
-            <a:endParaRPr lang="en-US" sz="1000" dirty="0"/>
+            <a:endParaRPr lang="en-US" sz="1400" dirty="0"/>
           </a:p>
         </p:txBody>
       </p:sp>
@@ -7596,7 +7596,7 @@
               <a:buNone/>
             </a:pPr>
             <a:r>
-              <a:rPr lang="en-US" sz="1300" dirty="0">
+              <a:rPr lang="en-US" sz="1400" dirty="0">
                 <a:solidFill>
                   <a:srgbClr val="E8D8A8"/>
                 </a:solidFill>
@@ -7606,7 +7606,7 @@
               </a:rPr>
               <a:t>Key Terms · Further Reading</a:t>
             </a:r>
-            <a:endParaRPr lang="en-US" sz="1300" dirty="0"/>
+            <a:endParaRPr lang="en-US" sz="1400" dirty="0"/>
           </a:p>
         </p:txBody>
       </p:sp>
@@ -7668,14 +7668,14 @@
           <a:ln/>
         </p:spPr>
         <p:txBody>
-          <a:bodyPr wrap="square" rtlCol="0" anchor="ctr"/>
-          <a:lstStyle/>
-          <a:p>
-            <a:pPr indent="0" marL="0">
-              <a:buNone/>
-            </a:pPr>
-            <a:r>
-              <a:rPr lang="en-US" sz="1300" b="1" dirty="0">
+          <a:bodyPr wrap="square" lIns="0" tIns="0" rIns="0" bIns="0" rtlCol="0" anchor="ctr"/>
+          <a:lstStyle/>
+          <a:p>
+            <a:pPr indent="0" marL="0">
+              <a:buNone/>
+            </a:pPr>
+            <a:r>
+              <a:rPr lang="en-US" sz="1400" b="1" dirty="0">
                 <a:solidFill>
                   <a:srgbClr val="C8A020"/>
                 </a:solidFill>
@@ -7683,9 +7683,9 @@
                 <a:ea typeface="Georgia" pitchFamily="34" charset="-122"/>
                 <a:cs typeface="Georgia" pitchFamily="34" charset="-120"/>
               </a:rPr>
-              <a:t>🔑 重要術語 Key Terms</a:t>
-            </a:r>
-            <a:endParaRPr lang="en-US" sz="1300" dirty="0"/>
+              <a:t>■ 重要術語 Key Terms</a:t>
+            </a:r>
+            <a:endParaRPr lang="en-US" sz="1400" dirty="0"/>
           </a:p>
         </p:txBody>
       </p:sp>
@@ -7698,23 +7698,23 @@
         <p:spPr>
           <a:xfrm>
             <a:off x="457200" y="1554480"/>
-            <a:ext cx="4114800" cy="256032"/>
-          </a:xfrm>
-          <a:prstGeom prst="rect">
-            <a:avLst/>
-          </a:prstGeom>
-          <a:noFill/>
-          <a:ln/>
-        </p:spPr>
-        <p:txBody>
-          <a:bodyPr wrap="square" rtlCol="0" anchor="ctr"/>
-          <a:lstStyle/>
-          <a:p>
-            <a:pPr indent="0" marL="0">
-              <a:buNone/>
-            </a:pPr>
-            <a:r>
-              <a:rPr lang="en-US" sz="900" dirty="0">
+            <a:ext cx="3749040" cy="256032"/>
+          </a:xfrm>
+          <a:prstGeom prst="rect">
+            <a:avLst/>
+          </a:prstGeom>
+          <a:noFill/>
+          <a:ln/>
+        </p:spPr>
+        <p:txBody>
+          <a:bodyPr wrap="square" rtlCol="0" anchor="t"/>
+          <a:lstStyle/>
+          <a:p>
+            <a:pPr indent="0" marL="0">
+              <a:buNone/>
+            </a:pPr>
+            <a:r>
+              <a:rPr lang="en-US" sz="1400" dirty="0">
                 <a:solidFill>
                   <a:srgbClr val="E8D8A8"/>
                 </a:solidFill>
@@ -7724,7 +7724,7 @@
               </a:rPr>
               <a:t>• Renaissance · studia humanitatis</a:t>
             </a:r>
-            <a:endParaRPr lang="en-US" sz="900" dirty="0"/>
+            <a:endParaRPr lang="en-US" sz="1400" dirty="0"/>
           </a:p>
         </p:txBody>
       </p:sp>
@@ -7737,23 +7737,23 @@
         <p:spPr>
           <a:xfrm>
             <a:off x="457200" y="1828800"/>
-            <a:ext cx="4114800" cy="256032"/>
-          </a:xfrm>
-          <a:prstGeom prst="rect">
-            <a:avLst/>
-          </a:prstGeom>
-          <a:noFill/>
-          <a:ln/>
-        </p:spPr>
-        <p:txBody>
-          <a:bodyPr wrap="square" rtlCol="0" anchor="ctr"/>
-          <a:lstStyle/>
-          <a:p>
-            <a:pPr indent="0" marL="0">
-              <a:buNone/>
-            </a:pPr>
-            <a:r>
-              <a:rPr lang="en-US" sz="900" dirty="0">
+            <a:ext cx="3749040" cy="256032"/>
+          </a:xfrm>
+          <a:prstGeom prst="rect">
+            <a:avLst/>
+          </a:prstGeom>
+          <a:noFill/>
+          <a:ln/>
+        </p:spPr>
+        <p:txBody>
+          <a:bodyPr wrap="square" rtlCol="0" anchor="t"/>
+          <a:lstStyle/>
+          <a:p>
+            <a:pPr indent="0" marL="0">
+              <a:buNone/>
+            </a:pPr>
+            <a:r>
+              <a:rPr lang="en-US" sz="1400" dirty="0">
                 <a:solidFill>
                   <a:srgbClr val="E8D8A8"/>
                 </a:solidFill>
@@ -7763,7 +7763,7 @@
               </a:rPr>
               <a:t>• Humanism · Rhetoric</a:t>
             </a:r>
-            <a:endParaRPr lang="en-US" sz="900" dirty="0"/>
+            <a:endParaRPr lang="en-US" sz="1400" dirty="0"/>
           </a:p>
         </p:txBody>
       </p:sp>
@@ -7776,23 +7776,23 @@
         <p:spPr>
           <a:xfrm>
             <a:off x="457200" y="2103120"/>
-            <a:ext cx="4114800" cy="256032"/>
-          </a:xfrm>
-          <a:prstGeom prst="rect">
-            <a:avLst/>
-          </a:prstGeom>
-          <a:noFill/>
-          <a:ln/>
-        </p:spPr>
-        <p:txBody>
-          <a:bodyPr wrap="square" rtlCol="0" anchor="ctr"/>
-          <a:lstStyle/>
-          <a:p>
-            <a:pPr indent="0" marL="0">
-              <a:buNone/>
-            </a:pPr>
-            <a:r>
-              <a:rPr lang="en-US" sz="900" dirty="0">
+            <a:ext cx="3749040" cy="256032"/>
+          </a:xfrm>
+          <a:prstGeom prst="rect">
+            <a:avLst/>
+          </a:prstGeom>
+          <a:noFill/>
+          <a:ln/>
+        </p:spPr>
+        <p:txBody>
+          <a:bodyPr wrap="square" rtlCol="0" anchor="t"/>
+          <a:lstStyle/>
+          <a:p>
+            <a:pPr indent="0" marL="0">
+              <a:buNone/>
+            </a:pPr>
+            <a:r>
+              <a:rPr lang="en-US" sz="1400" dirty="0">
                 <a:solidFill>
                   <a:srgbClr val="E8D8A8"/>
                 </a:solidFill>
@@ -7802,7 +7802,7 @@
               </a:rPr>
               <a:t>• International style</a:t>
             </a:r>
-            <a:endParaRPr lang="en-US" sz="900" dirty="0"/>
+            <a:endParaRPr lang="en-US" sz="1400" dirty="0"/>
           </a:p>
         </p:txBody>
       </p:sp>
@@ -7815,23 +7815,23 @@
         <p:spPr>
           <a:xfrm>
             <a:off x="457200" y="2377440"/>
-            <a:ext cx="4114800" cy="256032"/>
-          </a:xfrm>
-          <a:prstGeom prst="rect">
-            <a:avLst/>
-          </a:prstGeom>
-          <a:noFill/>
-          <a:ln/>
-        </p:spPr>
-        <p:txBody>
-          <a:bodyPr wrap="square" rtlCol="0" anchor="ctr"/>
-          <a:lstStyle/>
-          <a:p>
-            <a:pPr indent="0" marL="0">
-              <a:buNone/>
-            </a:pPr>
-            <a:r>
-              <a:rPr lang="en-US" sz="900" dirty="0">
+            <a:ext cx="3749040" cy="256032"/>
+          </a:xfrm>
+          <a:prstGeom prst="rect">
+            <a:avLst/>
+          </a:prstGeom>
+          <a:noFill/>
+          <a:ln/>
+        </p:spPr>
+        <p:txBody>
+          <a:bodyPr wrap="square" rtlCol="0" anchor="t"/>
+          <a:lstStyle/>
+          <a:p>
+            <a:pPr indent="0" marL="0">
+              <a:buNone/>
+            </a:pPr>
+            <a:r>
+              <a:rPr lang="en-US" sz="1400" dirty="0">
                 <a:solidFill>
                   <a:srgbClr val="E8D8A8"/>
                 </a:solidFill>
@@ -7841,7 +7841,7 @@
               </a:rPr>
               <a:t>• New counterpoint</a:t>
             </a:r>
-            <a:endParaRPr lang="en-US" sz="900" dirty="0"/>
+            <a:endParaRPr lang="en-US" sz="1400" dirty="0"/>
           </a:p>
         </p:txBody>
       </p:sp>
@@ -7854,23 +7854,23 @@
         <p:spPr>
           <a:xfrm>
             <a:off x="457200" y="2651760"/>
-            <a:ext cx="4114800" cy="256032"/>
-          </a:xfrm>
-          <a:prstGeom prst="rect">
-            <a:avLst/>
-          </a:prstGeom>
-          <a:noFill/>
-          <a:ln/>
-        </p:spPr>
-        <p:txBody>
-          <a:bodyPr wrap="square" rtlCol="0" anchor="ctr"/>
-          <a:lstStyle/>
-          <a:p>
-            <a:pPr indent="0" marL="0">
-              <a:buNone/>
-            </a:pPr>
-            <a:r>
-              <a:rPr lang="en-US" sz="900" dirty="0">
+            <a:ext cx="3749040" cy="256032"/>
+          </a:xfrm>
+          <a:prstGeom prst="rect">
+            <a:avLst/>
+          </a:prstGeom>
+          <a:noFill/>
+          <a:ln/>
+        </p:spPr>
+        <p:txBody>
+          <a:bodyPr wrap="square" rtlCol="0" anchor="t"/>
+          <a:lstStyle/>
+          <a:p>
+            <a:pPr indent="0" marL="0">
+              <a:buNone/>
+            </a:pPr>
+            <a:r>
+              <a:rPr lang="en-US" sz="1400" dirty="0">
                 <a:solidFill>
                   <a:srgbClr val="E8D8A8"/>
                 </a:solidFill>
@@ -7880,7 +7880,7 @@
               </a:rPr>
               <a:t>• Imitative counterpoint · Homophony</a:t>
             </a:r>
-            <a:endParaRPr lang="en-US" sz="900" dirty="0"/>
+            <a:endParaRPr lang="en-US" sz="1400" dirty="0"/>
           </a:p>
         </p:txBody>
       </p:sp>
@@ -7893,23 +7893,23 @@
         <p:spPr>
           <a:xfrm>
             <a:off x="457200" y="2926080"/>
-            <a:ext cx="4114800" cy="256032"/>
-          </a:xfrm>
-          <a:prstGeom prst="rect">
-            <a:avLst/>
-          </a:prstGeom>
-          <a:noFill/>
-          <a:ln/>
-        </p:spPr>
-        <p:txBody>
-          <a:bodyPr wrap="square" rtlCol="0" anchor="ctr"/>
-          <a:lstStyle/>
-          <a:p>
-            <a:pPr indent="0" marL="0">
-              <a:buNone/>
-            </a:pPr>
-            <a:r>
-              <a:rPr lang="en-US" sz="900" dirty="0">
+            <a:ext cx="3749040" cy="256032"/>
+          </a:xfrm>
+          <a:prstGeom prst="rect">
+            <a:avLst/>
+          </a:prstGeom>
+          <a:noFill/>
+          <a:ln/>
+        </p:spPr>
+        <p:txBody>
+          <a:bodyPr wrap="square" rtlCol="0" anchor="t"/>
+          <a:lstStyle/>
+          <a:p>
+            <a:pPr indent="0" marL="0">
+              <a:buNone/>
+            </a:pPr>
+            <a:r>
+              <a:rPr lang="en-US" sz="1400" dirty="0">
                 <a:solidFill>
                   <a:srgbClr val="E8D8A8"/>
                 </a:solidFill>
@@ -7919,7 +7919,7 @@
               </a:rPr>
               <a:t>• Cantus-tenor framework</a:t>
             </a:r>
-            <a:endParaRPr lang="en-US" sz="900" dirty="0"/>
+            <a:endParaRPr lang="en-US" sz="1400" dirty="0"/>
           </a:p>
         </p:txBody>
       </p:sp>
@@ -7931,24 +7931,24 @@
         </p:nvSpPr>
         <p:spPr>
           <a:xfrm>
-            <a:off x="4663440" y="1554480"/>
-            <a:ext cx="4114800" cy="256032"/>
-          </a:xfrm>
-          <a:prstGeom prst="rect">
-            <a:avLst/>
-          </a:prstGeom>
-          <a:noFill/>
-          <a:ln/>
-        </p:spPr>
-        <p:txBody>
-          <a:bodyPr wrap="square" rtlCol="0" anchor="ctr"/>
-          <a:lstStyle/>
-          <a:p>
-            <a:pPr indent="0" marL="0">
-              <a:buNone/>
-            </a:pPr>
-            <a:r>
-              <a:rPr lang="en-US" sz="900" dirty="0">
+            <a:off x="4297680" y="1554480"/>
+            <a:ext cx="4526280" cy="256032"/>
+          </a:xfrm>
+          <a:prstGeom prst="rect">
+            <a:avLst/>
+          </a:prstGeom>
+          <a:noFill/>
+          <a:ln/>
+        </p:spPr>
+        <p:txBody>
+          <a:bodyPr wrap="square" rtlCol="0" anchor="t"/>
+          <a:lstStyle/>
+          <a:p>
+            <a:pPr indent="0" marL="0">
+              <a:buNone/>
+            </a:pPr>
+            <a:r>
+              <a:rPr lang="en-US" sz="1400" dirty="0">
                 <a:solidFill>
                   <a:srgbClr val="E8D8A8"/>
                 </a:solidFill>
@@ -7956,9 +7956,9 @@
                 <a:ea typeface="Calibri" pitchFamily="34" charset="-122"/>
                 <a:cs typeface="Calibri" pitchFamily="34" charset="-120"/>
               </a:rPr>
-              <a:t>• Pythagorean · Just · Mean-tone · Equal temperament</a:t>
-            </a:r>
-            <a:endParaRPr lang="en-US" sz="900" dirty="0"/>
+              <a:t>• Pythagorean · Just · Mean-tone · Equal temp.</a:t>
+            </a:r>
+            <a:endParaRPr lang="en-US" sz="1400" dirty="0"/>
           </a:p>
         </p:txBody>
       </p:sp>
@@ -7970,24 +7970,24 @@
         </p:nvSpPr>
         <p:spPr>
           <a:xfrm>
-            <a:off x="4663440" y="1828800"/>
-            <a:ext cx="4114800" cy="256032"/>
-          </a:xfrm>
-          <a:prstGeom prst="rect">
-            <a:avLst/>
-          </a:prstGeom>
-          <a:noFill/>
-          <a:ln/>
-        </p:spPr>
-        <p:txBody>
-          <a:bodyPr wrap="square" rtlCol="0" anchor="ctr"/>
-          <a:lstStyle/>
-          <a:p>
-            <a:pPr indent="0" marL="0">
-              <a:buNone/>
-            </a:pPr>
-            <a:r>
-              <a:rPr lang="en-US" sz="900" dirty="0">
+            <a:off x="4297680" y="1828800"/>
+            <a:ext cx="4526280" cy="256032"/>
+          </a:xfrm>
+          <a:prstGeom prst="rect">
+            <a:avLst/>
+          </a:prstGeom>
+          <a:noFill/>
+          <a:ln/>
+        </p:spPr>
+        <p:txBody>
+          <a:bodyPr wrap="square" rtlCol="0" anchor="t"/>
+          <a:lstStyle/>
+          <a:p>
+            <a:pPr indent="0" marL="0">
+              <a:buNone/>
+            </a:pPr>
+            <a:r>
+              <a:rPr lang="en-US" sz="1400" dirty="0">
                 <a:solidFill>
                   <a:srgbClr val="E8D8A8"/>
                 </a:solidFill>
@@ -7997,7 +7997,7 @@
               </a:rPr>
               <a:t>• Chromaticism (chromatic genus)</a:t>
             </a:r>
-            <a:endParaRPr lang="en-US" sz="900" dirty="0"/>
+            <a:endParaRPr lang="en-US" sz="1400" dirty="0"/>
           </a:p>
         </p:txBody>
       </p:sp>
@@ -8009,24 +8009,24 @@
         </p:nvSpPr>
         <p:spPr>
           <a:xfrm>
-            <a:off x="4663440" y="2103120"/>
-            <a:ext cx="4114800" cy="256032"/>
-          </a:xfrm>
-          <a:prstGeom prst="rect">
-            <a:avLst/>
-          </a:prstGeom>
-          <a:noFill/>
-          <a:ln/>
-        </p:spPr>
-        <p:txBody>
-          <a:bodyPr wrap="square" rtlCol="0" anchor="ctr"/>
-          <a:lstStyle/>
-          <a:p>
-            <a:pPr indent="0" marL="0">
-              <a:buNone/>
-            </a:pPr>
-            <a:r>
-              <a:rPr lang="en-US" sz="900" dirty="0">
+            <a:off x="4297680" y="2103120"/>
+            <a:ext cx="4526280" cy="256032"/>
+          </a:xfrm>
+          <a:prstGeom prst="rect">
+            <a:avLst/>
+          </a:prstGeom>
+          <a:noFill/>
+          <a:ln/>
+        </p:spPr>
+        <p:txBody>
+          <a:bodyPr wrap="square" rtlCol="0" anchor="t"/>
+          <a:lstStyle/>
+          <a:p>
+            <a:pPr indent="0" marL="0">
+              <a:buNone/>
+            </a:pPr>
+            <a:r>
+              <a:rPr lang="en-US" sz="1400" dirty="0">
                 <a:solidFill>
                   <a:srgbClr val="E8D8A8"/>
                 </a:solidFill>
@@ -8036,7 +8036,7 @@
               </a:rPr>
               <a:t>• Benefices · Choir schools</a:t>
             </a:r>
-            <a:endParaRPr lang="en-US" sz="900" dirty="0"/>
+            <a:endParaRPr lang="en-US" sz="1400" dirty="0"/>
           </a:p>
         </p:txBody>
       </p:sp>
@@ -8048,24 +8048,24 @@
         </p:nvSpPr>
         <p:spPr>
           <a:xfrm>
-            <a:off x="4663440" y="2377440"/>
-            <a:ext cx="4114800" cy="256032"/>
-          </a:xfrm>
-          <a:prstGeom prst="rect">
-            <a:avLst/>
-          </a:prstGeom>
-          <a:noFill/>
-          <a:ln/>
-        </p:spPr>
-        <p:txBody>
-          <a:bodyPr wrap="square" rtlCol="0" anchor="ctr"/>
-          <a:lstStyle/>
-          <a:p>
-            <a:pPr indent="0" marL="0">
-              <a:buNone/>
-            </a:pPr>
-            <a:r>
-              <a:rPr lang="en-US" sz="900" dirty="0">
+            <a:off x="4297680" y="2377440"/>
+            <a:ext cx="4526280" cy="256032"/>
+          </a:xfrm>
+          <a:prstGeom prst="rect">
+            <a:avLst/>
+          </a:prstGeom>
+          <a:noFill/>
+          <a:ln/>
+        </p:spPr>
+        <p:txBody>
+          <a:bodyPr wrap="square" rtlCol="0" anchor="t"/>
+          <a:lstStyle/>
+          <a:p>
+            <a:pPr indent="0" marL="0">
+              <a:buNone/>
+            </a:pPr>
+            <a:r>
+              <a:rPr lang="en-US" sz="1400" dirty="0">
                 <a:solidFill>
                   <a:srgbClr val="E8D8A8"/>
                 </a:solidFill>
@@ -8075,7 +8075,7 @@
               </a:rPr>
               <a:t>• Partbooks · Single/triple impression</a:t>
             </a:r>
-            <a:endParaRPr lang="en-US" sz="900" dirty="0"/>
+            <a:endParaRPr lang="en-US" sz="1400" dirty="0"/>
           </a:p>
         </p:txBody>
       </p:sp>
@@ -8087,24 +8087,24 @@
         </p:nvSpPr>
         <p:spPr>
           <a:xfrm>
-            <a:off x="4663440" y="2651760"/>
-            <a:ext cx="4114800" cy="256032"/>
-          </a:xfrm>
-          <a:prstGeom prst="rect">
-            <a:avLst/>
-          </a:prstGeom>
-          <a:noFill/>
-          <a:ln/>
-        </p:spPr>
-        <p:txBody>
-          <a:bodyPr wrap="square" rtlCol="0" anchor="ctr"/>
-          <a:lstStyle/>
-          <a:p>
-            <a:pPr indent="0" marL="0">
-              <a:buNone/>
-            </a:pPr>
-            <a:r>
-              <a:rPr lang="en-US" sz="900" dirty="0">
+            <a:off x="4297680" y="2651760"/>
+            <a:ext cx="4526280" cy="256032"/>
+          </a:xfrm>
+          <a:prstGeom prst="rect">
+            <a:avLst/>
+          </a:prstGeom>
+          <a:noFill/>
+          <a:ln/>
+        </p:spPr>
+        <p:txBody>
+          <a:bodyPr wrap="square" rtlCol="0" anchor="t"/>
+          <a:lstStyle/>
+          <a:p>
+            <a:pPr indent="0" marL="0">
+              <a:buNone/>
+            </a:pPr>
+            <a:r>
+              <a:rPr lang="en-US" sz="1400" dirty="0">
                 <a:solidFill>
                   <a:srgbClr val="E8D8A8"/>
                 </a:solidFill>
@@ -8114,7 +8114,7 @@
               </a:rPr>
               <a:t>• Chapel · Chamber · Public court</a:t>
             </a:r>
-            <a:endParaRPr lang="en-US" sz="900" dirty="0"/>
+            <a:endParaRPr lang="en-US" sz="1400" dirty="0"/>
           </a:p>
         </p:txBody>
       </p:sp>
@@ -8126,24 +8126,24 @@
         </p:nvSpPr>
         <p:spPr>
           <a:xfrm>
-            <a:off x="4663440" y="2926080"/>
-            <a:ext cx="4114800" cy="256032"/>
-          </a:xfrm>
-          <a:prstGeom prst="rect">
-            <a:avLst/>
-          </a:prstGeom>
-          <a:noFill/>
-          <a:ln/>
-        </p:spPr>
-        <p:txBody>
-          <a:bodyPr wrap="square" rtlCol="0" anchor="ctr"/>
-          <a:lstStyle/>
-          <a:p>
-            <a:pPr indent="0" marL="0">
-              <a:buNone/>
-            </a:pPr>
-            <a:r>
-              <a:rPr lang="en-US" sz="900" dirty="0">
+            <a:off x="4297680" y="2926080"/>
+            <a:ext cx="4526280" cy="256032"/>
+          </a:xfrm>
+          <a:prstGeom prst="rect">
+            <a:avLst/>
+          </a:prstGeom>
+          <a:noFill/>
+          <a:ln/>
+        </p:spPr>
+        <p:txBody>
+          <a:bodyPr wrap="square" rtlCol="0" anchor="t"/>
+          <a:lstStyle/>
+          <a:p>
+            <a:pPr indent="0" marL="0">
+              <a:buNone/>
+            </a:pPr>
+            <a:r>
+              <a:rPr lang="en-US" sz="1400" dirty="0">
                 <a:solidFill>
                   <a:srgbClr val="E8D8A8"/>
                 </a:solidFill>
@@ -8153,7 +8153,7 @@
               </a:rPr>
               <a:t>• Haut and bas instruments</a:t>
             </a:r>
-            <a:endParaRPr lang="en-US" sz="900" dirty="0"/>
+            <a:endParaRPr lang="en-US" sz="1400" dirty="0"/>
           </a:p>
         </p:txBody>
       </p:sp>
@@ -8195,14 +8195,14 @@
           <a:ln/>
         </p:spPr>
         <p:txBody>
-          <a:bodyPr wrap="square" rtlCol="0" anchor="ctr"/>
-          <a:lstStyle/>
-          <a:p>
-            <a:pPr indent="0" marL="0">
-              <a:buNone/>
-            </a:pPr>
-            <a:r>
-              <a:rPr lang="en-US" sz="1200" b="1" dirty="0">
+          <a:bodyPr wrap="square" lIns="0" tIns="0" rIns="0" bIns="0" rtlCol="0" anchor="ctr"/>
+          <a:lstStyle/>
+          <a:p>
+            <a:pPr indent="0" marL="0">
+              <a:buNone/>
+            </a:pPr>
+            <a:r>
+              <a:rPr lang="en-US" sz="1400" b="1" dirty="0">
                 <a:solidFill>
                   <a:srgbClr val="C8A020"/>
                 </a:solidFill>
@@ -8210,9 +8210,9 @@
                 <a:ea typeface="Georgia" pitchFamily="34" charset="-122"/>
                 <a:cs typeface="Georgia" pitchFamily="34" charset="-120"/>
               </a:rPr>
-              <a:t>🎧 聆聽 Listen (文藝復興代表曲)</a:t>
-            </a:r>
-            <a:endParaRPr lang="en-US" sz="1200" dirty="0"/>
+              <a:t>■ 聆聽 Listen (文藝復興代表曲)</a:t>
+            </a:r>
+            <a:endParaRPr lang="en-US" sz="1400" dirty="0"/>
           </a:p>
         </p:txBody>
       </p:sp>
@@ -8234,14 +8234,14 @@
           <a:ln/>
         </p:spPr>
         <p:txBody>
-          <a:bodyPr wrap="square" rtlCol="0" anchor="ctr"/>
-          <a:lstStyle/>
-          <a:p>
-            <a:pPr indent="0" marL="0">
-              <a:buNone/>
-            </a:pPr>
-            <a:r>
-              <a:rPr lang="en-US" sz="950" dirty="0">
+          <a:bodyPr wrap="square" rtlCol="0" anchor="t"/>
+          <a:lstStyle/>
+          <a:p>
+            <a:pPr indent="0" marL="0">
+              <a:buNone/>
+            </a:pPr>
+            <a:r>
+              <a:rPr lang="en-US" sz="1400" dirty="0">
                 <a:solidFill>
                   <a:srgbClr val="E8D8A8"/>
                 </a:solidFill>
@@ -8251,14 +8251,14 @@
               </a:rPr>
               <a:t>Tinctoris — Missa L'homme armé: Kyrie  youtu.be/VwbnG2XD540</a:t>
             </a:r>
-            <a:endParaRPr lang="en-US" sz="950" dirty="0"/>
-          </a:p>
-          <a:p>
-            <a:pPr indent="0" marL="0">
-              <a:buNone/>
-            </a:pPr>
-            <a:r>
-              <a:rPr lang="en-US" sz="950" dirty="0">
+            <a:endParaRPr lang="en-US" sz="1400" dirty="0"/>
+          </a:p>
+          <a:p>
+            <a:pPr indent="0" marL="0">
+              <a:buNone/>
+            </a:pPr>
+            <a:r>
+              <a:rPr lang="en-US" sz="1400" dirty="0">
                 <a:solidFill>
                   <a:srgbClr val="E8D8A8"/>
                 </a:solidFill>
@@ -8268,14 +8268,14 @@
               </a:rPr>
               <a:t>Josquin — Ave Maria...virgo serena (Tallis Scholars)  youtu.be/scQ5YBRpwNg</a:t>
             </a:r>
-            <a:endParaRPr lang="en-US" sz="950" dirty="0"/>
-          </a:p>
-          <a:p>
-            <a:pPr indent="0" marL="0">
-              <a:buNone/>
-            </a:pPr>
-            <a:r>
-              <a:rPr lang="en-US" sz="950" dirty="0">
+            <a:endParaRPr lang="en-US" sz="1400" dirty="0"/>
+          </a:p>
+          <a:p>
+            <a:pPr indent="0" marL="0">
+              <a:buNone/>
+            </a:pPr>
+            <a:r>
+              <a:rPr lang="en-US" sz="1400" dirty="0">
                 <a:solidFill>
                   <a:srgbClr val="E8D8A8"/>
                 </a:solidFill>
@@ -8285,7 +8285,7 @@
               </a:rPr>
               <a:t>Palestrina — Sicut cervus (Cambridge Singers)  youtu.be/0yd5EE0hAB8</a:t>
             </a:r>
-            <a:endParaRPr lang="en-US" sz="950" dirty="0"/>
+            <a:endParaRPr lang="en-US" sz="1400" dirty="0"/>
           </a:p>
         </p:txBody>
       </p:sp>
@@ -8297,8 +8297,8 @@
         </p:nvSpPr>
         <p:spPr>
           <a:xfrm>
-            <a:off x="274320" y="4389120"/>
-            <a:ext cx="8595360" cy="822960"/>
+            <a:off x="274320" y="4343400"/>
+            <a:ext cx="8595360" cy="777240"/>
           </a:xfrm>
           <a:prstGeom prst="rect">
             <a:avLst/>
@@ -8317,24 +8317,24 @@
         </p:nvSpPr>
         <p:spPr>
           <a:xfrm>
-            <a:off x="411480" y="4434840"/>
-            <a:ext cx="8321040" cy="256032"/>
-          </a:xfrm>
-          <a:prstGeom prst="rect">
-            <a:avLst/>
-          </a:prstGeom>
-          <a:noFill/>
-          <a:ln/>
-        </p:spPr>
-        <p:txBody>
-          <a:bodyPr wrap="square" rtlCol="0" anchor="ctr"/>
-          <a:lstStyle/>
-          <a:p>
-            <a:pPr indent="0" marL="0">
-              <a:buNone/>
-            </a:pPr>
-            <a:r>
-              <a:rPr lang="en-US" sz="1100" b="1" dirty="0">
+            <a:off x="411480" y="4370832"/>
+            <a:ext cx="8321040" cy="228600"/>
+          </a:xfrm>
+          <a:prstGeom prst="rect">
+            <a:avLst/>
+          </a:prstGeom>
+          <a:noFill/>
+          <a:ln/>
+        </p:spPr>
+        <p:txBody>
+          <a:bodyPr wrap="square" lIns="0" tIns="0" rIns="0" bIns="0" rtlCol="0" anchor="ctr"/>
+          <a:lstStyle/>
+          <a:p>
+            <a:pPr indent="0" marL="0">
+              <a:buNone/>
+            </a:pPr>
+            <a:r>
+              <a:rPr lang="en-US" sz="1400" b="1" dirty="0">
                 <a:solidFill>
                   <a:srgbClr val="C8A020"/>
                 </a:solidFill>
@@ -8342,9 +8342,9 @@
                 <a:ea typeface="Georgia" pitchFamily="34" charset="-122"/>
                 <a:cs typeface="Georgia" pitchFamily="34" charset="-120"/>
               </a:rPr>
-              <a:t>📚 延伸閱讀 Further Reading</a:t>
-            </a:r>
-            <a:endParaRPr lang="en-US" sz="1100" dirty="0"/>
+              <a:t>■ 延伸閱讀 Further Reading</a:t>
+            </a:r>
+            <a:endParaRPr lang="en-US" sz="1400" dirty="0"/>
           </a:p>
         </p:txBody>
       </p:sp>
@@ -8356,7 +8356,7 @@
         </p:nvSpPr>
         <p:spPr>
           <a:xfrm>
-            <a:off x="457200" y="4663440"/>
+            <a:off x="457200" y="4599432"/>
             <a:ext cx="8321040" cy="502920"/>
           </a:xfrm>
           <a:prstGeom prst="rect">
@@ -8366,14 +8366,14 @@
           <a:ln/>
         </p:spPr>
         <p:txBody>
-          <a:bodyPr wrap="square" rtlCol="0" anchor="ctr"/>
-          <a:lstStyle/>
-          <a:p>
-            <a:pPr indent="0" marL="0">
-              <a:buNone/>
-            </a:pPr>
-            <a:r>
-              <a:rPr lang="en-US" sz="800" i="1" dirty="0">
+          <a:bodyPr wrap="square" rtlCol="0" anchor="t"/>
+          <a:lstStyle/>
+          <a:p>
+            <a:pPr indent="0" marL="0">
+              <a:buNone/>
+            </a:pPr>
+            <a:r>
+              <a:rPr lang="en-US" sz="1400" i="1" dirty="0">
                 <a:solidFill>
                   <a:srgbClr val="E8D8A8"/>
                 </a:solidFill>
@@ -8383,14 +8383,14 @@
               </a:rPr>
               <a:t>Leeman Perkins, Music in the Age of the Renaissance (1999) · Allan Atlas, Renaissance Music (1998)</a:t>
             </a:r>
-            <a:endParaRPr lang="en-US" sz="800" dirty="0"/>
-          </a:p>
-          <a:p>
-            <a:pPr indent="0" marL="0">
-              <a:buNone/>
-            </a:pPr>
-            <a:r>
-              <a:rPr lang="en-US" sz="800" i="1" dirty="0">
+            <a:endParaRPr lang="en-US" sz="1400" dirty="0"/>
+          </a:p>
+          <a:p>
+            <a:pPr indent="0" marL="0">
+              <a:buNone/>
+            </a:pPr>
+            <a:r>
+              <a:rPr lang="en-US" sz="1400" i="1" dirty="0">
                 <a:solidFill>
                   <a:srgbClr val="E8D8A8"/>
                 </a:solidFill>
@@ -8400,7 +8400,7 @@
               </a:rPr>
               <a:t>Reinhard Strohm, The Rise of European Music 1380–1500 (1993) · Tinctoris, The Art of Counterpoint (trans. Seay)</a:t>
             </a:r>
-            <a:endParaRPr lang="en-US" sz="800" dirty="0"/>
+            <a:endParaRPr lang="en-US" sz="1400" dirty="0"/>
           </a:p>
         </p:txBody>
       </p:sp>
@@ -8494,7 +8494,7 @@
           <a:ln/>
         </p:spPr>
         <p:txBody>
-          <a:bodyPr wrap="square" rtlCol="0" anchor="ctr"/>
+          <a:bodyPr wrap="square" lIns="0" tIns="0" rIns="0" bIns="0" rtlCol="0" anchor="ctr"/>
           <a:lstStyle/>
           <a:p>
             <a:pPr indent="0" marL="0">
@@ -8585,7 +8585,7 @@
                   <a:srgbClr val="000000"/>
                 </a:solidFill>
               </a:rPr>
-              <a:t>🌍</a:t>
+              <a:t>■</a:t>
             </a:r>
             <a:endParaRPr lang="en-US" sz="2000" dirty="0"/>
           </a:p>
@@ -8648,14 +8648,14 @@
           <a:ln/>
         </p:spPr>
         <p:txBody>
-          <a:bodyPr wrap="square" lIns="0" tIns="0" rIns="0" bIns="0" rtlCol="0" anchor="ctr"/>
-          <a:lstStyle/>
-          <a:p>
-            <a:pPr indent="0" marL="0">
-              <a:buNone/>
-            </a:pPr>
-            <a:r>
-              <a:rPr lang="en-US" sz="1100" dirty="0">
+          <a:bodyPr wrap="square" lIns="0" tIns="0" rIns="0" bIns="0" rtlCol="0" anchor="t"/>
+          <a:lstStyle/>
+          <a:p>
+            <a:pPr indent="0" marL="0">
+              <a:buNone/>
+            </a:pPr>
+            <a:r>
+              <a:rPr lang="en-US" sz="1400" dirty="0">
                 <a:solidFill>
                   <a:srgbClr val="3A5070"/>
                 </a:solidFill>
@@ -8665,7 +8665,7 @@
               </a:rPr>
               <a:t>經濟復甦 · 大航海 · 印刷術 · 宗教改革——現代世界的雛形</a:t>
             </a:r>
-            <a:endParaRPr lang="en-US" sz="1100" dirty="0"/>
+            <a:endParaRPr lang="en-US" sz="1400" dirty="0"/>
           </a:p>
         </p:txBody>
       </p:sp>
@@ -8719,7 +8719,7 @@
                   <a:srgbClr val="000000"/>
                 </a:solidFill>
               </a:rPr>
-              <a:t>📚</a:t>
+              <a:t>■</a:t>
             </a:r>
             <a:endParaRPr lang="en-US" sz="2000" dirty="0"/>
           </a:p>
@@ -8782,14 +8782,14 @@
           <a:ln/>
         </p:spPr>
         <p:txBody>
-          <a:bodyPr wrap="square" lIns="0" tIns="0" rIns="0" bIns="0" rtlCol="0" anchor="ctr"/>
-          <a:lstStyle/>
-          <a:p>
-            <a:pPr indent="0" marL="0">
-              <a:buNone/>
-            </a:pPr>
-            <a:r>
-              <a:rPr lang="en-US" sz="1100" dirty="0">
+          <a:bodyPr wrap="square" lIns="0" tIns="0" rIns="0" bIns="0" rtlCol="0" anchor="t"/>
+          <a:lstStyle/>
+          <a:p>
+            <a:pPr indent="0" marL="0">
+              <a:buNone/>
+            </a:pPr>
+            <a:r>
+              <a:rPr lang="en-US" sz="1400" dirty="0">
                 <a:solidFill>
                   <a:srgbClr val="3A5070"/>
                 </a:solidFill>
@@ -8799,7 +8799,7 @@
               </a:rPr>
               <a:t>古希臘羅馬復興 · 修辭學 · studia humanitatis · 音樂教育</a:t>
             </a:r>
-            <a:endParaRPr lang="en-US" sz="1100" dirty="0"/>
+            <a:endParaRPr lang="en-US" sz="1400" dirty="0"/>
           </a:p>
         </p:txBody>
       </p:sp>
@@ -8853,7 +8853,7 @@
                   <a:srgbClr val="000000"/>
                 </a:solidFill>
               </a:rPr>
-              <a:t>🎨</a:t>
+              <a:t>■</a:t>
             </a:r>
             <a:endParaRPr lang="en-US" sz="2000" dirty="0"/>
           </a:p>
@@ -8916,14 +8916,14 @@
           <a:ln/>
         </p:spPr>
         <p:txBody>
-          <a:bodyPr wrap="square" lIns="0" tIns="0" rIns="0" bIns="0" rtlCol="0" anchor="ctr"/>
-          <a:lstStyle/>
-          <a:p>
-            <a:pPr indent="0" marL="0">
-              <a:buNone/>
-            </a:pPr>
-            <a:r>
-              <a:rPr lang="en-US" sz="1100" dirty="0">
+          <a:bodyPr wrap="square" lIns="0" tIns="0" rIns="0" bIns="0" rtlCol="0" anchor="t"/>
+          <a:lstStyle/>
+          <a:p>
+            <a:pPr indent="0" marL="0">
+              <a:buNone/>
+            </a:pPr>
+            <a:r>
+              <a:rPr lang="en-US" sz="1400" dirty="0">
                 <a:solidFill>
                   <a:srgbClr val="3A5070"/>
                 </a:solidFill>
@@ -8933,7 +8933,7 @@
               </a:rPr>
               <a:t>Donatello · Masaccio · 透視法 · 明暗法 · 自然主義與個人</a:t>
             </a:r>
-            <a:endParaRPr lang="en-US" sz="1100" dirty="0"/>
+            <a:endParaRPr lang="en-US" sz="1400" dirty="0"/>
           </a:p>
         </p:txBody>
       </p:sp>
@@ -8987,7 +8987,7 @@
                   <a:srgbClr val="000000"/>
                 </a:solidFill>
               </a:rPr>
-              <a:t>🎓</a:t>
+              <a:t>■</a:t>
             </a:r>
             <a:endParaRPr lang="en-US" sz="2000" dirty="0"/>
           </a:p>
@@ -9050,14 +9050,14 @@
           <a:ln/>
         </p:spPr>
         <p:txBody>
-          <a:bodyPr wrap="square" lIns="0" tIns="0" rIns="0" bIns="0" rtlCol="0" anchor="ctr"/>
-          <a:lstStyle/>
-          <a:p>
-            <a:pPr indent="0" marL="0">
-              <a:buNone/>
-            </a:pPr>
-            <a:r>
-              <a:rPr lang="en-US" sz="1100" dirty="0">
+          <a:bodyPr wrap="square" lIns="0" tIns="0" rIns="0" bIns="0" rtlCol="0" anchor="t"/>
+          <a:lstStyle/>
+          <a:p>
+            <a:pPr indent="0" marL="0">
+              <a:buNone/>
+            </a:pPr>
+            <a:r>
+              <a:rPr lang="en-US" sz="1400" dirty="0">
                 <a:solidFill>
                   <a:srgbClr val="3A5070"/>
                 </a:solidFill>
@@ -9067,7 +9067,7 @@
               </a:rPr>
               <a:t>宮廷三部門 · 教堂唱詩學校 · benefices · 國際職涯流動</a:t>
             </a:r>
-            <a:endParaRPr lang="en-US" sz="1100" dirty="0"/>
+            <a:endParaRPr lang="en-US" sz="1400" dirty="0"/>
           </a:p>
         </p:txBody>
       </p:sp>
@@ -9121,7 +9121,7 @@
                   <a:srgbClr val="000000"/>
                 </a:solidFill>
               </a:rPr>
-              <a:t>🎼</a:t>
+              <a:t>■</a:t>
             </a:r>
             <a:endParaRPr lang="en-US" sz="2000" dirty="0"/>
           </a:p>
@@ -9184,14 +9184,14 @@
           <a:ln/>
         </p:spPr>
         <p:txBody>
-          <a:bodyPr wrap="square" lIns="0" tIns="0" rIns="0" bIns="0" rtlCol="0" anchor="ctr"/>
-          <a:lstStyle/>
-          <a:p>
-            <a:pPr indent="0" marL="0">
-              <a:buNone/>
-            </a:pPr>
-            <a:r>
-              <a:rPr lang="en-US" sz="1100" dirty="0">
+          <a:bodyPr wrap="square" lIns="0" tIns="0" rIns="0" bIns="0" rtlCol="0" anchor="t"/>
+          <a:lstStyle/>
+          <a:p>
+            <a:pPr indent="0" marL="0">
+              <a:buNone/>
+            </a:pPr>
+            <a:r>
+              <a:rPr lang="en-US" sz="1400" dirty="0">
                 <a:solidFill>
                   <a:srgbClr val="3A5070"/>
                 </a:solidFill>
@@ -9201,7 +9201,7 @@
               </a:rPr>
               <a:t>三六度協和 · 嚴格處理不協和 · 四聲部 · 模仿對位 · 和聲思維</a:t>
             </a:r>
-            <a:endParaRPr lang="en-US" sz="1100" dirty="0"/>
+            <a:endParaRPr lang="en-US" sz="1400" dirty="0"/>
           </a:p>
         </p:txBody>
       </p:sp>
@@ -9255,7 +9255,7 @@
                   <a:srgbClr val="000000"/>
                 </a:solidFill>
               </a:rPr>
-              <a:t>🖨</a:t>
+              <a:t>■</a:t>
             </a:r>
             <a:endParaRPr lang="en-US" sz="2000" dirty="0"/>
           </a:p>
@@ -9318,14 +9318,14 @@
           <a:ln/>
         </p:spPr>
         <p:txBody>
-          <a:bodyPr wrap="square" lIns="0" tIns="0" rIns="0" bIns="0" rtlCol="0" anchor="ctr"/>
-          <a:lstStyle/>
-          <a:p>
-            <a:pPr indent="0" marL="0">
-              <a:buNone/>
-            </a:pPr>
-            <a:r>
-              <a:rPr lang="en-US" sz="1100" dirty="0">
+          <a:bodyPr wrap="square" lIns="0" tIns="0" rIns="0" bIns="0" rtlCol="0" anchor="t"/>
+          <a:lstStyle/>
+          <a:p>
+            <a:pPr indent="0" marL="0">
+              <a:buNone/>
+            </a:pPr>
+            <a:r>
+              <a:rPr lang="en-US" sz="1400" dirty="0">
                 <a:solidFill>
                   <a:srgbClr val="3A5070"/>
                 </a:solidFill>
@@ -9335,7 +9335,7 @@
               </a:rPr>
               <a:t>Petrucci 1501 · 古希臘理論復興 · 調律 · 詞曲關係 · 表情</a:t>
             </a:r>
-            <a:endParaRPr lang="en-US" sz="1100" dirty="0"/>
+            <a:endParaRPr lang="en-US" sz="1400" dirty="0"/>
           </a:p>
         </p:txBody>
       </p:sp>
@@ -9475,7 +9475,7 @@
               <a:buNone/>
             </a:pPr>
             <a:r>
-              <a:rPr lang="en-US" sz="1300" dirty="0">
+              <a:rPr lang="en-US" sz="1400" dirty="0">
                 <a:solidFill>
                   <a:srgbClr val="E8D8A8"/>
                 </a:solidFill>
@@ -9485,7 +9485,7 @@
               </a:rPr>
               <a:t>Europe from 1400 to 1600 · Political, Economic, and Technological Change</a:t>
             </a:r>
-            <a:endParaRPr lang="en-US" sz="1300" dirty="0"/>
+            <a:endParaRPr lang="en-US" sz="1400" dirty="0"/>
           </a:p>
         </p:txBody>
       </p:sp>
@@ -9518,7 +9518,7 @@
         <p:spPr>
           <a:xfrm>
             <a:off x="274320" y="1188720"/>
-            <a:ext cx="4206240" cy="3611880"/>
+            <a:ext cx="4206240" cy="3749040"/>
           </a:xfrm>
           <a:prstGeom prst="rect">
             <a:avLst/>
@@ -9538,23 +9538,23 @@
         <p:spPr>
           <a:xfrm>
             <a:off x="411480" y="1261872"/>
-            <a:ext cx="3931920" cy="292608"/>
-          </a:xfrm>
-          <a:prstGeom prst="rect">
-            <a:avLst/>
-          </a:prstGeom>
-          <a:noFill/>
-          <a:ln/>
-        </p:spPr>
-        <p:txBody>
-          <a:bodyPr wrap="square" rtlCol="0" anchor="ctr"/>
-          <a:lstStyle/>
-          <a:p>
-            <a:pPr indent="0" marL="0">
-              <a:buNone/>
-            </a:pPr>
-            <a:r>
-              <a:rPr lang="en-US" sz="1200" b="1" dirty="0">
+            <a:ext cx="3931920" cy="365760"/>
+          </a:xfrm>
+          <a:prstGeom prst="rect">
+            <a:avLst/>
+          </a:prstGeom>
+          <a:noFill/>
+          <a:ln/>
+        </p:spPr>
+        <p:txBody>
+          <a:bodyPr wrap="square" lIns="0" tIns="0" rIns="0" bIns="0" rtlCol="0" anchor="ctr"/>
+          <a:lstStyle/>
+          <a:p>
+            <a:pPr indent="0" marL="0">
+              <a:buNone/>
+            </a:pPr>
+            <a:r>
+              <a:rPr lang="en-US" sz="1400" b="1" dirty="0">
                 <a:solidFill>
                   <a:srgbClr val="C8A020"/>
                 </a:solidFill>
@@ -9562,9 +9562,9 @@
                 <a:ea typeface="Georgia" pitchFamily="34" charset="-122"/>
                 <a:cs typeface="Georgia" pitchFamily="34" charset="-120"/>
               </a:rPr>
-              <a:t>⚔ 政治與宗教 Political &amp; Religious</a:t>
-            </a:r>
-            <a:endParaRPr lang="en-US" sz="1200" dirty="0"/>
+              <a:t>■ 政治與宗教 Political &amp; Religious</a:t>
+            </a:r>
+            <a:endParaRPr lang="en-US" sz="1400" dirty="0"/>
           </a:p>
         </p:txBody>
       </p:sp>
@@ -9576,27 +9576,27 @@
         </p:nvSpPr>
         <p:spPr>
           <a:xfrm>
-            <a:off x="457200" y="1572768"/>
-            <a:ext cx="3977640" cy="3154680"/>
-          </a:xfrm>
-          <a:prstGeom prst="rect">
-            <a:avLst/>
-          </a:prstGeom>
-          <a:noFill/>
-          <a:ln/>
-        </p:spPr>
-        <p:txBody>
-          <a:bodyPr wrap="square" rtlCol="0" anchor="ctr"/>
+            <a:off x="457200" y="1719072"/>
+            <a:ext cx="3977640" cy="3246120"/>
+          </a:xfrm>
+          <a:prstGeom prst="rect">
+            <a:avLst/>
+          </a:prstGeom>
+          <a:noFill/>
+          <a:ln/>
+        </p:spPr>
+        <p:txBody>
+          <a:bodyPr wrap="square" rtlCol="0" anchor="t"/>
           <a:lstStyle/>
           <a:p>
             <a:pPr indent="0" marL="0">
               <a:spcAft>
-                <a:spcPts val="300"/>
+                <a:spcPts val="100"/>
               </a:spcAft>
               <a:buNone/>
             </a:pPr>
             <a:r>
-              <a:rPr lang="en-US" sz="950" dirty="0">
+              <a:rPr lang="en-US" sz="1400" dirty="0">
                 <a:solidFill>
                   <a:srgbClr val="E8D8A8"/>
                 </a:solidFill>
@@ -9606,17 +9606,17 @@
               </a:rPr>
               <a:t>• 1417 大分裂結束——教宗回歸羅馬</a:t>
             </a:r>
-            <a:endParaRPr lang="en-US" sz="950" dirty="0"/>
+            <a:endParaRPr lang="en-US" sz="1400" dirty="0"/>
           </a:p>
           <a:p>
             <a:pPr indent="0" marL="0">
               <a:spcAft>
-                <a:spcPts val="300"/>
+                <a:spcPts val="100"/>
               </a:spcAft>
               <a:buNone/>
             </a:pPr>
             <a:r>
-              <a:rPr lang="en-US" sz="950" dirty="0">
+              <a:rPr lang="en-US" sz="1400" dirty="0">
                 <a:solidFill>
                   <a:srgbClr val="E8D8A8"/>
                 </a:solidFill>
@@ -9626,17 +9626,17 @@
               </a:rPr>
               <a:t>• 1453 百年戰爭結束 · 君士坦丁堡陷落——拜占庭帝國滅亡</a:t>
             </a:r>
-            <a:endParaRPr lang="en-US" sz="950" dirty="0"/>
+            <a:endParaRPr lang="en-US" sz="1400" dirty="0"/>
           </a:p>
           <a:p>
             <a:pPr indent="0" marL="0">
               <a:spcAft>
-                <a:spcPts val="300"/>
+                <a:spcPts val="100"/>
               </a:spcAft>
               <a:buNone/>
             </a:pPr>
             <a:r>
-              <a:rPr lang="en-US" sz="950" dirty="0">
+              <a:rPr lang="en-US" sz="1400" dirty="0">
                 <a:solidFill>
                   <a:srgbClr val="E8D8A8"/>
                 </a:solidFill>
@@ -9646,17 +9646,17 @@
               </a:rPr>
               <a:t>• 1517 Martin Luther 宗教改革開始</a:t>
             </a:r>
-            <a:endParaRPr lang="en-US" sz="950" dirty="0"/>
+            <a:endParaRPr lang="en-US" sz="1400" dirty="0"/>
           </a:p>
           <a:p>
             <a:pPr indent="0" marL="0">
               <a:spcAft>
-                <a:spcPts val="300"/>
+                <a:spcPts val="100"/>
               </a:spcAft>
               <a:buNone/>
             </a:pPr>
             <a:r>
-              <a:rPr lang="en-US" sz="950" dirty="0">
+              <a:rPr lang="en-US" sz="1400" dirty="0">
                 <a:solidFill>
                   <a:srgbClr val="E8D8A8"/>
                 </a:solidFill>
@@ -9666,17 +9666,17 @@
               </a:rPr>
               <a:t>• 新教三大宗派：路德派、喀爾文派、聖公會</a:t>
             </a:r>
-            <a:endParaRPr lang="en-US" sz="950" dirty="0"/>
+            <a:endParaRPr lang="en-US" sz="1400" dirty="0"/>
           </a:p>
           <a:p>
             <a:pPr indent="0" marL="0">
               <a:spcAft>
-                <a:spcPts val="300"/>
+                <a:spcPts val="100"/>
               </a:spcAft>
               <a:buNone/>
             </a:pPr>
             <a:r>
-              <a:rPr lang="en-US" sz="950" dirty="0">
+              <a:rPr lang="en-US" sz="1400" dirty="0">
                 <a:solidFill>
                   <a:srgbClr val="E8D8A8"/>
                 </a:solidFill>
@@ -9686,17 +9686,17 @@
               </a:rPr>
               <a:t>• Catholic Reformation 反宗教改革——Palestrina 成為 16 世紀對位法典範</a:t>
             </a:r>
-            <a:endParaRPr lang="en-US" sz="950" dirty="0"/>
+            <a:endParaRPr lang="en-US" sz="1400" dirty="0"/>
           </a:p>
           <a:p>
             <a:pPr indent="0" marL="0">
               <a:spcAft>
-                <a:spcPts val="300"/>
+                <a:spcPts val="100"/>
               </a:spcAft>
               <a:buNone/>
             </a:pPr>
             <a:r>
-              <a:rPr lang="en-US" sz="950" dirty="0">
+              <a:rPr lang="en-US" sz="1400" dirty="0">
                 <a:solidFill>
                   <a:srgbClr val="E8D8A8"/>
                 </a:solidFill>
@@ -9706,17 +9706,17 @@
               </a:rPr>
               <a:t>• 鄂圖曼土耳其繼續征服巴爾幹、匈牙利</a:t>
             </a:r>
-            <a:endParaRPr lang="en-US" sz="950" dirty="0"/>
+            <a:endParaRPr lang="en-US" sz="1400" dirty="0"/>
           </a:p>
           <a:p>
             <a:pPr indent="0" marL="0">
               <a:spcAft>
-                <a:spcPts val="300"/>
+                <a:spcPts val="100"/>
               </a:spcAft>
               <a:buNone/>
             </a:pPr>
             <a:r>
-              <a:rPr lang="en-US" sz="950" dirty="0">
+              <a:rPr lang="en-US" sz="1400" dirty="0">
                 <a:solidFill>
                   <a:srgbClr val="E8D8A8"/>
                 </a:solidFill>
@@ -9726,7 +9726,7 @@
               </a:rPr>
               <a:t>• 百年以上的宗教戰爭塑造歐洲版圖</a:t>
             </a:r>
-            <a:endParaRPr lang="en-US" sz="950" dirty="0"/>
+            <a:endParaRPr lang="en-US" sz="1400" dirty="0"/>
           </a:p>
         </p:txBody>
       </p:sp>
@@ -9739,7 +9739,7 @@
         <p:spPr>
           <a:xfrm>
             <a:off x="4663440" y="1188720"/>
-            <a:ext cx="4206240" cy="3611880"/>
+            <a:ext cx="4206240" cy="3749040"/>
           </a:xfrm>
           <a:prstGeom prst="rect">
             <a:avLst/>
@@ -9759,23 +9759,23 @@
         <p:spPr>
           <a:xfrm>
             <a:off x="4800600" y="1261872"/>
-            <a:ext cx="3931920" cy="292608"/>
-          </a:xfrm>
-          <a:prstGeom prst="rect">
-            <a:avLst/>
-          </a:prstGeom>
-          <a:noFill/>
-          <a:ln/>
-        </p:spPr>
-        <p:txBody>
-          <a:bodyPr wrap="square" rtlCol="0" anchor="ctr"/>
-          <a:lstStyle/>
-          <a:p>
-            <a:pPr indent="0" marL="0">
-              <a:buNone/>
-            </a:pPr>
-            <a:r>
-              <a:rPr lang="en-US" sz="1200" b="1" dirty="0">
+            <a:ext cx="3931920" cy="365760"/>
+          </a:xfrm>
+          <a:prstGeom prst="rect">
+            <a:avLst/>
+          </a:prstGeom>
+          <a:noFill/>
+          <a:ln/>
+        </p:spPr>
+        <p:txBody>
+          <a:bodyPr wrap="square" lIns="0" tIns="0" rIns="0" bIns="0" rtlCol="0" anchor="ctr"/>
+          <a:lstStyle/>
+          <a:p>
+            <a:pPr indent="0" marL="0">
+              <a:buNone/>
+            </a:pPr>
+            <a:r>
+              <a:rPr lang="en-US" sz="1400" b="1" dirty="0">
                 <a:solidFill>
                   <a:srgbClr val="C8A020"/>
                 </a:solidFill>
@@ -9783,9 +9783,9 @@
                 <a:ea typeface="Georgia" pitchFamily="34" charset="-122"/>
                 <a:cs typeface="Georgia" pitchFamily="34" charset="-120"/>
               </a:rPr>
-              <a:t>💰 經濟與技術 Economic &amp; Technological</a:t>
-            </a:r>
-            <a:endParaRPr lang="en-US" sz="1200" dirty="0"/>
+              <a:t>■ 經濟與技術 Economic &amp; Technological</a:t>
+            </a:r>
+            <a:endParaRPr lang="en-US" sz="1400" dirty="0"/>
           </a:p>
         </p:txBody>
       </p:sp>
@@ -9797,27 +9797,27 @@
         </p:nvSpPr>
         <p:spPr>
           <a:xfrm>
-            <a:off x="4846320" y="1572768"/>
-            <a:ext cx="3977640" cy="3154680"/>
-          </a:xfrm>
-          <a:prstGeom prst="rect">
-            <a:avLst/>
-          </a:prstGeom>
-          <a:noFill/>
-          <a:ln/>
-        </p:spPr>
-        <p:txBody>
-          <a:bodyPr wrap="square" rtlCol="0" anchor="ctr"/>
+            <a:off x="4846320" y="1719072"/>
+            <a:ext cx="3977640" cy="3246120"/>
+          </a:xfrm>
+          <a:prstGeom prst="rect">
+            <a:avLst/>
+          </a:prstGeom>
+          <a:noFill/>
+          <a:ln/>
+        </p:spPr>
+        <p:txBody>
+          <a:bodyPr wrap="square" rtlCol="0" anchor="t"/>
           <a:lstStyle/>
           <a:p>
             <a:pPr indent="0" marL="0">
               <a:spcAft>
-                <a:spcPts val="300"/>
+                <a:spcPts val="100"/>
               </a:spcAft>
               <a:buNone/>
             </a:pPr>
             <a:r>
-              <a:rPr lang="en-US" sz="950" dirty="0">
+              <a:rPr lang="en-US" sz="1400" dirty="0">
                 <a:solidFill>
                   <a:srgbClr val="E8D8A8"/>
                 </a:solidFill>
@@ -9827,17 +9827,17 @@
               </a:rPr>
               <a:t>• ca. 1400 歐洲經濟復甦 · 區域專業化與長距離貿易</a:t>
             </a:r>
-            <a:endParaRPr lang="en-US" sz="950" dirty="0"/>
+            <a:endParaRPr lang="en-US" sz="1400" dirty="0"/>
           </a:p>
           <a:p>
             <a:pPr indent="0" marL="0">
               <a:spcAft>
-                <a:spcPts val="300"/>
+                <a:spcPts val="100"/>
               </a:spcAft>
               <a:buNone/>
             </a:pPr>
             <a:r>
-              <a:rPr lang="en-US" sz="950" dirty="0">
+              <a:rPr lang="en-US" sz="1400" dirty="0">
                 <a:solidFill>
                   <a:srgbClr val="E8D8A8"/>
                 </a:solidFill>
@@ -9847,17 +9847,17 @@
               </a:rPr>
               <a:t>• 中產階級（商人、工匠、律師）興起</a:t>
             </a:r>
-            <a:endParaRPr lang="en-US" sz="950" dirty="0"/>
+            <a:endParaRPr lang="en-US" sz="1400" dirty="0"/>
           </a:p>
           <a:p>
             <a:pPr indent="0" marL="0">
               <a:spcAft>
-                <a:spcPts val="300"/>
+                <a:spcPts val="100"/>
               </a:spcAft>
               <a:buNone/>
             </a:pPr>
             <a:r>
-              <a:rPr lang="en-US" sz="950" dirty="0">
+              <a:rPr lang="en-US" sz="1400" dirty="0">
                 <a:solidFill>
                   <a:srgbClr val="E8D8A8"/>
                 </a:solidFill>
@@ -9867,17 +9867,17 @@
               </a:rPr>
               <a:t>• 1450 Gutenberg 活字印刷術</a:t>
             </a:r>
-            <a:endParaRPr lang="en-US" sz="950" dirty="0"/>
+            <a:endParaRPr lang="en-US" sz="1400" dirty="0"/>
           </a:p>
           <a:p>
             <a:pPr indent="0" marL="0">
               <a:spcAft>
-                <a:spcPts val="300"/>
+                <a:spcPts val="100"/>
               </a:spcAft>
               <a:buNone/>
             </a:pPr>
             <a:r>
-              <a:rPr lang="en-US" sz="950" dirty="0">
+              <a:rPr lang="en-US" sz="1400" dirty="0">
                 <a:solidFill>
                   <a:srgbClr val="E8D8A8"/>
                 </a:solidFill>
@@ -9887,17 +9887,17 @@
               </a:rPr>
               <a:t>• 1487 葡萄牙繞過非洲南端</a:t>
             </a:r>
-            <a:endParaRPr lang="en-US" sz="950" dirty="0"/>
+            <a:endParaRPr lang="en-US" sz="1400" dirty="0"/>
           </a:p>
           <a:p>
             <a:pPr indent="0" marL="0">
               <a:spcAft>
-                <a:spcPts val="300"/>
+                <a:spcPts val="100"/>
               </a:spcAft>
               <a:buNone/>
             </a:pPr>
             <a:r>
-              <a:rPr lang="en-US" sz="950" dirty="0">
+              <a:rPr lang="en-US" sz="1400" dirty="0">
                 <a:solidFill>
                   <a:srgbClr val="E8D8A8"/>
                 </a:solidFill>
@@ -9907,17 +9907,17 @@
               </a:rPr>
               <a:t>• 1492 Columbus 抵達西印度群島</a:t>
             </a:r>
-            <a:endParaRPr lang="en-US" sz="950" dirty="0"/>
+            <a:endParaRPr lang="en-US" sz="1400" dirty="0"/>
           </a:p>
           <a:p>
             <a:pPr indent="0" marL="0">
               <a:spcAft>
-                <a:spcPts val="300"/>
+                <a:spcPts val="100"/>
               </a:spcAft>
               <a:buNone/>
             </a:pPr>
             <a:r>
-              <a:rPr lang="en-US" sz="950" dirty="0">
+              <a:rPr lang="en-US" sz="1400" dirty="0">
                 <a:solidFill>
                   <a:srgbClr val="E8D8A8"/>
                 </a:solidFill>
@@ -9927,17 +9927,17 @@
               </a:rPr>
               <a:t>• 歐洲殖民擴張至美洲、非洲、亞洲</a:t>
             </a:r>
-            <a:endParaRPr lang="en-US" sz="950" dirty="0"/>
+            <a:endParaRPr lang="en-US" sz="1400" dirty="0"/>
           </a:p>
           <a:p>
             <a:pPr indent="0" marL="0">
               <a:spcAft>
-                <a:spcPts val="300"/>
+                <a:spcPts val="100"/>
               </a:spcAft>
               <a:buNone/>
             </a:pPr>
             <a:r>
-              <a:rPr lang="en-US" sz="950" dirty="0">
+              <a:rPr lang="en-US" sz="1400" dirty="0">
                 <a:solidFill>
                   <a:srgbClr val="E8D8A8"/>
                 </a:solidFill>
@@ -9947,17 +9947,17 @@
               </a:rPr>
               <a:t>• 科學、造船、火炮、航海技術突破</a:t>
             </a:r>
-            <a:endParaRPr lang="en-US" sz="950" dirty="0"/>
+            <a:endParaRPr lang="en-US" sz="1400" dirty="0"/>
           </a:p>
           <a:p>
             <a:pPr indent="0" marL="0">
               <a:spcAft>
-                <a:spcPts val="300"/>
+                <a:spcPts val="100"/>
               </a:spcAft>
               <a:buNone/>
             </a:pPr>
             <a:r>
-              <a:rPr lang="en-US" sz="950" dirty="0">
+              <a:rPr lang="en-US" sz="1400" dirty="0">
                 <a:solidFill>
                   <a:srgbClr val="E8D8A8"/>
                 </a:solidFill>
@@ -9967,7 +9967,7 @@
               </a:rPr>
               <a:t>• 義大利城邦的宮廷贊助成為藝術發展的沃土</a:t>
             </a:r>
-            <a:endParaRPr lang="en-US" sz="950" dirty="0"/>
+            <a:endParaRPr lang="en-US" sz="1400" dirty="0"/>
           </a:p>
         </p:txBody>
       </p:sp>
@@ -10107,7 +10107,7 @@
               <a:buNone/>
             </a:pPr>
             <a:r>
-              <a:rPr lang="en-US" sz="1300" dirty="0">
+              <a:rPr lang="en-US" sz="1400" dirty="0">
                 <a:solidFill>
                   <a:srgbClr val="38495C"/>
                 </a:solidFill>
@@ -10117,7 +10117,7 @@
               </a:rPr>
               <a:t>studia humanitatis · The Revival of Ancient Learning</a:t>
             </a:r>
-            <a:endParaRPr lang="en-US" sz="1300" dirty="0"/>
+            <a:endParaRPr lang="en-US" sz="1400" dirty="0"/>
           </a:p>
         </p:txBody>
       </p:sp>
@@ -10150,7 +10150,7 @@
         <p:spPr>
           <a:xfrm>
             <a:off x="274320" y="1188720"/>
-            <a:ext cx="4206240" cy="3611880"/>
+            <a:ext cx="4206240" cy="3749040"/>
           </a:xfrm>
           <a:prstGeom prst="rect">
             <a:avLst/>
@@ -10170,23 +10170,23 @@
         <p:spPr>
           <a:xfrm>
             <a:off x="411480" y="1261872"/>
-            <a:ext cx="3931920" cy="292608"/>
-          </a:xfrm>
-          <a:prstGeom prst="rect">
-            <a:avLst/>
-          </a:prstGeom>
-          <a:noFill/>
-          <a:ln/>
-        </p:spPr>
-        <p:txBody>
-          <a:bodyPr wrap="square" rtlCol="0" anchor="ctr"/>
-          <a:lstStyle/>
-          <a:p>
-            <a:pPr indent="0" marL="0">
-              <a:buNone/>
-            </a:pPr>
-            <a:r>
-              <a:rPr lang="en-US" sz="1200" b="1" dirty="0">
+            <a:ext cx="3931920" cy="365760"/>
+          </a:xfrm>
+          <a:prstGeom prst="rect">
+            <a:avLst/>
+          </a:prstGeom>
+          <a:noFill/>
+          <a:ln/>
+        </p:spPr>
+        <p:txBody>
+          <a:bodyPr wrap="square" lIns="0" tIns="0" rIns="0" bIns="0" rtlCol="0" anchor="ctr"/>
+          <a:lstStyle/>
+          <a:p>
+            <a:pPr indent="0" marL="0">
+              <a:buNone/>
+            </a:pPr>
+            <a:r>
+              <a:rPr lang="en-US" sz="1400" b="1" dirty="0">
                 <a:solidFill>
                   <a:srgbClr val="7A2830"/>
                 </a:solidFill>
@@ -10194,9 +10194,9 @@
                 <a:ea typeface="Georgia" pitchFamily="34" charset="-122"/>
                 <a:cs typeface="Georgia" pitchFamily="34" charset="-120"/>
               </a:rPr>
-              <a:t>📖 核心理念 Core Ideas</a:t>
-            </a:r>
-            <a:endParaRPr lang="en-US" sz="1200" dirty="0"/>
+              <a:t>■ 核心理念 Core Ideas</a:t>
+            </a:r>
+            <a:endParaRPr lang="en-US" sz="1400" dirty="0"/>
           </a:p>
         </p:txBody>
       </p:sp>
@@ -10208,27 +10208,27 @@
         </p:nvSpPr>
         <p:spPr>
           <a:xfrm>
-            <a:off x="457200" y="1572768"/>
-            <a:ext cx="3977640" cy="3154680"/>
-          </a:xfrm>
-          <a:prstGeom prst="rect">
-            <a:avLst/>
-          </a:prstGeom>
-          <a:noFill/>
-          <a:ln/>
-        </p:spPr>
-        <p:txBody>
-          <a:bodyPr wrap="square" rtlCol="0" anchor="ctr"/>
+            <a:off x="457200" y="1719072"/>
+            <a:ext cx="3977640" cy="3246120"/>
+          </a:xfrm>
+          <a:prstGeom prst="rect">
+            <a:avLst/>
+          </a:prstGeom>
+          <a:noFill/>
+          <a:ln/>
+        </p:spPr>
+        <p:txBody>
+          <a:bodyPr wrap="square" rtlCol="0" anchor="t"/>
           <a:lstStyle/>
           <a:p>
             <a:pPr indent="0" marL="0">
               <a:spcAft>
-                <a:spcPts val="300"/>
+                <a:spcPts val="100"/>
               </a:spcAft>
               <a:buNone/>
             </a:pPr>
             <a:r>
-              <a:rPr lang="en-US" sz="950" dirty="0">
+              <a:rPr lang="en-US" sz="1400" dirty="0">
                 <a:solidFill>
                   <a:srgbClr val="1C2A3A"/>
                 </a:solidFill>
@@ -10238,17 +10238,17 @@
               </a:rPr>
               <a:t>• studia humanitatis：文法、修辭、詩學、歷史、道德哲學</a:t>
             </a:r>
-            <a:endParaRPr lang="en-US" sz="950" dirty="0"/>
+            <a:endParaRPr lang="en-US" sz="1400" dirty="0"/>
           </a:p>
           <a:p>
             <a:pPr indent="0" marL="0">
               <a:spcAft>
-                <a:spcPts val="300"/>
+                <a:spcPts val="100"/>
               </a:spcAft>
               <a:buNone/>
             </a:pPr>
             <a:r>
-              <a:rPr lang="en-US" sz="950" dirty="0">
+              <a:rPr lang="en-US" sz="1400" dirty="0">
                 <a:solidFill>
                   <a:srgbClr val="1C2A3A"/>
                 </a:solidFill>
@@ -10258,17 +10258,17 @@
               </a:rPr>
               <a:t>• 反對經院哲學的邏輯與權威——轉而重視個人道德、公民生活</a:t>
             </a:r>
-            <a:endParaRPr lang="en-US" sz="950" dirty="0"/>
+            <a:endParaRPr lang="en-US" sz="1400" dirty="0"/>
           </a:p>
           <a:p>
             <a:pPr indent="0" marL="0">
               <a:spcAft>
-                <a:spcPts val="300"/>
+                <a:spcPts val="100"/>
               </a:spcAft>
               <a:buNone/>
             </a:pPr>
             <a:r>
-              <a:rPr lang="en-US" sz="950" dirty="0">
+              <a:rPr lang="en-US" sz="1400" dirty="0">
                 <a:solidFill>
                   <a:srgbClr val="1C2A3A"/>
                 </a:solidFill>
@@ -10278,17 +10278,17 @@
               </a:rPr>
               <a:t>• 古典希臘與羅馬文獻的廣泛取得（拜占庭學者西遷）</a:t>
             </a:r>
-            <a:endParaRPr lang="en-US" sz="950" dirty="0"/>
+            <a:endParaRPr lang="en-US" sz="1400" dirty="0"/>
           </a:p>
           <a:p>
             <a:pPr indent="0" marL="0">
               <a:spcAft>
-                <a:spcPts val="300"/>
+                <a:spcPts val="100"/>
               </a:spcAft>
               <a:buNone/>
             </a:pPr>
             <a:r>
-              <a:rPr lang="en-US" sz="950" dirty="0">
+              <a:rPr lang="en-US" sz="1400" dirty="0">
                 <a:solidFill>
                   <a:srgbClr val="1C2A3A"/>
                 </a:solidFill>
@@ -10298,17 +10298,17 @@
               </a:rPr>
               <a:t>• 對人類尊嚴、理性、感官經驗的信心</a:t>
             </a:r>
-            <a:endParaRPr lang="en-US" sz="950" dirty="0"/>
+            <a:endParaRPr lang="en-US" sz="1400" dirty="0"/>
           </a:p>
           <a:p>
             <a:pPr indent="0" marL="0">
               <a:spcAft>
-                <a:spcPts val="300"/>
+                <a:spcPts val="100"/>
               </a:spcAft>
               <a:buNone/>
             </a:pPr>
             <a:r>
-              <a:rPr lang="en-US" sz="950" dirty="0">
+              <a:rPr lang="en-US" sz="1400" dirty="0">
                 <a:solidFill>
                   <a:srgbClr val="1C2A3A"/>
                 </a:solidFill>
@@ -10318,17 +10318,17 @@
               </a:rPr>
               <a:t>• 與基督教融合——而非取代</a:t>
             </a:r>
-            <a:endParaRPr lang="en-US" sz="950" dirty="0"/>
+            <a:endParaRPr lang="en-US" sz="1400" dirty="0"/>
           </a:p>
           <a:p>
             <a:pPr indent="0" marL="0">
               <a:spcAft>
-                <a:spcPts val="300"/>
+                <a:spcPts val="100"/>
               </a:spcAft>
               <a:buNone/>
             </a:pPr>
             <a:r>
-              <a:rPr lang="en-US" sz="950" dirty="0">
+              <a:rPr lang="en-US" sz="1400" dirty="0">
                 <a:solidFill>
                   <a:srgbClr val="1C2A3A"/>
                 </a:solidFill>
@@ -10338,7 +10338,7 @@
               </a:rPr>
               <a:t>• 重塑大學課程，影響藝術家、音樂家、政治家</a:t>
             </a:r>
-            <a:endParaRPr lang="en-US" sz="950" dirty="0"/>
+            <a:endParaRPr lang="en-US" sz="1400" dirty="0"/>
           </a:p>
         </p:txBody>
       </p:sp>
@@ -10351,7 +10351,7 @@
         <p:spPr>
           <a:xfrm>
             <a:off x="4663440" y="1188720"/>
-            <a:ext cx="4206240" cy="3611880"/>
+            <a:ext cx="4206240" cy="3749040"/>
           </a:xfrm>
           <a:prstGeom prst="rect">
             <a:avLst/>
@@ -10371,23 +10371,23 @@
         <p:spPr>
           <a:xfrm>
             <a:off x="4800600" y="1261872"/>
-            <a:ext cx="3931920" cy="292608"/>
-          </a:xfrm>
-          <a:prstGeom prst="rect">
-            <a:avLst/>
-          </a:prstGeom>
-          <a:noFill/>
-          <a:ln/>
-        </p:spPr>
-        <p:txBody>
-          <a:bodyPr wrap="square" rtlCol="0" anchor="ctr"/>
-          <a:lstStyle/>
-          <a:p>
-            <a:pPr indent="0" marL="0">
-              <a:buNone/>
-            </a:pPr>
-            <a:r>
-              <a:rPr lang="en-US" sz="1200" b="1" dirty="0">
+            <a:ext cx="3931920" cy="365760"/>
+          </a:xfrm>
+          <a:prstGeom prst="rect">
+            <a:avLst/>
+          </a:prstGeom>
+          <a:noFill/>
+          <a:ln/>
+        </p:spPr>
+        <p:txBody>
+          <a:bodyPr wrap="square" lIns="0" tIns="0" rIns="0" bIns="0" rtlCol="0" anchor="ctr"/>
+          <a:lstStyle/>
+          <a:p>
+            <a:pPr indent="0" marL="0">
+              <a:buNone/>
+            </a:pPr>
+            <a:r>
+              <a:rPr lang="en-US" sz="1400" b="1" dirty="0">
                 <a:solidFill>
                   <a:srgbClr val="7A2830"/>
                 </a:solidFill>
@@ -10395,9 +10395,9 @@
                 <a:ea typeface="Georgia" pitchFamily="34" charset="-122"/>
                 <a:cs typeface="Georgia" pitchFamily="34" charset="-120"/>
               </a:rPr>
-              <a:t>🎵 對音樂的影響 Effects on Music</a:t>
-            </a:r>
-            <a:endParaRPr lang="en-US" sz="1200" dirty="0"/>
+              <a:t>■ 對音樂的影響 Effects on Music</a:t>
+            </a:r>
+            <a:endParaRPr lang="en-US" sz="1400" dirty="0"/>
           </a:p>
         </p:txBody>
       </p:sp>
@@ -10409,27 +10409,27 @@
         </p:nvSpPr>
         <p:spPr>
           <a:xfrm>
-            <a:off x="4846320" y="1572768"/>
-            <a:ext cx="3977640" cy="3154680"/>
-          </a:xfrm>
-          <a:prstGeom prst="rect">
-            <a:avLst/>
-          </a:prstGeom>
-          <a:noFill/>
-          <a:ln/>
-        </p:spPr>
-        <p:txBody>
-          <a:bodyPr wrap="square" rtlCol="0" anchor="ctr"/>
+            <a:off x="4846320" y="1719072"/>
+            <a:ext cx="3977640" cy="3246120"/>
+          </a:xfrm>
+          <a:prstGeom prst="rect">
+            <a:avLst/>
+          </a:prstGeom>
+          <a:noFill/>
+          <a:ln/>
+        </p:spPr>
+        <p:txBody>
+          <a:bodyPr wrap="square" rtlCol="0" anchor="t"/>
           <a:lstStyle/>
           <a:p>
             <a:pPr indent="0" marL="0">
               <a:spcAft>
-                <a:spcPts val="300"/>
+                <a:spcPts val="100"/>
               </a:spcAft>
               <a:buNone/>
             </a:pPr>
             <a:r>
-              <a:rPr lang="en-US" sz="950" dirty="0">
+              <a:rPr lang="en-US" sz="1400" dirty="0">
                 <a:solidFill>
                   <a:srgbClr val="1C2A3A"/>
                 </a:solidFill>
@@ -10439,17 +10439,17 @@
               </a:rPr>
               <a:t>• 古代音樂論著的再發現（Aristides Quintilianus、Ptolemy、Cleonides）</a:t>
             </a:r>
-            <a:endParaRPr lang="en-US" sz="950" dirty="0"/>
+            <a:endParaRPr lang="en-US" sz="1400" dirty="0"/>
           </a:p>
           <a:p>
             <a:pPr indent="0" marL="0">
               <a:spcAft>
-                <a:spcPts val="300"/>
+                <a:spcPts val="100"/>
               </a:spcAft>
               <a:buNone/>
             </a:pPr>
             <a:r>
-              <a:rPr lang="en-US" sz="950" dirty="0">
+              <a:rPr lang="en-US" sz="1400" dirty="0">
                 <a:solidFill>
                   <a:srgbClr val="1C2A3A"/>
                 </a:solidFill>
@@ -10459,17 +10459,17 @@
               </a:rPr>
               <a:t>• Aristotle、Plato、Quintilian 視音樂為公民教育必備</a:t>
             </a:r>
-            <a:endParaRPr lang="en-US" sz="950" dirty="0"/>
+            <a:endParaRPr lang="en-US" sz="1400" dirty="0"/>
           </a:p>
           <a:p>
             <a:pPr indent="0" marL="0">
               <a:spcAft>
-                <a:spcPts val="300"/>
+                <a:spcPts val="100"/>
               </a:spcAft>
               <a:buNone/>
             </a:pPr>
             <a:r>
-              <a:rPr lang="en-US" sz="950" dirty="0">
+              <a:rPr lang="en-US" sz="1400" dirty="0">
                 <a:solidFill>
                   <a:srgbClr val="1C2A3A"/>
                 </a:solidFill>
@@ -10479,17 +10479,17 @@
               </a:rPr>
               <a:t>• 修辭學思維進入作曲——結構、說服、清晰度</a:t>
             </a:r>
-            <a:endParaRPr lang="en-US" sz="950" dirty="0"/>
+            <a:endParaRPr lang="en-US" sz="1400" dirty="0"/>
           </a:p>
           <a:p>
             <a:pPr indent="0" marL="0">
               <a:spcAft>
-                <a:spcPts val="300"/>
+                <a:spcPts val="100"/>
               </a:spcAft>
               <a:buNone/>
             </a:pPr>
             <a:r>
-              <a:rPr lang="en-US" sz="950" dirty="0">
+              <a:rPr lang="en-US" sz="1400" dirty="0">
                 <a:solidFill>
                   <a:srgbClr val="1C2A3A"/>
                 </a:solidFill>
@@ -10499,17 +10499,17 @@
               </a:rPr>
               <a:t>• 對詞曲關係的新重視——自然音節與意義</a:t>
             </a:r>
-            <a:endParaRPr lang="en-US" sz="950" dirty="0"/>
+            <a:endParaRPr lang="en-US" sz="1400" dirty="0"/>
           </a:p>
           <a:p>
             <a:pPr indent="0" marL="0">
               <a:spcAft>
-                <a:spcPts val="300"/>
+                <a:spcPts val="100"/>
               </a:spcAft>
               <a:buNone/>
             </a:pPr>
             <a:r>
-              <a:rPr lang="en-US" sz="950" dirty="0">
+              <a:rPr lang="en-US" sz="1400" dirty="0">
                 <a:solidFill>
                   <a:srgbClr val="1C2A3A"/>
                 </a:solidFill>
@@ -10519,17 +10519,17 @@
               </a:rPr>
               <a:t>• 音樂被視為「有表情的語言」</a:t>
             </a:r>
-            <a:endParaRPr lang="en-US" sz="950" dirty="0"/>
+            <a:endParaRPr lang="en-US" sz="1400" dirty="0"/>
           </a:p>
           <a:p>
             <a:pPr indent="0" marL="0">
               <a:spcAft>
-                <a:spcPts val="300"/>
+                <a:spcPts val="100"/>
               </a:spcAft>
               <a:buNone/>
             </a:pPr>
             <a:r>
-              <a:rPr lang="en-US" sz="950" dirty="0">
+              <a:rPr lang="en-US" sz="1400" dirty="0">
                 <a:solidFill>
                   <a:srgbClr val="1C2A3A"/>
                 </a:solidFill>
@@ -10539,17 +10539,17 @@
               </a:rPr>
               <a:t>• 音樂作為紳士仕女社交禮儀的一部分（彈琵琶而非吹笛）</a:t>
             </a:r>
-            <a:endParaRPr lang="en-US" sz="950" dirty="0"/>
+            <a:endParaRPr lang="en-US" sz="1400" dirty="0"/>
           </a:p>
           <a:p>
             <a:pPr indent="0" marL="0">
               <a:spcAft>
-                <a:spcPts val="300"/>
+                <a:spcPts val="100"/>
               </a:spcAft>
               <a:buNone/>
             </a:pPr>
             <a:r>
-              <a:rPr lang="en-US" sz="950" dirty="0">
+              <a:rPr lang="en-US" sz="1400" dirty="0">
                 <a:solidFill>
                   <a:srgbClr val="1C2A3A"/>
                 </a:solidFill>
@@ -10559,7 +10559,7 @@
               </a:rPr>
               <a:t>• Franchino Gaffurio（1451–1522）融合古代理論與當代實踐</a:t>
             </a:r>
-            <a:endParaRPr lang="en-US" sz="950" dirty="0"/>
+            <a:endParaRPr lang="en-US" sz="1400" dirty="0"/>
           </a:p>
         </p:txBody>
       </p:sp>
@@ -10699,7 +10699,7 @@
               <a:buNone/>
             </a:pPr>
             <a:r>
-              <a:rPr lang="en-US" sz="1300" dirty="0">
+              <a:rPr lang="en-US" sz="1400" dirty="0">
                 <a:solidFill>
                   <a:srgbClr val="E8D8A8"/>
                 </a:solidFill>
@@ -10709,7 +10709,7 @@
               </a:rPr>
               <a:t>Sculpture, Painting, Architecture · Parallels with Music</a:t>
             </a:r>
-            <a:endParaRPr lang="en-US" sz="1300" dirty="0"/>
+            <a:endParaRPr lang="en-US" sz="1400" dirty="0"/>
           </a:p>
         </p:txBody>
       </p:sp>
@@ -10762,7 +10762,7 @@
         <p:spPr>
           <a:xfrm>
             <a:off x="365760" y="1207008"/>
-            <a:ext cx="2651760" cy="292608"/>
+            <a:ext cx="2651760" cy="365760"/>
           </a:xfrm>
           <a:prstGeom prst="rect">
             <a:avLst/>
@@ -10778,7 +10778,7 @@
               <a:buNone/>
             </a:pPr>
             <a:r>
-              <a:rPr lang="en-US" sz="1100" b="1" dirty="0">
+              <a:rPr lang="en-US" sz="1400" b="1" dirty="0">
                 <a:solidFill>
                   <a:srgbClr val="1C2A3A"/>
                 </a:solidFill>
@@ -10788,7 +10788,7 @@
               </a:rPr>
               <a:t>藝術元素</a:t>
             </a:r>
-            <a:endParaRPr lang="en-US" sz="1100" dirty="0"/>
+            <a:endParaRPr lang="en-US" sz="1400" dirty="0"/>
           </a:p>
         </p:txBody>
       </p:sp>
@@ -10801,7 +10801,7 @@
         <p:spPr>
           <a:xfrm>
             <a:off x="3017520" y="1207008"/>
-            <a:ext cx="3108960" cy="292608"/>
+            <a:ext cx="3108960" cy="365760"/>
           </a:xfrm>
           <a:prstGeom prst="rect">
             <a:avLst/>
@@ -10817,7 +10817,7 @@
               <a:buNone/>
             </a:pPr>
             <a:r>
-              <a:rPr lang="en-US" sz="1100" b="1" dirty="0">
+              <a:rPr lang="en-US" sz="1400" b="1" dirty="0">
                 <a:solidFill>
                   <a:srgbClr val="1C2A3A"/>
                 </a:solidFill>
@@ -10827,7 +10827,7 @@
               </a:rPr>
               <a:t>藝術中的表現 Artistic Expression</a:t>
             </a:r>
-            <a:endParaRPr lang="en-US" sz="1100" dirty="0"/>
+            <a:endParaRPr lang="en-US" sz="1400" dirty="0"/>
           </a:p>
         </p:txBody>
       </p:sp>
@@ -10840,7 +10840,7 @@
         <p:spPr>
           <a:xfrm>
             <a:off x="6126480" y="1207008"/>
-            <a:ext cx="2743200" cy="292608"/>
+            <a:ext cx="2743200" cy="365760"/>
           </a:xfrm>
           <a:prstGeom prst="rect">
             <a:avLst/>
@@ -10856,7 +10856,7 @@
               <a:buNone/>
             </a:pPr>
             <a:r>
-              <a:rPr lang="en-US" sz="1100" b="1" dirty="0">
+              <a:rPr lang="en-US" sz="1400" b="1" dirty="0">
                 <a:solidFill>
                   <a:srgbClr val="1C2A3A"/>
                 </a:solidFill>
@@ -10866,7 +10866,7 @@
               </a:rPr>
               <a:t>音樂中的對應 Musical Parallel</a:t>
             </a:r>
-            <a:endParaRPr lang="en-US" sz="1100" dirty="0"/>
+            <a:endParaRPr lang="en-US" sz="1400" dirty="0"/>
           </a:p>
         </p:txBody>
       </p:sp>
@@ -10908,14 +10908,14 @@
           <a:ln/>
         </p:spPr>
         <p:txBody>
-          <a:bodyPr wrap="square" rtlCol="0" anchor="ctr"/>
-          <a:lstStyle/>
-          <a:p>
-            <a:pPr indent="0" marL="0">
-              <a:buNone/>
-            </a:pPr>
-            <a:r>
-              <a:rPr lang="en-US" sz="950" b="1" dirty="0">
+          <a:bodyPr wrap="square" lIns="0" tIns="0" rIns="0" bIns="0" rtlCol="0" anchor="ctr"/>
+          <a:lstStyle/>
+          <a:p>
+            <a:pPr indent="0" marL="0">
+              <a:buNone/>
+            </a:pPr>
+            <a:r>
+              <a:rPr lang="en-US" sz="1400" b="1" dirty="0">
                 <a:solidFill>
                   <a:srgbClr val="C8A020"/>
                 </a:solidFill>
@@ -10925,7 +10925,7 @@
               </a:rPr>
               <a:t>Donatello 《David》(1440s)</a:t>
             </a:r>
-            <a:endParaRPr lang="en-US" sz="950" dirty="0"/>
+            <a:endParaRPr lang="en-US" sz="1400" dirty="0"/>
           </a:p>
         </p:txBody>
       </p:sp>
@@ -10947,14 +10947,14 @@
           <a:ln/>
         </p:spPr>
         <p:txBody>
-          <a:bodyPr wrap="square" rtlCol="0" anchor="ctr"/>
-          <a:lstStyle/>
-          <a:p>
-            <a:pPr indent="0" marL="0">
-              <a:buNone/>
-            </a:pPr>
-            <a:r>
-              <a:rPr lang="en-US" sz="850" dirty="0">
+          <a:bodyPr wrap="square" rtlCol="0" anchor="t"/>
+          <a:lstStyle/>
+          <a:p>
+            <a:pPr indent="0" marL="0">
+              <a:buNone/>
+            </a:pPr>
+            <a:r>
+              <a:rPr lang="en-US" sz="1400" dirty="0">
                 <a:solidFill>
                   <a:srgbClr val="E8D8A8"/>
                 </a:solidFill>
@@ -10964,7 +10964,7 @@
               </a:rPr>
               <a:t>羅馬時代以來第一尊獨立裸體雕像——古典復興傳達宗教主題</a:t>
             </a:r>
-            <a:endParaRPr lang="en-US" sz="850" dirty="0"/>
+            <a:endParaRPr lang="en-US" sz="1400" dirty="0"/>
           </a:p>
         </p:txBody>
       </p:sp>
@@ -10986,14 +10986,14 @@
           <a:ln/>
         </p:spPr>
         <p:txBody>
-          <a:bodyPr wrap="square" rtlCol="0" anchor="ctr"/>
-          <a:lstStyle/>
-          <a:p>
-            <a:pPr indent="0" marL="0">
-              <a:buNone/>
-            </a:pPr>
-            <a:r>
-              <a:rPr lang="en-US" sz="850" dirty="0">
+          <a:bodyPr wrap="square" rtlCol="0" anchor="t"/>
+          <a:lstStyle/>
+          <a:p>
+            <a:pPr indent="0" marL="0">
+              <a:buNone/>
+            </a:pPr>
+            <a:r>
+              <a:rPr lang="en-US" sz="1400" dirty="0">
                 <a:solidFill>
                   <a:srgbClr val="E8D8A8"/>
                 </a:solidFill>
@@ -11003,7 +11003,7 @@
               </a:rPr>
               <a:t>Composers 使用對比音色、力度支持文字情感</a:t>
             </a:r>
-            <a:endParaRPr lang="en-US" sz="850" dirty="0"/>
+            <a:endParaRPr lang="en-US" sz="1400" dirty="0"/>
           </a:p>
         </p:txBody>
       </p:sp>
@@ -11045,14 +11045,14 @@
           <a:ln/>
         </p:spPr>
         <p:txBody>
-          <a:bodyPr wrap="square" rtlCol="0" anchor="ctr"/>
-          <a:lstStyle/>
-          <a:p>
-            <a:pPr indent="0" marL="0">
-              <a:buNone/>
-            </a:pPr>
-            <a:r>
-              <a:rPr lang="en-US" sz="950" b="1" dirty="0">
+          <a:bodyPr wrap="square" lIns="0" tIns="0" rIns="0" bIns="0" rtlCol="0" anchor="ctr"/>
+          <a:lstStyle/>
+          <a:p>
+            <a:pPr indent="0" marL="0">
+              <a:buNone/>
+            </a:pPr>
+            <a:r>
+              <a:rPr lang="en-US" sz="1400" b="1" dirty="0">
                 <a:solidFill>
                   <a:srgbClr val="C8A020"/>
                 </a:solidFill>
@@ -11062,7 +11062,7 @@
               </a:rPr>
               <a:t>Masaccio 《Holy Trinity》(1425–28)</a:t>
             </a:r>
-            <a:endParaRPr lang="en-US" sz="950" dirty="0"/>
+            <a:endParaRPr lang="en-US" sz="1400" dirty="0"/>
           </a:p>
         </p:txBody>
       </p:sp>
@@ -11084,14 +11084,14 @@
           <a:ln/>
         </p:spPr>
         <p:txBody>
-          <a:bodyPr wrap="square" rtlCol="0" anchor="ctr"/>
-          <a:lstStyle/>
-          <a:p>
-            <a:pPr indent="0" marL="0">
-              <a:buNone/>
-            </a:pPr>
-            <a:r>
-              <a:rPr lang="en-US" sz="850" dirty="0">
+          <a:bodyPr wrap="square" rtlCol="0" anchor="t"/>
+          <a:lstStyle/>
+          <a:p>
+            <a:pPr indent="0" marL="0">
+              <a:buNone/>
+            </a:pPr>
+            <a:r>
+              <a:rPr lang="en-US" sz="1400" dirty="0">
                 <a:solidFill>
                   <a:srgbClr val="E8D8A8"/>
                 </a:solidFill>
@@ -11101,7 +11101,7 @@
               </a:rPr>
               <a:t>早期透視法運用——單一消失點、深度錯覺、個人捐贈者像</a:t>
             </a:r>
-            <a:endParaRPr lang="en-US" sz="850" dirty="0"/>
+            <a:endParaRPr lang="en-US" sz="1400" dirty="0"/>
           </a:p>
         </p:txBody>
       </p:sp>
@@ -11123,14 +11123,14 @@
           <a:ln/>
         </p:spPr>
         <p:txBody>
-          <a:bodyPr wrap="square" rtlCol="0" anchor="ctr"/>
-          <a:lstStyle/>
-          <a:p>
-            <a:pPr indent="0" marL="0">
-              <a:buNone/>
-            </a:pPr>
-            <a:r>
-              <a:rPr lang="en-US" sz="850" dirty="0">
+          <a:bodyPr wrap="square" rtlCol="0" anchor="t"/>
+          <a:lstStyle/>
+          <a:p>
+            <a:pPr indent="0" marL="0">
+              <a:buNone/>
+            </a:pPr>
+            <a:r>
+              <a:rPr lang="en-US" sz="1400" dirty="0">
                 <a:solidFill>
                   <a:srgbClr val="E8D8A8"/>
                 </a:solidFill>
@@ -11140,7 +11140,7 @@
               </a:rPr>
               <a:t>樂曲調式清晰——所有樂句終止於主要音（final、reciting tone）</a:t>
             </a:r>
-            <a:endParaRPr lang="en-US" sz="850" dirty="0"/>
+            <a:endParaRPr lang="en-US" sz="1400" dirty="0"/>
           </a:p>
         </p:txBody>
       </p:sp>
@@ -11182,14 +11182,14 @@
           <a:ln/>
         </p:spPr>
         <p:txBody>
-          <a:bodyPr wrap="square" rtlCol="0" anchor="ctr"/>
-          <a:lstStyle/>
-          <a:p>
-            <a:pPr indent="0" marL="0">
-              <a:buNone/>
-            </a:pPr>
-            <a:r>
-              <a:rPr lang="en-US" sz="950" b="1" dirty="0">
+          <a:bodyPr wrap="square" lIns="0" tIns="0" rIns="0" bIns="0" rtlCol="0" anchor="ctr"/>
+          <a:lstStyle/>
+          <a:p>
+            <a:pPr indent="0" marL="0">
+              <a:buNone/>
+            </a:pPr>
+            <a:r>
+              <a:rPr lang="en-US" sz="1400" b="1" dirty="0">
                 <a:solidFill>
                   <a:srgbClr val="C8A020"/>
                 </a:solidFill>
@@ -11199,7 +11199,7 @@
               </a:rPr>
               <a:t>Perspective 透視法</a:t>
             </a:r>
-            <a:endParaRPr lang="en-US" sz="950" dirty="0"/>
+            <a:endParaRPr lang="en-US" sz="1400" dirty="0"/>
           </a:p>
         </p:txBody>
       </p:sp>
@@ -11221,14 +11221,14 @@
           <a:ln/>
         </p:spPr>
         <p:txBody>
-          <a:bodyPr wrap="square" rtlCol="0" anchor="ctr"/>
-          <a:lstStyle/>
-          <a:p>
-            <a:pPr indent="0" marL="0">
-              <a:buNone/>
-            </a:pPr>
-            <a:r>
-              <a:rPr lang="en-US" sz="850" dirty="0">
+          <a:bodyPr wrap="square" rtlCol="0" anchor="t"/>
+          <a:lstStyle/>
+          <a:p>
+            <a:pPr indent="0" marL="0">
+              <a:buNone/>
+            </a:pPr>
+            <a:r>
+              <a:rPr lang="en-US" sz="1400" dirty="0">
                 <a:solidFill>
                   <a:srgbClr val="E8D8A8"/>
                 </a:solidFill>
@@ -11238,7 +11238,7 @@
               </a:rPr>
               <a:t>平行線匯聚於單一消失點——二維平面創造三維幻覺</a:t>
             </a:r>
-            <a:endParaRPr lang="en-US" sz="850" dirty="0"/>
+            <a:endParaRPr lang="en-US" sz="1400" dirty="0"/>
           </a:p>
         </p:txBody>
       </p:sp>
@@ -11260,14 +11260,14 @@
           <a:ln/>
         </p:spPr>
         <p:txBody>
-          <a:bodyPr wrap="square" rtlCol="0" anchor="ctr"/>
-          <a:lstStyle/>
-          <a:p>
-            <a:pPr indent="0" marL="0">
-              <a:buNone/>
-            </a:pPr>
-            <a:r>
-              <a:rPr lang="en-US" sz="850" dirty="0">
+          <a:bodyPr wrap="square" rtlCol="0" anchor="t"/>
+          <a:lstStyle/>
+          <a:p>
+            <a:pPr indent="0" marL="0">
+              <a:buNone/>
+            </a:pPr>
+            <a:r>
+              <a:rPr lang="en-US" sz="1400" dirty="0">
                 <a:solidFill>
                   <a:srgbClr val="E8D8A8"/>
                 </a:solidFill>
@@ -11277,7 +11277,7 @@
               </a:rPr>
               <a:t>音樂的「方向感」——圍繞單一參考點的和聲結構</a:t>
             </a:r>
-            <a:endParaRPr lang="en-US" sz="850" dirty="0"/>
+            <a:endParaRPr lang="en-US" sz="1400" dirty="0"/>
           </a:p>
         </p:txBody>
       </p:sp>
@@ -11319,14 +11319,14 @@
           <a:ln/>
         </p:spPr>
         <p:txBody>
-          <a:bodyPr wrap="square" rtlCol="0" anchor="ctr"/>
-          <a:lstStyle/>
-          <a:p>
-            <a:pPr indent="0" marL="0">
-              <a:buNone/>
-            </a:pPr>
-            <a:r>
-              <a:rPr lang="en-US" sz="950" b="1" dirty="0">
+          <a:bodyPr wrap="square" lIns="0" tIns="0" rIns="0" bIns="0" rtlCol="0" anchor="ctr"/>
+          <a:lstStyle/>
+          <a:p>
+            <a:pPr indent="0" marL="0">
+              <a:buNone/>
+            </a:pPr>
+            <a:r>
+              <a:rPr lang="en-US" sz="1400" b="1" dirty="0">
                 <a:solidFill>
                   <a:srgbClr val="C8A020"/>
                 </a:solidFill>
@@ -11336,7 +11336,7 @@
               </a:rPr>
               <a:t>Chiaroscuro 明暗法</a:t>
             </a:r>
-            <a:endParaRPr lang="en-US" sz="950" dirty="0"/>
+            <a:endParaRPr lang="en-US" sz="1400" dirty="0"/>
           </a:p>
         </p:txBody>
       </p:sp>
@@ -11358,14 +11358,14 @@
           <a:ln/>
         </p:spPr>
         <p:txBody>
-          <a:bodyPr wrap="square" rtlCol="0" anchor="ctr"/>
-          <a:lstStyle/>
-          <a:p>
-            <a:pPr indent="0" marL="0">
-              <a:buNone/>
-            </a:pPr>
-            <a:r>
-              <a:rPr lang="en-US" sz="850" dirty="0">
+          <a:bodyPr wrap="square" rtlCol="0" anchor="t"/>
+          <a:lstStyle/>
+          <a:p>
+            <a:pPr indent="0" marL="0">
+              <a:buNone/>
+            </a:pPr>
+            <a:r>
+              <a:rPr lang="en-US" sz="1400" dirty="0">
                 <a:solidFill>
                   <a:srgbClr val="E8D8A8"/>
                 </a:solidFill>
@@ -11375,7 +11375,7 @@
               </a:rPr>
               <a:t>自然的光影處理——物體立體感與空間感</a:t>
             </a:r>
-            <a:endParaRPr lang="en-US" sz="850" dirty="0"/>
+            <a:endParaRPr lang="en-US" sz="1400" dirty="0"/>
           </a:p>
         </p:txBody>
       </p:sp>
@@ -11397,14 +11397,14 @@
           <a:ln/>
         </p:spPr>
         <p:txBody>
-          <a:bodyPr wrap="square" rtlCol="0" anchor="ctr"/>
-          <a:lstStyle/>
-          <a:p>
-            <a:pPr indent="0" marL="0">
-              <a:buNone/>
-            </a:pPr>
-            <a:r>
-              <a:rPr lang="en-US" sz="850" dirty="0">
+          <a:bodyPr wrap="square" rtlCol="0" anchor="t"/>
+          <a:lstStyle/>
+          <a:p>
+            <a:pPr indent="0" marL="0">
+              <a:buNone/>
+            </a:pPr>
+            <a:r>
+              <a:rPr lang="en-US" sz="1400" dirty="0">
                 <a:solidFill>
                   <a:srgbClr val="E8D8A8"/>
                 </a:solidFill>
@@ -11414,7 +11414,7 @@
               </a:rPr>
               <a:t>高低音域、厚薄織度的對比——光與影的音樂版本</a:t>
             </a:r>
-            <a:endParaRPr lang="en-US" sz="850" dirty="0"/>
+            <a:endParaRPr lang="en-US" sz="1400" dirty="0"/>
           </a:p>
         </p:txBody>
       </p:sp>
@@ -11456,14 +11456,14 @@
           <a:ln/>
         </p:spPr>
         <p:txBody>
-          <a:bodyPr wrap="square" rtlCol="0" anchor="ctr"/>
-          <a:lstStyle/>
-          <a:p>
-            <a:pPr indent="0" marL="0">
-              <a:buNone/>
-            </a:pPr>
-            <a:r>
-              <a:rPr lang="en-US" sz="950" b="1" dirty="0">
+          <a:bodyPr wrap="square" lIns="0" tIns="0" rIns="0" bIns="0" rtlCol="0" anchor="ctr"/>
+          <a:lstStyle/>
+          <a:p>
+            <a:pPr indent="0" marL="0">
+              <a:buNone/>
+            </a:pPr>
+            <a:r>
+              <a:rPr lang="en-US" sz="1400" b="1" dirty="0">
                 <a:solidFill>
                   <a:srgbClr val="C8A020"/>
                 </a:solidFill>
@@ -11473,7 +11473,7 @@
               </a:rPr>
               <a:t>Clarity &amp; Classical Models</a:t>
             </a:r>
-            <a:endParaRPr lang="en-US" sz="950" dirty="0"/>
+            <a:endParaRPr lang="en-US" sz="1400" dirty="0"/>
           </a:p>
         </p:txBody>
       </p:sp>
@@ -11495,14 +11495,14 @@
           <a:ln/>
         </p:spPr>
         <p:txBody>
-          <a:bodyPr wrap="square" rtlCol="0" anchor="ctr"/>
-          <a:lstStyle/>
-          <a:p>
-            <a:pPr indent="0" marL="0">
-              <a:buNone/>
-            </a:pPr>
-            <a:r>
-              <a:rPr lang="en-US" sz="850" dirty="0">
+          <a:bodyPr wrap="square" rtlCol="0" anchor="t"/>
+          <a:lstStyle/>
+          <a:p>
+            <a:pPr indent="0" marL="0">
+              <a:buNone/>
+            </a:pPr>
+            <a:r>
+              <a:rPr lang="en-US" sz="1400" dirty="0">
                 <a:solidFill>
                   <a:srgbClr val="E8D8A8"/>
                 </a:solidFill>
@@ -11512,7 +11512,7 @@
               </a:rPr>
               <a:t>柱式、拱形、對稱——古代建築典範</a:t>
             </a:r>
-            <a:endParaRPr lang="en-US" sz="850" dirty="0"/>
+            <a:endParaRPr lang="en-US" sz="1400" dirty="0"/>
           </a:p>
         </p:txBody>
       </p:sp>
@@ -11534,14 +11534,14 @@
           <a:ln/>
         </p:spPr>
         <p:txBody>
-          <a:bodyPr wrap="square" rtlCol="0" anchor="ctr"/>
-          <a:lstStyle/>
-          <a:p>
-            <a:pPr indent="0" marL="0">
-              <a:buNone/>
-            </a:pPr>
-            <a:r>
-              <a:rPr lang="en-US" sz="850" dirty="0">
+          <a:bodyPr wrap="square" rtlCol="0" anchor="t"/>
+          <a:lstStyle/>
+          <a:p>
+            <a:pPr indent="0" marL="0">
+              <a:buNone/>
+            </a:pPr>
+            <a:r>
+              <a:rPr lang="en-US" sz="1400" dirty="0">
                 <a:solidFill>
                   <a:srgbClr val="E8D8A8"/>
                 </a:solidFill>
@@ -11551,7 +11551,7 @@
               </a:rPr>
               <a:t>清晰終止式、規則對位——古典秩序與美感</a:t>
             </a:r>
-            <a:endParaRPr lang="en-US" sz="850" dirty="0"/>
+            <a:endParaRPr lang="en-US" sz="1400" dirty="0"/>
           </a:p>
         </p:txBody>
       </p:sp>
@@ -11593,14 +11593,14 @@
           <a:ln/>
         </p:spPr>
         <p:txBody>
-          <a:bodyPr wrap="square" rtlCol="0" anchor="ctr"/>
-          <a:lstStyle/>
-          <a:p>
-            <a:pPr indent="0" marL="0">
-              <a:buNone/>
-            </a:pPr>
-            <a:r>
-              <a:rPr lang="en-US" sz="950" b="1" dirty="0">
+          <a:bodyPr wrap="square" lIns="0" tIns="0" rIns="0" bIns="0" rtlCol="0" anchor="ctr"/>
+          <a:lstStyle/>
+          <a:p>
+            <a:pPr indent="0" marL="0">
+              <a:buNone/>
+            </a:pPr>
+            <a:r>
+              <a:rPr lang="en-US" sz="1400" b="1" dirty="0">
                 <a:solidFill>
                   <a:srgbClr val="C8A020"/>
                 </a:solidFill>
@@ -11610,7 +11610,7 @@
               </a:rPr>
               <a:t>Interest in Individuals</a:t>
             </a:r>
-            <a:endParaRPr lang="en-US" sz="950" dirty="0"/>
+            <a:endParaRPr lang="en-US" sz="1400" dirty="0"/>
           </a:p>
         </p:txBody>
       </p:sp>
@@ -11632,14 +11632,14 @@
           <a:ln/>
         </p:spPr>
         <p:txBody>
-          <a:bodyPr wrap="square" rtlCol="0" anchor="ctr"/>
-          <a:lstStyle/>
-          <a:p>
-            <a:pPr indent="0" marL="0">
-              <a:buNone/>
-            </a:pPr>
-            <a:r>
-              <a:rPr lang="en-US" sz="850" dirty="0">
+          <a:bodyPr wrap="square" rtlCol="0" anchor="t"/>
+          <a:lstStyle/>
+          <a:p>
+            <a:pPr indent="0" marL="0">
+              <a:buNone/>
+            </a:pPr>
+            <a:r>
+              <a:rPr lang="en-US" sz="1400" dirty="0">
                 <a:solidFill>
                   <a:srgbClr val="E8D8A8"/>
                 </a:solidFill>
@@ -11649,7 +11649,7 @@
               </a:rPr>
               <a:t>肖像畫興起——捐贈者、藝術家、個人性格</a:t>
             </a:r>
-            <a:endParaRPr lang="en-US" sz="850" dirty="0"/>
+            <a:endParaRPr lang="en-US" sz="1400" dirty="0"/>
           </a:p>
         </p:txBody>
       </p:sp>
@@ -11671,14 +11671,14 @@
           <a:ln/>
         </p:spPr>
         <p:txBody>
-          <a:bodyPr wrap="square" rtlCol="0" anchor="ctr"/>
-          <a:lstStyle/>
-          <a:p>
-            <a:pPr indent="0" marL="0">
-              <a:buNone/>
-            </a:pPr>
-            <a:r>
-              <a:rPr lang="en-US" sz="850" dirty="0">
+          <a:bodyPr wrap="square" rtlCol="0" anchor="t"/>
+          <a:lstStyle/>
+          <a:p>
+            <a:pPr indent="0" marL="0">
+              <a:buNone/>
+            </a:pPr>
+            <a:r>
+              <a:rPr lang="en-US" sz="1400" dirty="0">
                 <a:solidFill>
                   <a:srgbClr val="E8D8A8"/>
                 </a:solidFill>
@@ -11688,7 +11688,7 @@
               </a:rPr>
               <a:t>作曲家成為名人——個人風格、作品集、被研究與模仿</a:t>
             </a:r>
-            <a:endParaRPr lang="en-US" sz="850" dirty="0"/>
+            <a:endParaRPr lang="en-US" sz="1400" dirty="0"/>
           </a:p>
         </p:txBody>
       </p:sp>
@@ -11828,7 +11828,7 @@
               <a:buNone/>
             </a:pPr>
             <a:r>
-              <a:rPr lang="en-US" sz="1300" dirty="0">
+              <a:rPr lang="en-US" sz="1400" dirty="0">
                 <a:solidFill>
                   <a:srgbClr val="38495C"/>
                 </a:solidFill>
@@ -11838,7 +11838,7 @@
               </a:rPr>
               <a:t>Patronage and the Training of Musicians</a:t>
             </a:r>
-            <a:endParaRPr lang="en-US" sz="1300" dirty="0"/>
+            <a:endParaRPr lang="en-US" sz="1400" dirty="0"/>
           </a:p>
         </p:txBody>
       </p:sp>
@@ -11917,7 +11917,7 @@
                   <a:srgbClr val="000000"/>
                 </a:solidFill>
               </a:rPr>
-              <a:t>🏛</a:t>
+              <a:t>■</a:t>
             </a:r>
             <a:endParaRPr lang="en-US" sz="1800" dirty="0"/>
           </a:p>
@@ -11941,14 +11941,14 @@
           <a:ln/>
         </p:spPr>
         <p:txBody>
-          <a:bodyPr wrap="square" rtlCol="0" anchor="ctr"/>
-          <a:lstStyle/>
-          <a:p>
-            <a:pPr indent="0" marL="0">
-              <a:buNone/>
-            </a:pPr>
-            <a:r>
-              <a:rPr lang="en-US" sz="1200" b="1" dirty="0">
+          <a:bodyPr wrap="square" lIns="0" tIns="0" rIns="0" bIns="0" rtlCol="0" anchor="ctr"/>
+          <a:lstStyle/>
+          <a:p>
+            <a:pPr indent="0" marL="0">
+              <a:buNone/>
+            </a:pPr>
+            <a:r>
+              <a:rPr lang="en-US" sz="1400" b="1" dirty="0">
                 <a:solidFill>
                   <a:srgbClr val="2E5A5A"/>
                 </a:solidFill>
@@ -11958,7 +11958,7 @@
               </a:rPr>
               <a:t>Chapel 禮拜堂</a:t>
             </a:r>
-            <a:endParaRPr lang="en-US" sz="1200" dirty="0"/>
+            <a:endParaRPr lang="en-US" sz="1400" dirty="0"/>
           </a:p>
         </p:txBody>
       </p:sp>
@@ -11980,17 +11980,17 @@
           <a:ln/>
         </p:spPr>
         <p:txBody>
-          <a:bodyPr wrap="square" rtlCol="0" anchor="ctr"/>
+          <a:bodyPr wrap="square" rtlCol="0" anchor="t"/>
           <a:lstStyle/>
           <a:p>
             <a:pPr indent="0" marL="0">
               <a:spcAft>
-                <a:spcPts val="200"/>
+                <a:spcPts val="100"/>
               </a:spcAft>
               <a:buNone/>
             </a:pPr>
             <a:r>
-              <a:rPr lang="en-US" sz="900" dirty="0">
+              <a:rPr lang="en-US" sz="1400" dirty="0">
                 <a:solidFill>
                   <a:srgbClr val="1C2A3A"/>
                 </a:solidFill>
@@ -12000,17 +12000,17 @@
               </a:rPr>
               <a:t>神職人員與歌手</a:t>
             </a:r>
-            <a:endParaRPr lang="en-US" sz="900" dirty="0"/>
+            <a:endParaRPr lang="en-US" sz="1400" dirty="0"/>
           </a:p>
           <a:p>
             <a:pPr indent="0" marL="0">
               <a:spcAft>
-                <a:spcPts val="200"/>
+                <a:spcPts val="100"/>
               </a:spcAft>
               <a:buNone/>
             </a:pPr>
             <a:r>
-              <a:rPr lang="en-US" sz="900" dirty="0">
+              <a:rPr lang="en-US" sz="1400" dirty="0">
                 <a:solidFill>
                   <a:srgbClr val="1C2A3A"/>
                 </a:solidFill>
@@ -12020,17 +12020,17 @@
               </a:rPr>
               <a:t>負責宗教儀式音樂</a:t>
             </a:r>
-            <a:endParaRPr lang="en-US" sz="900" dirty="0"/>
+            <a:endParaRPr lang="en-US" sz="1400" dirty="0"/>
           </a:p>
           <a:p>
             <a:pPr indent="0" marL="0">
               <a:spcAft>
-                <a:spcPts val="200"/>
+                <a:spcPts val="100"/>
               </a:spcAft>
               <a:buNone/>
             </a:pPr>
             <a:r>
-              <a:rPr lang="en-US" sz="900" dirty="0">
+              <a:rPr lang="en-US" sz="1400" dirty="0">
                 <a:solidFill>
                   <a:srgbClr val="1C2A3A"/>
                 </a:solidFill>
@@ -12040,7 +12040,7 @@
               </a:rPr>
               <a:t>展現君主虔誠與榮耀</a:t>
             </a:r>
-            <a:endParaRPr lang="en-US" sz="900" dirty="0"/>
+            <a:endParaRPr lang="en-US" sz="1400" dirty="0"/>
           </a:p>
         </p:txBody>
       </p:sp>
@@ -12099,7 +12099,7 @@
                   <a:srgbClr val="000000"/>
                 </a:solidFill>
               </a:rPr>
-              <a:t>🏠</a:t>
+              <a:t>■</a:t>
             </a:r>
             <a:endParaRPr lang="en-US" sz="1800" dirty="0"/>
           </a:p>
@@ -12123,14 +12123,14 @@
           <a:ln/>
         </p:spPr>
         <p:txBody>
-          <a:bodyPr wrap="square" rtlCol="0" anchor="ctr"/>
-          <a:lstStyle/>
-          <a:p>
-            <a:pPr indent="0" marL="0">
-              <a:buNone/>
-            </a:pPr>
-            <a:r>
-              <a:rPr lang="en-US" sz="1200" b="1" dirty="0">
+          <a:bodyPr wrap="square" lIns="0" tIns="0" rIns="0" bIns="0" rtlCol="0" anchor="ctr"/>
+          <a:lstStyle/>
+          <a:p>
+            <a:pPr indent="0" marL="0">
+              <a:buNone/>
+            </a:pPr>
+            <a:r>
+              <a:rPr lang="en-US" sz="1400" b="1" dirty="0">
                 <a:solidFill>
                   <a:srgbClr val="2E5A5A"/>
                 </a:solidFill>
@@ -12140,7 +12140,7 @@
               </a:rPr>
               <a:t>Chamber 宮內</a:t>
             </a:r>
-            <a:endParaRPr lang="en-US" sz="1200" dirty="0"/>
+            <a:endParaRPr lang="en-US" sz="1400" dirty="0"/>
           </a:p>
         </p:txBody>
       </p:sp>
@@ -12162,17 +12162,17 @@
           <a:ln/>
         </p:spPr>
         <p:txBody>
-          <a:bodyPr wrap="square" rtlCol="0" anchor="ctr"/>
+          <a:bodyPr wrap="square" rtlCol="0" anchor="t"/>
           <a:lstStyle/>
           <a:p>
             <a:pPr indent="0" marL="0">
               <a:spcAft>
-                <a:spcPts val="200"/>
+                <a:spcPts val="100"/>
               </a:spcAft>
               <a:buNone/>
             </a:pPr>
             <a:r>
-              <a:rPr lang="en-US" sz="900" dirty="0">
+              <a:rPr lang="en-US" sz="1400" dirty="0">
                 <a:solidFill>
                   <a:srgbClr val="1C2A3A"/>
                 </a:solidFill>
@@ -12182,17 +12182,17 @@
               </a:rPr>
               <a:t>僕從與樂手服侍家族</a:t>
             </a:r>
-            <a:endParaRPr lang="en-US" sz="900" dirty="0"/>
+            <a:endParaRPr lang="en-US" sz="1400" dirty="0"/>
           </a:p>
           <a:p>
             <a:pPr indent="0" marL="0">
               <a:spcAft>
-                <a:spcPts val="200"/>
+                <a:spcPts val="100"/>
               </a:spcAft>
               <a:buNone/>
             </a:pPr>
             <a:r>
-              <a:rPr lang="en-US" sz="900" dirty="0">
+              <a:rPr lang="en-US" sz="1400" dirty="0">
                 <a:solidFill>
                   <a:srgbClr val="1C2A3A"/>
                 </a:solidFill>
@@ -12202,17 +12202,17 @@
               </a:rPr>
               <a:t>bas 軟聲樂器（琵琶、笛）</a:t>
             </a:r>
-            <a:endParaRPr lang="en-US" sz="900" dirty="0"/>
+            <a:endParaRPr lang="en-US" sz="1400" dirty="0"/>
           </a:p>
           <a:p>
             <a:pPr indent="0" marL="0">
               <a:spcAft>
-                <a:spcPts val="200"/>
+                <a:spcPts val="100"/>
               </a:spcAft>
               <a:buNone/>
             </a:pPr>
             <a:r>
-              <a:rPr lang="en-US" sz="900" dirty="0">
+              <a:rPr lang="en-US" sz="1400" dirty="0">
                 <a:solidFill>
                   <a:srgbClr val="1C2A3A"/>
                 </a:solidFill>
@@ -12222,7 +12222,7 @@
               </a:rPr>
               <a:t>展現文化修養</a:t>
             </a:r>
-            <a:endParaRPr lang="en-US" sz="900" dirty="0"/>
+            <a:endParaRPr lang="en-US" sz="1400" dirty="0"/>
           </a:p>
         </p:txBody>
       </p:sp>
@@ -12281,7 +12281,7 @@
                   <a:srgbClr val="000000"/>
                 </a:solidFill>
               </a:rPr>
-              <a:t>🎺</a:t>
+              <a:t>■</a:t>
             </a:r>
             <a:endParaRPr lang="en-US" sz="1800" dirty="0"/>
           </a:p>
@@ -12305,14 +12305,14 @@
           <a:ln/>
         </p:spPr>
         <p:txBody>
-          <a:bodyPr wrap="square" rtlCol="0" anchor="ctr"/>
-          <a:lstStyle/>
-          <a:p>
-            <a:pPr indent="0" marL="0">
-              <a:buNone/>
-            </a:pPr>
-            <a:r>
-              <a:rPr lang="en-US" sz="1200" b="1" dirty="0">
+          <a:bodyPr wrap="square" lIns="0" tIns="0" rIns="0" bIns="0" rtlCol="0" anchor="ctr"/>
+          <a:lstStyle/>
+          <a:p>
+            <a:pPr indent="0" marL="0">
+              <a:buNone/>
+            </a:pPr>
+            <a:r>
+              <a:rPr lang="en-US" sz="1400" b="1" dirty="0">
                 <a:solidFill>
                   <a:srgbClr val="2E5A5A"/>
                 </a:solidFill>
@@ -12322,7 +12322,7 @@
               </a:rPr>
               <a:t>Public Court 公務</a:t>
             </a:r>
-            <a:endParaRPr lang="en-US" sz="1200" dirty="0"/>
+            <a:endParaRPr lang="en-US" sz="1400" dirty="0"/>
           </a:p>
         </p:txBody>
       </p:sp>
@@ -12344,17 +12344,17 @@
           <a:ln/>
         </p:spPr>
         <p:txBody>
-          <a:bodyPr wrap="square" rtlCol="0" anchor="ctr"/>
+          <a:bodyPr wrap="square" rtlCol="0" anchor="t"/>
           <a:lstStyle/>
           <a:p>
             <a:pPr indent="0" marL="0">
               <a:spcAft>
-                <a:spcPts val="200"/>
+                <a:spcPts val="100"/>
               </a:spcAft>
               <a:buNone/>
             </a:pPr>
             <a:r>
-              <a:rPr lang="en-US" sz="900" dirty="0">
+              <a:rPr lang="en-US" sz="1400" dirty="0">
                 <a:solidFill>
                   <a:srgbClr val="1C2A3A"/>
                 </a:solidFill>
@@ -12364,17 +12364,17 @@
               </a:rPr>
               <a:t>公共儀式與節慶</a:t>
             </a:r>
-            <a:endParaRPr lang="en-US" sz="900" dirty="0"/>
+            <a:endParaRPr lang="en-US" sz="1400" dirty="0"/>
           </a:p>
           <a:p>
             <a:pPr indent="0" marL="0">
               <a:spcAft>
-                <a:spcPts val="200"/>
+                <a:spcPts val="100"/>
               </a:spcAft>
               <a:buNone/>
             </a:pPr>
             <a:r>
-              <a:rPr lang="en-US" sz="900" dirty="0">
+              <a:rPr lang="en-US" sz="1400" dirty="0">
                 <a:solidFill>
                   <a:srgbClr val="1C2A3A"/>
                 </a:solidFill>
@@ -12384,17 +12384,17 @@
               </a:rPr>
               <a:t>haut 硬聲樂器（小號、shawm）</a:t>
             </a:r>
-            <a:endParaRPr lang="en-US" sz="900" dirty="0"/>
+            <a:endParaRPr lang="en-US" sz="1400" dirty="0"/>
           </a:p>
           <a:p>
             <a:pPr indent="0" marL="0">
               <a:spcAft>
-                <a:spcPts val="200"/>
+                <a:spcPts val="100"/>
               </a:spcAft>
               <a:buNone/>
             </a:pPr>
             <a:r>
-              <a:rPr lang="en-US" sz="900" dirty="0">
+              <a:rPr lang="en-US" sz="1400" dirty="0">
                 <a:solidFill>
                   <a:srgbClr val="1C2A3A"/>
                 </a:solidFill>
@@ -12404,7 +12404,7 @@
               </a:rPr>
               <a:t>展現政治軍事權力</a:t>
             </a:r>
-            <a:endParaRPr lang="en-US" sz="900" dirty="0"/>
+            <a:endParaRPr lang="en-US" sz="1400" dirty="0"/>
           </a:p>
         </p:txBody>
       </p:sp>
@@ -12446,14 +12446,14 @@
           <a:ln/>
         </p:spPr>
         <p:txBody>
-          <a:bodyPr wrap="square" rtlCol="0" anchor="ctr"/>
-          <a:lstStyle/>
-          <a:p>
-            <a:pPr indent="0" marL="0">
-              <a:buNone/>
-            </a:pPr>
-            <a:r>
-              <a:rPr lang="en-US" sz="1300" b="1" dirty="0">
+          <a:bodyPr wrap="square" lIns="0" tIns="0" rIns="0" bIns="0" rtlCol="0" anchor="ctr"/>
+          <a:lstStyle/>
+          <a:p>
+            <a:pPr indent="0" marL="0">
+              <a:buNone/>
+            </a:pPr>
+            <a:r>
+              <a:rPr lang="en-US" sz="1400" b="1" dirty="0">
                 <a:solidFill>
                   <a:srgbClr val="2E5A5A"/>
                 </a:solidFill>
@@ -12461,9 +12461,9 @@
                 <a:ea typeface="Georgia" pitchFamily="34" charset="-122"/>
                 <a:cs typeface="Georgia" pitchFamily="34" charset="-120"/>
               </a:rPr>
-              <a:t>🎓 音樂家的養成 Training and Mobility</a:t>
-            </a:r>
-            <a:endParaRPr lang="en-US" sz="1300" dirty="0"/>
+              <a:t>■ 音樂家的養成 Training and Mobility</a:t>
+            </a:r>
+            <a:endParaRPr lang="en-US" sz="1400" dirty="0"/>
           </a:p>
         </p:txBody>
       </p:sp>
@@ -12485,17 +12485,17 @@
           <a:ln/>
         </p:spPr>
         <p:txBody>
-          <a:bodyPr wrap="square" rtlCol="0" anchor="ctr"/>
+          <a:bodyPr wrap="square" rtlCol="0" anchor="t"/>
           <a:lstStyle/>
           <a:p>
             <a:pPr indent="0" marL="0">
               <a:spcAft>
-                <a:spcPts val="300"/>
+                <a:spcPts val="100"/>
               </a:spcAft>
               <a:buNone/>
             </a:pPr>
             <a:r>
-              <a:rPr lang="en-US" sz="900" dirty="0">
+              <a:rPr lang="en-US" sz="1400" dirty="0">
                 <a:solidFill>
                   <a:srgbClr val="1C2A3A"/>
                 </a:solidFill>
@@ -12503,19 +12503,19 @@
                 <a:ea typeface="Calibri" pitchFamily="34" charset="-122"/>
                 <a:cs typeface="Calibri" pitchFamily="34" charset="-120"/>
               </a:rPr>
-              <a:t>• 歌手：主教座堂與教堂的唱詩學校——學唱歌、樂理、調式、對位、作曲、拉丁文、神學；Cambrai、Bruges、Antwerp、Paris 為 15 世紀北方音樂重鎮</a:t>
-            </a:r>
-            <a:endParaRPr lang="en-US" sz="900" dirty="0"/>
+              <a:t>• 歌手：唱詩學校訓練唱歌、樂理、對位、作曲；Cambrai、Bruges、Antwerp 為重鎮</a:t>
+            </a:r>
+            <a:endParaRPr lang="en-US" sz="1400" dirty="0"/>
           </a:p>
           <a:p>
             <a:pPr indent="0" marL="0">
               <a:spcAft>
-                <a:spcPts val="300"/>
+                <a:spcPts val="100"/>
               </a:spcAft>
               <a:buNone/>
             </a:pPr>
             <a:r>
-              <a:rPr lang="en-US" sz="900" dirty="0">
+              <a:rPr lang="en-US" sz="1400" dirty="0">
                 <a:solidFill>
                   <a:srgbClr val="1C2A3A"/>
                 </a:solidFill>
@@ -12523,19 +12523,19 @@
                 <a:ea typeface="Calibri" pitchFamily="34" charset="-122"/>
                 <a:cs typeface="Calibri" pitchFamily="34" charset="-120"/>
               </a:rPr>
-              <a:t>• 器樂手：音樂家族傳承、工會師徒制；多數不識譜——音樂口傳至 16 世紀印刷術興起</a:t>
-            </a:r>
-            <a:endParaRPr lang="en-US" sz="900" dirty="0"/>
+              <a:t>• 器樂手：家族傳承與工會師徒制；多數不識譜</a:t>
+            </a:r>
+            <a:endParaRPr lang="en-US" sz="1400" dirty="0"/>
           </a:p>
           <a:p>
             <a:pPr indent="0" marL="0">
               <a:spcAft>
-                <a:spcPts val="300"/>
+                <a:spcPts val="100"/>
               </a:spcAft>
               <a:buNone/>
             </a:pPr>
             <a:r>
-              <a:rPr lang="en-US" sz="900" dirty="0">
+              <a:rPr lang="en-US" sz="1400" dirty="0">
                 <a:solidFill>
                   <a:srgbClr val="1C2A3A"/>
                 </a:solidFill>
@@ -12543,19 +12543,19 @@
                 <a:ea typeface="Calibri" pitchFamily="34" charset="-122"/>
                 <a:cs typeface="Calibri" pitchFamily="34" charset="-120"/>
               </a:rPr>
-              <a:t>• Benefices（教會俸祿）：教宗授予神職人員的薪水制度——作曲家大多為神職；女性與已婚男性無法受惠</a:t>
-            </a:r>
-            <a:endParaRPr lang="en-US" sz="900" dirty="0"/>
+              <a:t>• Benefices（教會俸祿）：教宗授予神職人員——作曲家多為神職</a:t>
+            </a:r>
+            <a:endParaRPr lang="en-US" sz="1400" dirty="0"/>
           </a:p>
           <a:p>
             <a:pPr indent="0" marL="0">
               <a:spcAft>
-                <a:spcPts val="300"/>
+                <a:spcPts val="100"/>
               </a:spcAft>
               <a:buNone/>
             </a:pPr>
             <a:r>
-              <a:rPr lang="en-US" sz="900" dirty="0">
+              <a:rPr lang="en-US" sz="1400" dirty="0">
                 <a:solidFill>
                   <a:srgbClr val="1C2A3A"/>
                 </a:solidFill>
@@ -12563,19 +12563,19 @@
                 <a:ea typeface="Calibri" pitchFamily="34" charset="-122"/>
                 <a:cs typeface="Calibri" pitchFamily="34" charset="-120"/>
               </a:rPr>
-              <a:t>• 國際流動：Du Fay、Josquin、Ockeghem、Obrecht、Willaert 等法蘭德斯人遍布義大利；Medici、Este、Sforza、Gonzaga 家族競相延攬</a:t>
-            </a:r>
-            <a:endParaRPr lang="en-US" sz="900" dirty="0"/>
+              <a:t>• 國際流動：法蘭德斯人遍布義大利；Medici、Este、Sforza 競相延攬</a:t>
+            </a:r>
+            <a:endParaRPr lang="en-US" sz="1400" dirty="0"/>
           </a:p>
           <a:p>
             <a:pPr indent="0" marL="0">
               <a:spcAft>
-                <a:spcPts val="300"/>
+                <a:spcPts val="100"/>
               </a:spcAft>
               <a:buNone/>
             </a:pPr>
             <a:r>
-              <a:rPr lang="en-US" sz="900" dirty="0">
+              <a:rPr lang="en-US" sz="1400" dirty="0">
                 <a:solidFill>
                   <a:srgbClr val="1C2A3A"/>
                 </a:solidFill>
@@ -12583,9 +12583,9 @@
                 <a:ea typeface="Calibri" pitchFamily="34" charset="-122"/>
                 <a:cs typeface="Calibri" pitchFamily="34" charset="-120"/>
               </a:rPr>
-              <a:t>• Johannes Ciconia（ca. 1370–1412）最早赴義大利發展的北方作曲家之一</a:t>
-            </a:r>
-            <a:endParaRPr lang="en-US" sz="900" dirty="0"/>
+              <a:t>• Ciconia（ca. 1370–1412）最早赴義大利的北方作曲家</a:t>
+            </a:r>
+            <a:endParaRPr lang="en-US" sz="1400" dirty="0"/>
           </a:p>
         </p:txBody>
       </p:sp>
@@ -12725,7 +12725,7 @@
               <a:buNone/>
             </a:pPr>
             <a:r>
-              <a:rPr lang="en-US" sz="1300" dirty="0">
+              <a:rPr lang="en-US" sz="1400" dirty="0">
                 <a:solidFill>
                   <a:srgbClr val="E8D8A8"/>
                 </a:solidFill>
@@ -12735,7 +12735,7 @@
               </a:rPr>
               <a:t>The Core of the International Style · ca. 1420 onward</a:t>
             </a:r>
-            <a:endParaRPr lang="en-US" sz="1300" dirty="0"/>
+            <a:endParaRPr lang="en-US" sz="1400" dirty="0"/>
           </a:p>
         </p:txBody>
       </p:sp>
@@ -12832,7 +12832,7 @@
                 <a:ea typeface="Georgia" pitchFamily="34" charset="-122"/>
                 <a:cs typeface="Georgia" pitchFamily="34" charset="-120"/>
               </a:rPr>
-              <a:t>✓</a:t>
+              <a:t>■</a:t>
             </a:r>
             <a:endParaRPr lang="en-US" sz="2200" dirty="0"/>
           </a:p>
@@ -12856,14 +12856,14 @@
           <a:ln/>
         </p:spPr>
         <p:txBody>
-          <a:bodyPr wrap="square" rtlCol="0" anchor="ctr"/>
-          <a:lstStyle/>
-          <a:p>
-            <a:pPr indent="0" marL="0">
-              <a:buNone/>
-            </a:pPr>
-            <a:r>
-              <a:rPr lang="en-US" sz="1300" b="1" dirty="0">
+          <a:bodyPr wrap="square" lIns="0" tIns="0" rIns="0" bIns="0" rtlCol="0" anchor="ctr"/>
+          <a:lstStyle/>
+          <a:p>
+            <a:pPr indent="0" marL="0">
+              <a:buNone/>
+            </a:pPr>
+            <a:r>
+              <a:rPr lang="en-US" sz="1400" b="1" dirty="0">
                 <a:solidFill>
                   <a:srgbClr val="C8A020"/>
                 </a:solidFill>
@@ -12873,7 +12873,7 @@
               </a:rPr>
               <a:t>偏好協和音 Consonance Preferred</a:t>
             </a:r>
-            <a:endParaRPr lang="en-US" sz="1300" dirty="0"/>
+            <a:endParaRPr lang="en-US" sz="1400" dirty="0"/>
           </a:p>
         </p:txBody>
       </p:sp>
@@ -12895,14 +12895,14 @@
           <a:ln/>
         </p:spPr>
         <p:txBody>
-          <a:bodyPr wrap="square" rtlCol="0" anchor="ctr"/>
-          <a:lstStyle/>
-          <a:p>
-            <a:pPr indent="0" marL="0">
-              <a:buNone/>
-            </a:pPr>
-            <a:r>
-              <a:rPr lang="en-US" sz="1000" dirty="0">
+          <a:bodyPr wrap="square" rtlCol="0" anchor="t"/>
+          <a:lstStyle/>
+          <a:p>
+            <a:pPr indent="0" marL="0">
+              <a:buNone/>
+            </a:pPr>
+            <a:r>
+              <a:rPr lang="en-US" sz="1400" dirty="0">
                 <a:solidFill>
                   <a:srgbClr val="E8D8A8"/>
                 </a:solidFill>
@@ -12912,7 +12912,7 @@
               </a:rPr>
               <a:t>三度、六度與完全五度、八度皆為協和——三六度不再是不協和</a:t>
             </a:r>
-            <a:endParaRPr lang="en-US" sz="1000" dirty="0"/>
+            <a:endParaRPr lang="en-US" sz="1400" dirty="0"/>
           </a:p>
         </p:txBody>
       </p:sp>
@@ -12989,7 +12989,7 @@
                 <a:ea typeface="Georgia" pitchFamily="34" charset="-122"/>
                 <a:cs typeface="Georgia" pitchFamily="34" charset="-120"/>
               </a:rPr>
-              <a:t>✗</a:t>
+              <a:t>■</a:t>
             </a:r>
             <a:endParaRPr lang="en-US" sz="2200" dirty="0"/>
           </a:p>
@@ -13013,14 +13013,14 @@
           <a:ln/>
         </p:spPr>
         <p:txBody>
-          <a:bodyPr wrap="square" rtlCol="0" anchor="ctr"/>
-          <a:lstStyle/>
-          <a:p>
-            <a:pPr indent="0" marL="0">
-              <a:buNone/>
-            </a:pPr>
-            <a:r>
-              <a:rPr lang="en-US" sz="1300" b="1" dirty="0">
+          <a:bodyPr wrap="square" lIns="0" tIns="0" rIns="0" bIns="0" rtlCol="0" anchor="ctr"/>
+          <a:lstStyle/>
+          <a:p>
+            <a:pPr indent="0" marL="0">
+              <a:buNone/>
+            </a:pPr>
+            <a:r>
+              <a:rPr lang="en-US" sz="1400" b="1" dirty="0">
                 <a:solidFill>
                   <a:srgbClr val="C8A020"/>
                 </a:solidFill>
@@ -13030,7 +13030,7 @@
               </a:rPr>
               <a:t>嚴格處理不協和 Strict Dissonance Control</a:t>
             </a:r>
-            <a:endParaRPr lang="en-US" sz="1300" dirty="0"/>
+            <a:endParaRPr lang="en-US" sz="1400" dirty="0"/>
           </a:p>
         </p:txBody>
       </p:sp>
@@ -13052,14 +13052,14 @@
           <a:ln/>
         </p:spPr>
         <p:txBody>
-          <a:bodyPr wrap="square" rtlCol="0" anchor="ctr"/>
-          <a:lstStyle/>
-          <a:p>
-            <a:pPr indent="0" marL="0">
-              <a:buNone/>
-            </a:pPr>
-            <a:r>
-              <a:rPr lang="en-US" sz="1000" dirty="0">
+          <a:bodyPr wrap="square" rtlCol="0" anchor="t"/>
+          <a:lstStyle/>
+          <a:p>
+            <a:pPr indent="0" marL="0">
+              <a:buNone/>
+            </a:pPr>
+            <a:r>
+              <a:rPr lang="en-US" sz="1400" dirty="0">
                 <a:solidFill>
                   <a:srgbClr val="E8D8A8"/>
                 </a:solidFill>
@@ -13069,7 +13069,7 @@
               </a:rPr>
               <a:t>只允許經過音、鄰音（弱拍）與留音（終止式）——平行五度八度禁止</a:t>
             </a:r>
-            <a:endParaRPr lang="en-US" sz="1000" dirty="0"/>
+            <a:endParaRPr lang="en-US" sz="1400" dirty="0"/>
           </a:p>
         </p:txBody>
       </p:sp>
@@ -13146,7 +13146,7 @@
                 <a:ea typeface="Georgia" pitchFamily="34" charset="-122"/>
                 <a:cs typeface="Georgia" pitchFamily="34" charset="-120"/>
               </a:rPr>
-              <a:t>♪</a:t>
+              <a:t>■</a:t>
             </a:r>
             <a:endParaRPr lang="en-US" sz="2200" dirty="0"/>
           </a:p>
@@ -13170,14 +13170,14 @@
           <a:ln/>
         </p:spPr>
         <p:txBody>
-          <a:bodyPr wrap="square" rtlCol="0" anchor="ctr"/>
-          <a:lstStyle/>
-          <a:p>
-            <a:pPr indent="0" marL="0">
-              <a:buNone/>
-            </a:pPr>
-            <a:r>
-              <a:rPr lang="en-US" sz="1300" b="1" dirty="0">
+          <a:bodyPr wrap="square" lIns="0" tIns="0" rIns="0" bIns="0" rtlCol="0" anchor="ctr"/>
+          <a:lstStyle/>
+          <a:p>
+            <a:pPr indent="0" marL="0">
+              <a:buNone/>
+            </a:pPr>
+            <a:r>
+              <a:rPr lang="en-US" sz="1400" b="1" dirty="0">
                 <a:solidFill>
                   <a:srgbClr val="C8A020"/>
                 </a:solidFill>
@@ -13187,7 +13187,7 @@
               </a:rPr>
               <a:t>四聲部織度 Four-Voice Texture</a:t>
             </a:r>
-            <a:endParaRPr lang="en-US" sz="1300" dirty="0"/>
+            <a:endParaRPr lang="en-US" sz="1400" dirty="0"/>
           </a:p>
         </p:txBody>
       </p:sp>
@@ -13209,14 +13209,14 @@
           <a:ln/>
         </p:spPr>
         <p:txBody>
-          <a:bodyPr wrap="square" rtlCol="0" anchor="ctr"/>
-          <a:lstStyle/>
-          <a:p>
-            <a:pPr indent="0" marL="0">
-              <a:buNone/>
-            </a:pPr>
-            <a:r>
-              <a:rPr lang="en-US" sz="1000" dirty="0">
+          <a:bodyPr wrap="square" rtlCol="0" anchor="t"/>
+          <a:lstStyle/>
+          <a:p>
+            <a:pPr indent="0" marL="0">
+              <a:buNone/>
+            </a:pPr>
+            <a:r>
+              <a:rPr lang="en-US" sz="1400" dirty="0">
                 <a:solidFill>
                   <a:srgbClr val="E8D8A8"/>
                 </a:solidFill>
@@ -13226,7 +13226,7 @@
               </a:rPr>
               <a:t>15 世紀下半取代三聲部——低音線加入 tenor 之下成為現代織度基礎</a:t>
             </a:r>
-            <a:endParaRPr lang="en-US" sz="1000" dirty="0"/>
+            <a:endParaRPr lang="en-US" sz="1400" dirty="0"/>
           </a:p>
         </p:txBody>
       </p:sp>
@@ -13327,14 +13327,14 @@
           <a:ln/>
         </p:spPr>
         <p:txBody>
-          <a:bodyPr wrap="square" rtlCol="0" anchor="ctr"/>
-          <a:lstStyle/>
-          <a:p>
-            <a:pPr indent="0" marL="0">
-              <a:buNone/>
-            </a:pPr>
-            <a:r>
-              <a:rPr lang="en-US" sz="1300" b="1" dirty="0">
+          <a:bodyPr wrap="square" lIns="0" tIns="0" rIns="0" bIns="0" rtlCol="0" anchor="ctr"/>
+          <a:lstStyle/>
+          <a:p>
+            <a:pPr indent="0" marL="0">
+              <a:buNone/>
+            </a:pPr>
+            <a:r>
+              <a:rPr lang="en-US" sz="1400" b="1" dirty="0">
                 <a:solidFill>
                   <a:srgbClr val="C8A020"/>
                 </a:solidFill>
@@ -13344,7 +13344,7 @@
               </a:rPr>
               <a:t>聲部平等 Equality of Voices</a:t>
             </a:r>
-            <a:endParaRPr lang="en-US" sz="1300" dirty="0"/>
+            <a:endParaRPr lang="en-US" sz="1400" dirty="0"/>
           </a:p>
         </p:txBody>
       </p:sp>
@@ -13366,14 +13366,14 @@
           <a:ln/>
         </p:spPr>
         <p:txBody>
-          <a:bodyPr wrap="square" rtlCol="0" anchor="ctr"/>
-          <a:lstStyle/>
-          <a:p>
-            <a:pPr indent="0" marL="0">
-              <a:buNone/>
-            </a:pPr>
-            <a:r>
-              <a:rPr lang="en-US" sz="1000" dirty="0">
+          <a:bodyPr wrap="square" rtlCol="0" anchor="t"/>
+          <a:lstStyle/>
+          <a:p>
+            <a:pPr indent="0" marL="0">
+              <a:buNone/>
+            </a:pPr>
+            <a:r>
+              <a:rPr lang="en-US" sz="1400" dirty="0">
                 <a:solidFill>
                   <a:srgbClr val="E8D8A8"/>
                 </a:solidFill>
@@ -13383,7 +13383,7 @@
               </a:rPr>
               <a:t>所有聲部同時構思（和聲思維）——不再是層層疊加 cantus/tenor 框架</a:t>
             </a:r>
-            <a:endParaRPr lang="en-US" sz="1000" dirty="0"/>
+            <a:endParaRPr lang="en-US" sz="1400" dirty="0"/>
           </a:p>
         </p:txBody>
       </p:sp>
@@ -13425,14 +13425,14 @@
           <a:ln/>
         </p:spPr>
         <p:txBody>
-          <a:bodyPr wrap="square" rtlCol="0" anchor="ctr"/>
-          <a:lstStyle/>
-          <a:p>
-            <a:pPr indent="0" marL="0">
-              <a:buNone/>
-            </a:pPr>
-            <a:r>
-              <a:rPr lang="en-US" sz="1000" b="1" dirty="0">
+          <a:bodyPr wrap="square" lIns="0" tIns="0" rIns="0" bIns="0" rtlCol="0" anchor="ctr"/>
+          <a:lstStyle/>
+          <a:p>
+            <a:pPr indent="0" marL="0">
+              <a:buNone/>
+            </a:pPr>
+            <a:r>
+              <a:rPr lang="en-US" sz="1400" b="1" dirty="0">
                 <a:solidFill>
                   <a:srgbClr val="C8A020"/>
                 </a:solidFill>
@@ -13442,7 +13442,7 @@
               </a:rPr>
               <a:t>Johannes Tinctoris (ca. 1435–1511) · Liber de arte contrapuncti (1477)</a:t>
             </a:r>
-            <a:endParaRPr lang="en-US" sz="1000" dirty="0"/>
+            <a:endParaRPr lang="en-US" sz="1400" dirty="0"/>
           </a:p>
         </p:txBody>
       </p:sp>
@@ -13464,14 +13464,14 @@
           <a:ln/>
         </p:spPr>
         <p:txBody>
-          <a:bodyPr wrap="square" rtlCol="0" anchor="ctr"/>
-          <a:lstStyle/>
-          <a:p>
-            <a:pPr indent="0" marL="0">
-              <a:buNone/>
-            </a:pPr>
-            <a:r>
-              <a:rPr lang="en-US" sz="1000" dirty="0">
+          <a:bodyPr wrap="square" rtlCol="0" anchor="t"/>
+          <a:lstStyle/>
+          <a:p>
+            <a:pPr indent="0" marL="0">
+              <a:buNone/>
+            </a:pPr>
+            <a:r>
+              <a:rPr lang="en-US" sz="1400" dirty="0">
                 <a:solidFill>
                   <a:srgbClr val="E8D8A8"/>
                 </a:solidFill>
@@ -13481,7 +13481,7 @@
               </a:rPr>
               <a:t>「40 年前的作品沒有一首值得演奏……只有 Dunstable、Binchois、Du Fay 與 Ockeghem 這一輩的音樂才值得模仿。」</a:t>
             </a:r>
-            <a:endParaRPr lang="en-US" sz="1000" dirty="0"/>
+            <a:endParaRPr lang="en-US" sz="1400" dirty="0"/>
           </a:p>
         </p:txBody>
       </p:sp>
@@ -13621,7 +13621,7 @@
               <a:buNone/>
             </a:pPr>
             <a:r>
-              <a:rPr lang="en-US" sz="1300" dirty="0">
+              <a:rPr lang="en-US" sz="1400" dirty="0">
                 <a:solidFill>
                   <a:srgbClr val="38495C"/>
                 </a:solidFill>
@@ -13631,7 +13631,7 @@
               </a:rPr>
               <a:t>Imitative Counterpoint &amp; Homophony · Dominant in the 16th Century</a:t>
             </a:r>
-            <a:endParaRPr lang="en-US" sz="1300" dirty="0"/>
+            <a:endParaRPr lang="en-US" sz="1400" dirty="0"/>
           </a:p>
         </p:txBody>
       </p:sp>
@@ -13664,7 +13664,7 @@
         <p:spPr>
           <a:xfrm>
             <a:off x="274320" y="1188720"/>
-            <a:ext cx="4206240" cy="3611880"/>
+            <a:ext cx="4206240" cy="3749040"/>
           </a:xfrm>
           <a:prstGeom prst="rect">
             <a:avLst/>
@@ -13684,23 +13684,23 @@
         <p:spPr>
           <a:xfrm>
             <a:off x="411480" y="1261872"/>
-            <a:ext cx="3931920" cy="292608"/>
-          </a:xfrm>
-          <a:prstGeom prst="rect">
-            <a:avLst/>
-          </a:prstGeom>
-          <a:noFill/>
-          <a:ln/>
-        </p:spPr>
-        <p:txBody>
-          <a:bodyPr wrap="square" rtlCol="0" anchor="ctr"/>
-          <a:lstStyle/>
-          <a:p>
-            <a:pPr indent="0" marL="0">
-              <a:buNone/>
-            </a:pPr>
-            <a:r>
-              <a:rPr lang="en-US" sz="1200" b="1" dirty="0">
+            <a:ext cx="3931920" cy="365760"/>
+          </a:xfrm>
+          <a:prstGeom prst="rect">
+            <a:avLst/>
+          </a:prstGeom>
+          <a:noFill/>
+          <a:ln/>
+        </p:spPr>
+        <p:txBody>
+          <a:bodyPr wrap="square" lIns="0" tIns="0" rIns="0" bIns="0" rtlCol="0" anchor="ctr"/>
+          <a:lstStyle/>
+          <a:p>
+            <a:pPr indent="0" marL="0">
+              <a:buNone/>
+            </a:pPr>
+            <a:r>
+              <a:rPr lang="en-US" sz="1400" b="1" dirty="0">
                 <a:solidFill>
                   <a:srgbClr val="7A2830"/>
                 </a:solidFill>
@@ -13708,9 +13708,9 @@
                 <a:ea typeface="Georgia" pitchFamily="34" charset="-122"/>
                 <a:cs typeface="Georgia" pitchFamily="34" charset="-120"/>
               </a:rPr>
-              <a:t>🔁 Imitative Counterpoint 模仿對位</a:t>
-            </a:r>
-            <a:endParaRPr lang="en-US" sz="1200" dirty="0"/>
+              <a:t>■ Imitative Counterpoint 模仿對位</a:t>
+            </a:r>
+            <a:endParaRPr lang="en-US" sz="1400" dirty="0"/>
           </a:p>
         </p:txBody>
       </p:sp>
@@ -13722,24 +13722,24 @@
         </p:nvSpPr>
         <p:spPr>
           <a:xfrm>
-            <a:off x="457200" y="1572768"/>
-            <a:ext cx="3977640" cy="640080"/>
-          </a:xfrm>
-          <a:prstGeom prst="rect">
-            <a:avLst/>
-          </a:prstGeom>
-          <a:noFill/>
-          <a:ln/>
-        </p:spPr>
-        <p:txBody>
-          <a:bodyPr wrap="square" rtlCol="0" anchor="ctr"/>
-          <a:lstStyle/>
-          <a:p>
-            <a:pPr indent="0" marL="0">
-              <a:buNone/>
-            </a:pPr>
-            <a:r>
-              <a:rPr lang="en-US" sz="950" dirty="0">
+            <a:off x="457200" y="1719072"/>
+            <a:ext cx="3977640" cy="493776"/>
+          </a:xfrm>
+          <a:prstGeom prst="rect">
+            <a:avLst/>
+          </a:prstGeom>
+          <a:noFill/>
+          <a:ln/>
+        </p:spPr>
+        <p:txBody>
+          <a:bodyPr wrap="square" rtlCol="0" anchor="t"/>
+          <a:lstStyle/>
+          <a:p>
+            <a:pPr indent="0" marL="0">
+              <a:buNone/>
+            </a:pPr>
+            <a:r>
+              <a:rPr lang="en-US" sz="1400" dirty="0">
                 <a:solidFill>
                   <a:srgbClr val="1C2A3A"/>
                 </a:solidFill>
@@ -13749,7 +13749,7 @@
               </a:rPr>
               <a:t>定義：一聲部提出動機或樂句，其他聲部在不同音高（通常五度、四度或八度）回應模仿</a:t>
             </a:r>
-            <a:endParaRPr lang="en-US" sz="950" dirty="0"/>
+            <a:endParaRPr lang="en-US" sz="1400" dirty="0"/>
           </a:p>
         </p:txBody>
       </p:sp>
@@ -13771,17 +13771,17 @@
           <a:ln/>
         </p:spPr>
         <p:txBody>
-          <a:bodyPr wrap="square" rtlCol="0" anchor="ctr"/>
+          <a:bodyPr wrap="square" rtlCol="0" anchor="t"/>
           <a:lstStyle/>
           <a:p>
             <a:pPr indent="0" marL="0">
               <a:spcAft>
-                <a:spcPts val="300"/>
+                <a:spcPts val="100"/>
               </a:spcAft>
               <a:buNone/>
             </a:pPr>
             <a:r>
-              <a:rPr lang="en-US" sz="900" dirty="0">
+              <a:rPr lang="en-US" sz="1400" dirty="0">
                 <a:solidFill>
                   <a:srgbClr val="1C2A3A"/>
                 </a:solidFill>
@@ -13791,17 +13791,17 @@
               </a:rPr>
               <a:t>• 所有聲部平等參與——無 cantus/tenor 主從之分</a:t>
             </a:r>
-            <a:endParaRPr lang="en-US" sz="900" dirty="0"/>
+            <a:endParaRPr lang="en-US" sz="1400" dirty="0"/>
           </a:p>
           <a:p>
             <a:pPr indent="0" marL="0">
               <a:spcAft>
-                <a:spcPts val="300"/>
+                <a:spcPts val="100"/>
               </a:spcAft>
               <a:buNone/>
             </a:pPr>
             <a:r>
-              <a:rPr lang="en-US" sz="900" dirty="0">
+              <a:rPr lang="en-US" sz="1400" dirty="0">
                 <a:solidFill>
                   <a:srgbClr val="1C2A3A"/>
                 </a:solidFill>
@@ -13811,17 +13811,17 @@
               </a:rPr>
               <a:t>• 每個樂段通常有一個音樂動機（motto）</a:t>
             </a:r>
-            <a:endParaRPr lang="en-US" sz="900" dirty="0"/>
+            <a:endParaRPr lang="en-US" sz="1400" dirty="0"/>
           </a:p>
           <a:p>
             <a:pPr indent="0" marL="0">
               <a:spcAft>
-                <a:spcPts val="300"/>
+                <a:spcPts val="100"/>
               </a:spcAft>
               <a:buNone/>
             </a:pPr>
             <a:r>
-              <a:rPr lang="en-US" sz="900" dirty="0">
+              <a:rPr lang="en-US" sz="1400" dirty="0">
                 <a:solidFill>
                   <a:srgbClr val="1C2A3A"/>
                 </a:solidFill>
@@ -13831,17 +13831,17 @@
               </a:rPr>
               <a:t>• 文字宣告清晰——所有聲部同節奏唱出相同字句</a:t>
             </a:r>
-            <a:endParaRPr lang="en-US" sz="900" dirty="0"/>
+            <a:endParaRPr lang="en-US" sz="1400" dirty="0"/>
           </a:p>
           <a:p>
             <a:pPr indent="0" marL="0">
               <a:spcAft>
-                <a:spcPts val="300"/>
+                <a:spcPts val="100"/>
               </a:spcAft>
               <a:buNone/>
             </a:pPr>
             <a:r>
-              <a:rPr lang="en-US" sz="900" dirty="0">
+              <a:rPr lang="en-US" sz="1400" dirty="0">
                 <a:solidFill>
                   <a:srgbClr val="1C2A3A"/>
                 </a:solidFill>
@@ -13851,17 +13851,17 @@
               </a:rPr>
               <a:t>• 容許結構複雜而仍然清楚</a:t>
             </a:r>
-            <a:endParaRPr lang="en-US" sz="900" dirty="0"/>
+            <a:endParaRPr lang="en-US" sz="1400" dirty="0"/>
           </a:p>
           <a:p>
             <a:pPr indent="0" marL="0">
               <a:spcAft>
-                <a:spcPts val="300"/>
+                <a:spcPts val="100"/>
               </a:spcAft>
               <a:buNone/>
             </a:pPr>
             <a:r>
-              <a:rPr lang="en-US" sz="900" dirty="0">
+              <a:rPr lang="en-US" sz="1400" dirty="0">
                 <a:solidFill>
                   <a:srgbClr val="1C2A3A"/>
                 </a:solidFill>
@@ -13871,17 +13871,17 @@
               </a:rPr>
               <a:t>• 成為 16 世紀經文歌、彌撒、器樂作品的核心技法</a:t>
             </a:r>
-            <a:endParaRPr lang="en-US" sz="900" dirty="0"/>
+            <a:endParaRPr lang="en-US" sz="1400" dirty="0"/>
           </a:p>
           <a:p>
             <a:pPr indent="0" marL="0">
               <a:spcAft>
-                <a:spcPts val="300"/>
+                <a:spcPts val="100"/>
               </a:spcAft>
               <a:buNone/>
             </a:pPr>
             <a:r>
-              <a:rPr lang="en-US" sz="900" dirty="0">
+              <a:rPr lang="en-US" sz="1400" dirty="0">
                 <a:solidFill>
                   <a:srgbClr val="1C2A3A"/>
                 </a:solidFill>
@@ -13891,7 +13891,7 @@
               </a:rPr>
               <a:t>• 集大成者：Josquin、Lassus、Palestrina</a:t>
             </a:r>
-            <a:endParaRPr lang="en-US" sz="900" dirty="0"/>
+            <a:endParaRPr lang="en-US" sz="1400" dirty="0"/>
           </a:p>
         </p:txBody>
       </p:sp>
@@ -13904,7 +13904,7 @@
         <p:spPr>
           <a:xfrm>
             <a:off x="4663440" y="1188720"/>
-            <a:ext cx="4206240" cy="3611880"/>
+            <a:ext cx="4206240" cy="3749040"/>
           </a:xfrm>
           <a:prstGeom prst="rect">
             <a:avLst/>
@@ -13924,23 +13924,23 @@
         <p:spPr>
           <a:xfrm>
             <a:off x="4800600" y="1261872"/>
-            <a:ext cx="3931920" cy="292608"/>
-          </a:xfrm>
-          <a:prstGeom prst="rect">
-            <a:avLst/>
-          </a:prstGeom>
-          <a:noFill/>
-          <a:ln/>
-        </p:spPr>
-        <p:txBody>
-          <a:bodyPr wrap="square" rtlCol="0" anchor="ctr"/>
-          <a:lstStyle/>
-          <a:p>
-            <a:pPr indent="0" marL="0">
-              <a:buNone/>
-            </a:pPr>
-            <a:r>
-              <a:rPr lang="en-US" sz="1200" b="1" dirty="0">
+            <a:ext cx="3931920" cy="365760"/>
+          </a:xfrm>
+          <a:prstGeom prst="rect">
+            <a:avLst/>
+          </a:prstGeom>
+          <a:noFill/>
+          <a:ln/>
+        </p:spPr>
+        <p:txBody>
+          <a:bodyPr wrap="square" lIns="0" tIns="0" rIns="0" bIns="0" rtlCol="0" anchor="ctr"/>
+          <a:lstStyle/>
+          <a:p>
+            <a:pPr indent="0" marL="0">
+              <a:buNone/>
+            </a:pPr>
+            <a:r>
+              <a:rPr lang="en-US" sz="1400" b="1" dirty="0">
                 <a:solidFill>
                   <a:srgbClr val="7A2830"/>
                 </a:solidFill>
@@ -13948,9 +13948,9 @@
                 <a:ea typeface="Georgia" pitchFamily="34" charset="-122"/>
                 <a:cs typeface="Georgia" pitchFamily="34" charset="-120"/>
               </a:rPr>
-              <a:t>♫ Homophony 主調織度</a:t>
-            </a:r>
-            <a:endParaRPr lang="en-US" sz="1200" dirty="0"/>
+              <a:t>■ Homophony 主調織度</a:t>
+            </a:r>
+            <a:endParaRPr lang="en-US" sz="1400" dirty="0"/>
           </a:p>
         </p:txBody>
       </p:sp>
@@ -13962,24 +13962,24 @@
         </p:nvSpPr>
         <p:spPr>
           <a:xfrm>
-            <a:off x="4846320" y="1572768"/>
-            <a:ext cx="3977640" cy="640080"/>
-          </a:xfrm>
-          <a:prstGeom prst="rect">
-            <a:avLst/>
-          </a:prstGeom>
-          <a:noFill/>
-          <a:ln/>
-        </p:spPr>
-        <p:txBody>
-          <a:bodyPr wrap="square" rtlCol="0" anchor="ctr"/>
-          <a:lstStyle/>
-          <a:p>
-            <a:pPr indent="0" marL="0">
-              <a:buNone/>
-            </a:pPr>
-            <a:r>
-              <a:rPr lang="en-US" sz="950" dirty="0">
+            <a:off x="4846320" y="1719072"/>
+            <a:ext cx="3977640" cy="493776"/>
+          </a:xfrm>
+          <a:prstGeom prst="rect">
+            <a:avLst/>
+          </a:prstGeom>
+          <a:noFill/>
+          <a:ln/>
+        </p:spPr>
+        <p:txBody>
+          <a:bodyPr wrap="square" rtlCol="0" anchor="t"/>
+          <a:lstStyle/>
+          <a:p>
+            <a:pPr indent="0" marL="0">
+              <a:buNone/>
+            </a:pPr>
+            <a:r>
+              <a:rPr lang="en-US" sz="1400" dirty="0">
                 <a:solidFill>
                   <a:srgbClr val="1C2A3A"/>
                 </a:solidFill>
@@ -13989,7 +13989,7 @@
               </a:rPr>
               <a:t>定義：所有聲部以相同（或近乎相同）節奏進行——低聲部以協和音伴奏 cantus</a:t>
             </a:r>
-            <a:endParaRPr lang="en-US" sz="950" dirty="0"/>
+            <a:endParaRPr lang="en-US" sz="1400" dirty="0"/>
           </a:p>
         </p:txBody>
       </p:sp>
@@ -14011,17 +14011,17 @@
           <a:ln/>
         </p:spPr>
         <p:txBody>
-          <a:bodyPr wrap="square" rtlCol="0" anchor="ctr"/>
+          <a:bodyPr wrap="square" rtlCol="0" anchor="t"/>
           <a:lstStyle/>
           <a:p>
             <a:pPr indent="0" marL="0">
               <a:spcAft>
-                <a:spcPts val="300"/>
+                <a:spcPts val="100"/>
               </a:spcAft>
               <a:buNone/>
             </a:pPr>
             <a:r>
-              <a:rPr lang="en-US" sz="900" dirty="0">
+              <a:rPr lang="en-US" sz="1400" dirty="0">
                 <a:solidFill>
                   <a:srgbClr val="1C2A3A"/>
                 </a:solidFill>
@@ -14031,17 +14031,17 @@
               </a:rPr>
               <a:t>• 結構簡單直接——容易演唱、聆聽</a:t>
             </a:r>
-            <a:endParaRPr lang="en-US" sz="900" dirty="0"/>
+            <a:endParaRPr lang="en-US" sz="1400" dirty="0"/>
           </a:p>
           <a:p>
             <a:pPr indent="0" marL="0">
               <a:spcAft>
-                <a:spcPts val="300"/>
+                <a:spcPts val="100"/>
               </a:spcAft>
               <a:buNone/>
             </a:pPr>
             <a:r>
-              <a:rPr lang="en-US" sz="900" dirty="0">
+              <a:rPr lang="en-US" sz="1400" dirty="0">
                 <a:solidFill>
                   <a:srgbClr val="1C2A3A"/>
                 </a:solidFill>
@@ -14051,17 +14051,17 @@
               </a:rPr>
               <a:t>• 文字宣告極為清晰——每字每音一目瞭然</a:t>
             </a:r>
-            <a:endParaRPr lang="en-US" sz="900" dirty="0"/>
+            <a:endParaRPr lang="en-US" sz="1400" dirty="0"/>
           </a:p>
           <a:p>
             <a:pPr indent="0" marL="0">
               <a:spcAft>
-                <a:spcPts val="300"/>
+                <a:spcPts val="100"/>
               </a:spcAft>
               <a:buNone/>
             </a:pPr>
             <a:r>
-              <a:rPr lang="en-US" sz="900" dirty="0">
+              <a:rPr lang="en-US" sz="1400" dirty="0">
                 <a:solidFill>
                   <a:srgbClr val="1C2A3A"/>
                 </a:solidFill>
@@ -14071,17 +14071,17 @@
               </a:rPr>
               <a:t>• 16 世紀通俗歌曲（frottola、villancico、chanson）的主要風格</a:t>
             </a:r>
-            <a:endParaRPr lang="en-US" sz="900" dirty="0"/>
+            <a:endParaRPr lang="en-US" sz="1400" dirty="0"/>
           </a:p>
           <a:p>
             <a:pPr indent="0" marL="0">
               <a:spcAft>
-                <a:spcPts val="300"/>
+                <a:spcPts val="100"/>
               </a:spcAft>
               <a:buNone/>
             </a:pPr>
             <a:r>
-              <a:rPr lang="en-US" sz="900" dirty="0">
+              <a:rPr lang="en-US" sz="1400" dirty="0">
                 <a:solidFill>
                   <a:srgbClr val="1C2A3A"/>
                 </a:solidFill>
@@ -14091,17 +14091,17 @@
               </a:rPr>
               <a:t>• 與模仿對位常交替使用於同一作品中——創造對比</a:t>
             </a:r>
-            <a:endParaRPr lang="en-US" sz="900" dirty="0"/>
+            <a:endParaRPr lang="en-US" sz="1400" dirty="0"/>
           </a:p>
           <a:p>
             <a:pPr indent="0" marL="0">
               <a:spcAft>
-                <a:spcPts val="300"/>
+                <a:spcPts val="100"/>
               </a:spcAft>
               <a:buNone/>
             </a:pPr>
             <a:r>
-              <a:rPr lang="en-US" sz="900" dirty="0">
+              <a:rPr lang="en-US" sz="1400" dirty="0">
                 <a:solidFill>
                   <a:srgbClr val="1C2A3A"/>
                 </a:solidFill>
@@ -14111,17 +14111,17 @@
               </a:rPr>
               <a:t>• 展現 Renaissance 對詞曲關係的新重視</a:t>
             </a:r>
-            <a:endParaRPr lang="en-US" sz="900" dirty="0"/>
+            <a:endParaRPr lang="en-US" sz="1400" dirty="0"/>
           </a:p>
           <a:p>
             <a:pPr indent="0" marL="0">
               <a:spcAft>
-                <a:spcPts val="300"/>
+                <a:spcPts val="100"/>
               </a:spcAft>
               <a:buNone/>
             </a:pPr>
             <a:r>
-              <a:rPr lang="en-US" sz="900" dirty="0">
+              <a:rPr lang="en-US" sz="1400" dirty="0">
                 <a:solidFill>
                   <a:srgbClr val="1C2A3A"/>
                 </a:solidFill>
@@ -14131,7 +14131,7 @@
               </a:rPr>
               <a:t>• 後來發展為主旋律伴奏（monody）——通往 Baroque</a:t>
             </a:r>
-            <a:endParaRPr lang="en-US" sz="900" dirty="0"/>
+            <a:endParaRPr lang="en-US" sz="1400" dirty="0"/>
           </a:p>
         </p:txBody>
       </p:sp>
@@ -14271,7 +14271,7 @@
               <a:buNone/>
             </a:pPr>
             <a:r>
-              <a:rPr lang="en-US" sz="1300" dirty="0">
+              <a:rPr lang="en-US" sz="1400" dirty="0">
                 <a:solidFill>
                   <a:srgbClr val="E8D8A8"/>
                 </a:solidFill>
@@ -14281,7 +14281,7 @@
               </a:rPr>
               <a:t>The Challenge of Thirds and Sixths</a:t>
             </a:r>
-            <a:endParaRPr lang="en-US" sz="1300" dirty="0"/>
+            <a:endParaRPr lang="en-US" sz="1400" dirty="0"/>
           </a:p>
         </p:txBody>
       </p:sp>
@@ -14343,14 +14343,14 @@
           <a:ln/>
         </p:spPr>
         <p:txBody>
-          <a:bodyPr wrap="square" rtlCol="0" anchor="ctr"/>
-          <a:lstStyle/>
-          <a:p>
-            <a:pPr indent="0" marL="0">
-              <a:buNone/>
-            </a:pPr>
-            <a:r>
-              <a:rPr lang="en-US" sz="1300" b="1" dirty="0">
+          <a:bodyPr wrap="square" lIns="0" tIns="0" rIns="0" bIns="0" rtlCol="0" anchor="ctr"/>
+          <a:lstStyle/>
+          <a:p>
+            <a:pPr indent="0" marL="0">
+              <a:buNone/>
+            </a:pPr>
+            <a:r>
+              <a:rPr lang="en-US" sz="1400" b="1" dirty="0">
                 <a:solidFill>
                   <a:srgbClr val="C8A020"/>
                 </a:solidFill>
@@ -14360,7 +14360,7 @@
               </a:rPr>
               <a:t>Pythagorean Intonation</a:t>
             </a:r>
-            <a:endParaRPr lang="en-US" sz="1300" dirty="0"/>
+            <a:endParaRPr lang="en-US" sz="1400" dirty="0"/>
           </a:p>
         </p:txBody>
       </p:sp>
@@ -14389,7 +14389,7 @@
               <a:buNone/>
             </a:pPr>
             <a:r>
-              <a:rPr lang="en-US" sz="1000" i="1" dirty="0">
+              <a:rPr lang="en-US" sz="1400" i="1" dirty="0">
                 <a:solidFill>
                   <a:srgbClr val="E8D8A8"/>
                 </a:solidFill>
@@ -14399,7 +14399,7 @@
               </a:rPr>
               <a:t>中世紀傳統</a:t>
             </a:r>
-            <a:endParaRPr lang="en-US" sz="1000" dirty="0"/>
+            <a:endParaRPr lang="en-US" sz="1400" dirty="0"/>
           </a:p>
         </p:txBody>
       </p:sp>
@@ -14421,14 +14421,14 @@
           <a:ln/>
         </p:spPr>
         <p:txBody>
-          <a:bodyPr wrap="square" rtlCol="0" anchor="ctr"/>
-          <a:lstStyle/>
-          <a:p>
-            <a:pPr indent="0" marL="0">
-              <a:buNone/>
-            </a:pPr>
-            <a:r>
-              <a:rPr lang="en-US" sz="900" dirty="0">
+          <a:bodyPr wrap="square" rtlCol="0" anchor="t"/>
+          <a:lstStyle/>
+          <a:p>
+            <a:pPr indent="0" marL="0">
+              <a:buNone/>
+            </a:pPr>
+            <a:r>
+              <a:rPr lang="en-US" sz="1400" dirty="0">
                 <a:solidFill>
                   <a:srgbClr val="E8D8A8"/>
                 </a:solidFill>
@@ -14438,7 +14438,7 @@
               </a:rPr>
               <a:t>ratios 2:1, 3:2, 4:3 · 純四五八度 · 三度（81:64）粗糙不協和 · 適用於僅需完全音程的中世紀音樂</a:t>
             </a:r>
-            <a:endParaRPr lang="en-US" sz="900" dirty="0"/>
+            <a:endParaRPr lang="en-US" sz="1400" dirty="0"/>
           </a:p>
         </p:txBody>
       </p:sp>
@@ -14480,14 +14480,14 @@
           <a:ln/>
         </p:spPr>
         <p:txBody>
-          <a:bodyPr wrap="square" rtlCol="0" anchor="ctr"/>
-          <a:lstStyle/>
-          <a:p>
-            <a:pPr indent="0" marL="0">
-              <a:buNone/>
-            </a:pPr>
-            <a:r>
-              <a:rPr lang="en-US" sz="1300" b="1" dirty="0">
+          <a:bodyPr wrap="square" lIns="0" tIns="0" rIns="0" bIns="0" rtlCol="0" anchor="ctr"/>
+          <a:lstStyle/>
+          <a:p>
+            <a:pPr indent="0" marL="0">
+              <a:buNone/>
+            </a:pPr>
+            <a:r>
+              <a:rPr lang="en-US" sz="1400" b="1" dirty="0">
                 <a:solidFill>
                   <a:srgbClr val="C8A020"/>
                 </a:solidFill>
@@ -14497,7 +14497,7 @@
               </a:rPr>
               <a:t>Just Intonation 純律</a:t>
             </a:r>
-            <a:endParaRPr lang="en-US" sz="1300" dirty="0"/>
+            <a:endParaRPr lang="en-US" sz="1400" dirty="0"/>
           </a:p>
         </p:txBody>
       </p:sp>
@@ -14526,7 +14526,7 @@
               <a:buNone/>
             </a:pPr>
             <a:r>
-              <a:rPr lang="en-US" sz="1000" i="1" dirty="0">
+              <a:rPr lang="en-US" sz="1400" i="1" dirty="0">
                 <a:solidFill>
                   <a:srgbClr val="E8D8A8"/>
                 </a:solidFill>
@@ -14536,7 +14536,7 @@
               </a:rPr>
               <a:t>1482 Ramis de Pareia</a:t>
             </a:r>
-            <a:endParaRPr lang="en-US" sz="1000" dirty="0"/>
+            <a:endParaRPr lang="en-US" sz="1400" dirty="0"/>
           </a:p>
         </p:txBody>
       </p:sp>
@@ -14558,14 +14558,14 @@
           <a:ln/>
         </p:spPr>
         <p:txBody>
-          <a:bodyPr wrap="square" rtlCol="0" anchor="ctr"/>
-          <a:lstStyle/>
-          <a:p>
-            <a:pPr indent="0" marL="0">
-              <a:buNone/>
-            </a:pPr>
-            <a:r>
-              <a:rPr lang="en-US" sz="900" dirty="0">
+          <a:bodyPr wrap="square" rtlCol="0" anchor="t"/>
+          <a:lstStyle/>
+          <a:p>
+            <a:pPr indent="0" marL="0">
+              <a:buNone/>
+            </a:pPr>
+            <a:r>
+              <a:rPr lang="en-US" sz="1400" dirty="0">
                 <a:solidFill>
                   <a:srgbClr val="E8D8A8"/>
                 </a:solidFill>
@@ -14573,9 +14573,9 @@
                 <a:ea typeface="Calibri" pitchFamily="34" charset="-122"/>
                 <a:cs typeface="Calibri" pitchFamily="34" charset="-120"/>
               </a:rPr>
-              <a:t>Walter Odington 早在 1300 即觀察 5:4、6:5 為協和三度 · 純三六度 · 缺點：部分三五度走音，G♯ 與 A♭ 不同音</a:t>
-            </a:r>
-            <a:endParaRPr lang="en-US" sz="900" dirty="0"/>
+              <a:t>Walter Odington 早在 1300 即觀察 5:4、6:5 為協和三度 · 純三六度 · 缺點：部分三五度走音，G■ 與 A■ 不同音</a:t>
+            </a:r>
+            <a:endParaRPr lang="en-US" sz="1400" dirty="0"/>
           </a:p>
         </p:txBody>
       </p:sp>
@@ -14617,14 +14617,14 @@
           <a:ln/>
         </p:spPr>
         <p:txBody>
-          <a:bodyPr wrap="square" rtlCol="0" anchor="ctr"/>
-          <a:lstStyle/>
-          <a:p>
-            <a:pPr indent="0" marL="0">
-              <a:buNone/>
-            </a:pPr>
-            <a:r>
-              <a:rPr lang="en-US" sz="1300" b="1" dirty="0">
+          <a:bodyPr wrap="square" lIns="0" tIns="0" rIns="0" bIns="0" rtlCol="0" anchor="ctr"/>
+          <a:lstStyle/>
+          <a:p>
+            <a:pPr indent="0" marL="0">
+              <a:buNone/>
+            </a:pPr>
+            <a:r>
+              <a:rPr lang="en-US" sz="1400" b="1" dirty="0">
                 <a:solidFill>
                   <a:srgbClr val="C8A020"/>
                 </a:solidFill>
@@ -14634,7 +14634,7 @@
               </a:rPr>
               <a:t>Mean-Tone Temperament 中庸律</a:t>
             </a:r>
-            <a:endParaRPr lang="en-US" sz="1300" dirty="0"/>
+            <a:endParaRPr lang="en-US" sz="1400" dirty="0"/>
           </a:p>
         </p:txBody>
       </p:sp>
@@ -14663,7 +14663,7 @@
               <a:buNone/>
             </a:pPr>
             <a:r>
-              <a:rPr lang="en-US" sz="1000" i="1" dirty="0">
+              <a:rPr lang="en-US" sz="1400" i="1" dirty="0">
                 <a:solidFill>
                   <a:srgbClr val="E8D8A8"/>
                 </a:solidFill>
@@ -14673,7 +14673,7 @@
               </a:rPr>
               <a:t>16 世紀主流鍵盤律制</a:t>
             </a:r>
-            <a:endParaRPr lang="en-US" sz="1000" dirty="0"/>
+            <a:endParaRPr lang="en-US" sz="1400" dirty="0"/>
           </a:p>
         </p:txBody>
       </p:sp>
@@ -14695,14 +14695,14 @@
           <a:ln/>
         </p:spPr>
         <p:txBody>
-          <a:bodyPr wrap="square" rtlCol="0" anchor="ctr"/>
-          <a:lstStyle/>
-          <a:p>
-            <a:pPr indent="0" marL="0">
-              <a:buNone/>
-            </a:pPr>
-            <a:r>
-              <a:rPr lang="en-US" sz="900" dirty="0">
+          <a:bodyPr wrap="square" rtlCol="0" anchor="t"/>
+          <a:lstStyle/>
+          <a:p>
+            <a:pPr indent="0" marL="0">
+              <a:buNone/>
+            </a:pPr>
+            <a:r>
+              <a:rPr lang="en-US" sz="1400" dirty="0">
                 <a:solidFill>
                   <a:srgbClr val="E8D8A8"/>
                 </a:solidFill>
@@ -14712,7 +14712,7 @@
               </a:rPr>
               <a:t>五度略縮——多數大三度純或近純 · 16 世紀至 19 世紀中葉鍵盤樂器的標準律制</a:t>
             </a:r>
-            <a:endParaRPr lang="en-US" sz="900" dirty="0"/>
+            <a:endParaRPr lang="en-US" sz="1400" dirty="0"/>
           </a:p>
         </p:txBody>
       </p:sp>
@@ -14754,14 +14754,14 @@
           <a:ln/>
         </p:spPr>
         <p:txBody>
-          <a:bodyPr wrap="square" rtlCol="0" anchor="ctr"/>
-          <a:lstStyle/>
-          <a:p>
-            <a:pPr indent="0" marL="0">
-              <a:buNone/>
-            </a:pPr>
-            <a:r>
-              <a:rPr lang="en-US" sz="1300" b="1" dirty="0">
+          <a:bodyPr wrap="square" lIns="0" tIns="0" rIns="0" bIns="0" rtlCol="0" anchor="ctr"/>
+          <a:lstStyle/>
+          <a:p>
+            <a:pPr indent="0" marL="0">
+              <a:buNone/>
+            </a:pPr>
+            <a:r>
+              <a:rPr lang="en-US" sz="1400" b="1" dirty="0">
                 <a:solidFill>
                   <a:srgbClr val="C8A020"/>
                 </a:solidFill>
@@ -14771,7 +14771,7 @@
               </a:rPr>
               <a:t>Equal Temperament 十二平均律</a:t>
             </a:r>
-            <a:endParaRPr lang="en-US" sz="1300" dirty="0"/>
+            <a:endParaRPr lang="en-US" sz="1400" dirty="0"/>
           </a:p>
         </p:txBody>
       </p:sp>
@@ -14800,7 +14800,7 @@
               <a:buNone/>
             </a:pPr>
             <a:r>
-              <a:rPr lang="en-US" sz="1000" i="1" dirty="0">
+              <a:rPr lang="en-US" sz="1400" i="1" dirty="0">
                 <a:solidFill>
                   <a:srgbClr val="E8D8A8"/>
                 </a:solidFill>
@@ -14810,7 +14810,7 @@
               </a:rPr>
               <a:t>16 世紀晚期首見於理論</a:t>
             </a:r>
-            <a:endParaRPr lang="en-US" sz="1000" dirty="0"/>
+            <a:endParaRPr lang="en-US" sz="1400" dirty="0"/>
           </a:p>
         </p:txBody>
       </p:sp>
@@ -14832,14 +14832,14 @@
           <a:ln/>
         </p:spPr>
         <p:txBody>
-          <a:bodyPr wrap="square" rtlCol="0" anchor="ctr"/>
-          <a:lstStyle/>
-          <a:p>
-            <a:pPr indent="0" marL="0">
-              <a:buNone/>
-            </a:pPr>
-            <a:r>
-              <a:rPr lang="en-US" sz="900" dirty="0">
+          <a:bodyPr wrap="square" rtlCol="0" anchor="t"/>
+          <a:lstStyle/>
+          <a:p>
+            <a:pPr indent="0" marL="0">
+              <a:buNone/>
+            </a:pPr>
+            <a:r>
+              <a:rPr lang="en-US" sz="1400" dirty="0">
                 <a:solidFill>
                   <a:srgbClr val="E8D8A8"/>
                 </a:solidFill>
@@ -14849,7 +14849,7 @@
               </a:rPr>
               <a:t>所有半音相等 · 任何調皆可用 · 僅八度純 · 三六度差 1/7 半音 · 19 世紀後半才廣泛採用</a:t>
             </a:r>
-            <a:endParaRPr lang="en-US" sz="900" dirty="0"/>
+            <a:endParaRPr lang="en-US" sz="1400" dirty="0"/>
           </a:p>
         </p:txBody>
       </p:sp>

--- a/Ch07_Renaissance.pptx
+++ b/Ch07_Renaissance.pptx
@@ -3240,7 +3240,7 @@
                 <a:ea typeface="Calibri" pitchFamily="34" charset="-122"/>
                 <a:cs typeface="Calibri" pitchFamily="34" charset="-120"/>
               </a:rPr>
-              <a:t>• ca. 1450：Johann Gutenberg 在歐洲完善活字印刷術</a:t>
+              <a:t>• ca. 1450：Gutenberg 完善活字印刷術</a:t>
             </a:r>
             <a:endParaRPr lang="en-US" sz="1400" dirty="0"/>
           </a:p>
@@ -3260,7 +3260,7 @@
                 <a:ea typeface="Calibri" pitchFamily="34" charset="-122"/>
                 <a:cs typeface="Calibri" pitchFamily="34" charset="-120"/>
               </a:rPr>
-              <a:t>• 1470s：活字首次用於音樂——禮拜用書的 chant 記譜</a:t>
+              <a:t>• 1470s：活字首次用於音樂（chant）</a:t>
             </a:r>
             <a:endParaRPr lang="en-US" sz="1400" dirty="0"/>
           </a:p>
@@ -3280,7 +3280,7 @@
                 <a:ea typeface="Calibri" pitchFamily="34" charset="-122"/>
                 <a:cs typeface="Calibri" pitchFamily="34" charset="-120"/>
               </a:rPr>
-              <a:t>• 1501：Ottaviano Petrucci（1466–1539）在威尼斯出版 Harmonice musices odhecaton A——第一本完全用活字印刷的複音樂譜（96 首作品）</a:t>
+              <a:t>• 1501：Petrucci 於威尼斯出版 Harmonice musices odhecaton A（三次壓印·精美但費時）</a:t>
             </a:r>
             <a:endParaRPr lang="en-US" sz="1400" dirty="0"/>
           </a:p>
@@ -3300,7 +3300,7 @@
                 <a:ea typeface="Calibri" pitchFamily="34" charset="-122"/>
                 <a:cs typeface="Calibri" pitchFamily="34" charset="-120"/>
               </a:rPr>
-              <a:t>  三次壓印：譜線、文字、音符與花體字母分三次印刷——費時但精美</a:t>
+              <a:t>• ca. 1520：Rastell 於倫敦首創單次壓印</a:t>
             </a:r>
             <a:endParaRPr lang="en-US" sz="1400" dirty="0"/>
           </a:p>
@@ -3320,10 +3320,91 @@
                 <a:ea typeface="Calibri" pitchFamily="34" charset="-122"/>
                 <a:cs typeface="Calibri" pitchFamily="34" charset="-120"/>
               </a:rPr>
-              <a:t>• ca. 1520：John Rastell 在倫敦首創「單次壓印」</a:t>
-            </a:r>
-            <a:endParaRPr lang="en-US" sz="1400" dirty="0"/>
-          </a:p>
+              <a:t>• 1528：Attaingnant 於巴黎大規模採用單次壓印，成為後續標準</a:t>
+            </a:r>
+            <a:endParaRPr lang="en-US" sz="1400" dirty="0"/>
+          </a:p>
+        </p:txBody>
+      </p:sp>
+      <p:sp>
+        <p:nvSpPr>
+          <p:cNvPr id="10" name="Shape 8"/>
+          <p:cNvSpPr/>
+          <p:nvPr/>
+        </p:nvSpPr>
+        <p:spPr>
+          <a:xfrm>
+            <a:off x="274320" y="2971800"/>
+            <a:ext cx="8595360" cy="1828800"/>
+          </a:xfrm>
+          <a:prstGeom prst="rect">
+            <a:avLst/>
+          </a:prstGeom>
+          <a:solidFill>
+            <a:srgbClr val="2A3C50"/>
+          </a:solidFill>
+          <a:ln/>
+        </p:spPr>
+      </p:sp>
+      <p:sp>
+        <p:nvSpPr>
+          <p:cNvPr id="11" name="Text 9"/>
+          <p:cNvSpPr/>
+          <p:nvPr/>
+        </p:nvSpPr>
+        <p:spPr>
+          <a:xfrm>
+            <a:off x="411480" y="3044952"/>
+            <a:ext cx="8321040" cy="365760"/>
+          </a:xfrm>
+          <a:prstGeom prst="rect">
+            <a:avLst/>
+          </a:prstGeom>
+          <a:noFill/>
+          <a:ln/>
+        </p:spPr>
+        <p:txBody>
+          <a:bodyPr wrap="square" lIns="0" tIns="0" rIns="0" bIns="0" rtlCol="0" anchor="ctr"/>
+          <a:lstStyle/>
+          <a:p>
+            <a:pPr indent="0" marL="0">
+              <a:buNone/>
+            </a:pPr>
+            <a:r>
+              <a:rPr lang="en-US" sz="1400" b="1" dirty="0">
+                <a:solidFill>
+                  <a:srgbClr val="C8A020"/>
+                </a:solidFill>
+                <a:latin typeface="Georgia" pitchFamily="34" charset="0"/>
+                <a:ea typeface="Georgia" pitchFamily="34" charset="-122"/>
+                <a:cs typeface="Georgia" pitchFamily="34" charset="-120"/>
+              </a:rPr>
+              <a:t>■ 印刷術的衝擊 Impact of Music Printing</a:t>
+            </a:r>
+            <a:endParaRPr lang="en-US" sz="1400" dirty="0"/>
+          </a:p>
+        </p:txBody>
+      </p:sp>
+      <p:sp>
+        <p:nvSpPr>
+          <p:cNvPr id="12" name="Text 10"/>
+          <p:cNvSpPr/>
+          <p:nvPr/>
+        </p:nvSpPr>
+        <p:spPr>
+          <a:xfrm>
+            <a:off x="457200" y="3502152"/>
+            <a:ext cx="8229600" cy="1252728"/>
+          </a:xfrm>
+          <a:prstGeom prst="rect">
+            <a:avLst/>
+          </a:prstGeom>
+          <a:noFill/>
+          <a:ln/>
+        </p:spPr>
+        <p:txBody>
+          <a:bodyPr wrap="square" rtlCol="0" anchor="t"/>
+          <a:lstStyle/>
           <a:p>
             <a:pPr indent="0" marL="0">
               <a:spcAft>
@@ -3340,91 +3421,10 @@
                 <a:ea typeface="Calibri" pitchFamily="34" charset="-122"/>
                 <a:cs typeface="Calibri" pitchFamily="34" charset="-120"/>
               </a:rPr>
-              <a:t>• 1528：Pierre Attaingnant（ca. 1494–1551/52）在巴黎大規模使用單次壓印——譜線斷續但便宜實用——成為後續標準</a:t>
-            </a:r>
-            <a:endParaRPr lang="en-US" sz="1400" dirty="0"/>
-          </a:p>
-        </p:txBody>
-      </p:sp>
-      <p:sp>
-        <p:nvSpPr>
-          <p:cNvPr id="10" name="Shape 8"/>
-          <p:cNvSpPr/>
-          <p:nvPr/>
-        </p:nvSpPr>
-        <p:spPr>
-          <a:xfrm>
-            <a:off x="274320" y="2971800"/>
-            <a:ext cx="8595360" cy="1828800"/>
-          </a:xfrm>
-          <a:prstGeom prst="rect">
-            <a:avLst/>
-          </a:prstGeom>
-          <a:solidFill>
-            <a:srgbClr val="2A3C50"/>
-          </a:solidFill>
-          <a:ln/>
-        </p:spPr>
-      </p:sp>
-      <p:sp>
-        <p:nvSpPr>
-          <p:cNvPr id="11" name="Text 9"/>
-          <p:cNvSpPr/>
-          <p:nvPr/>
-        </p:nvSpPr>
-        <p:spPr>
-          <a:xfrm>
-            <a:off x="411480" y="3044952"/>
-            <a:ext cx="8321040" cy="365760"/>
-          </a:xfrm>
-          <a:prstGeom prst="rect">
-            <a:avLst/>
-          </a:prstGeom>
-          <a:noFill/>
-          <a:ln/>
-        </p:spPr>
-        <p:txBody>
-          <a:bodyPr wrap="square" lIns="0" tIns="0" rIns="0" bIns="0" rtlCol="0" anchor="ctr"/>
-          <a:lstStyle/>
-          <a:p>
-            <a:pPr indent="0" marL="0">
-              <a:buNone/>
-            </a:pPr>
-            <a:r>
-              <a:rPr lang="en-US" sz="1400" b="1" dirty="0">
-                <a:solidFill>
-                  <a:srgbClr val="C8A020"/>
-                </a:solidFill>
-                <a:latin typeface="Georgia" pitchFamily="34" charset="0"/>
-                <a:ea typeface="Georgia" pitchFamily="34" charset="-122"/>
-                <a:cs typeface="Georgia" pitchFamily="34" charset="-120"/>
-              </a:rPr>
-              <a:t>■ 印刷術的衝擊 Impact of Music Printing</a:t>
-            </a:r>
-            <a:endParaRPr lang="en-US" sz="1400" dirty="0"/>
-          </a:p>
-        </p:txBody>
-      </p:sp>
-      <p:sp>
-        <p:nvSpPr>
-          <p:cNvPr id="12" name="Text 10"/>
-          <p:cNvSpPr/>
-          <p:nvPr/>
-        </p:nvSpPr>
-        <p:spPr>
-          <a:xfrm>
-            <a:off x="457200" y="3502152"/>
-            <a:ext cx="8229600" cy="1252728"/>
-          </a:xfrm>
-          <a:prstGeom prst="rect">
-            <a:avLst/>
-          </a:prstGeom>
-          <a:noFill/>
-          <a:ln/>
-        </p:spPr>
-        <p:txBody>
-          <a:bodyPr wrap="square" rtlCol="0" anchor="t"/>
-          <a:lstStyle/>
+              <a:t>• 樂譜價格大幅降低——業餘愛好者可負擔</a:t>
+            </a:r>
+            <a:endParaRPr lang="en-US" sz="1400" dirty="0"/>
+          </a:p>
           <a:p>
             <a:pPr indent="0" marL="0">
               <a:spcAft>
@@ -3441,7 +3441,7 @@
                 <a:ea typeface="Calibri" pitchFamily="34" charset="-122"/>
                 <a:cs typeface="Calibri" pitchFamily="34" charset="-120"/>
               </a:rPr>
-              <a:t>• 樂譜價格大幅降低——業餘愛好者可負擔</a:t>
+              <a:t>• 音樂識讀普及——中產家庭成為音樂場域</a:t>
             </a:r>
             <a:endParaRPr lang="en-US" sz="1400" dirty="0"/>
           </a:p>
@@ -3461,7 +3461,7 @@
                 <a:ea typeface="Calibri" pitchFamily="34" charset="-122"/>
                 <a:cs typeface="Calibri" pitchFamily="34" charset="-120"/>
               </a:rPr>
-              <a:t>• 音樂識讀能力普及——中產階級家庭成為音樂場域</a:t>
+              <a:t>• 作曲家名聲跨越地域——音樂「作品」概念成形</a:t>
             </a:r>
             <a:endParaRPr lang="en-US" sz="1400" dirty="0"/>
           </a:p>
@@ -3481,7 +3481,7 @@
                 <a:ea typeface="Calibri" pitchFamily="34" charset="-122"/>
                 <a:cs typeface="Calibri" pitchFamily="34" charset="-120"/>
               </a:rPr>
-              <a:t>• 作曲家名聲跨越地域——音樂「作品」概念成形</a:t>
+              <a:t>• 新類型蓬勃：madrigal、chanson、villancico、lute song</a:t>
             </a:r>
             <a:endParaRPr lang="en-US" sz="1400" dirty="0"/>
           </a:p>
@@ -3501,7 +3501,7 @@
                 <a:ea typeface="Calibri" pitchFamily="34" charset="-122"/>
                 <a:cs typeface="Calibri" pitchFamily="34" charset="-120"/>
               </a:rPr>
-              <a:t>• 新類型蓬勃：madrigal、chanson、villancico、lute song</a:t>
+              <a:t>• 器樂譜首次問世：toccata、ricercare、canzona</a:t>
             </a:r>
             <a:endParaRPr lang="en-US" sz="1400" dirty="0"/>
           </a:p>
@@ -3521,47 +3521,7 @@
                 <a:ea typeface="Calibri" pitchFamily="34" charset="-122"/>
                 <a:cs typeface="Calibri" pitchFamily="34" charset="-120"/>
               </a:rPr>
-              <a:t>• 器樂譜首次大量問世：toccata、ricercare、canzona</a:t>
-            </a:r>
-            <a:endParaRPr lang="en-US" sz="1400" dirty="0"/>
-          </a:p>
-          <a:p>
-            <a:pPr indent="0" marL="0">
-              <a:spcAft>
-                <a:spcPts val="100"/>
-              </a:spcAft>
-              <a:buNone/>
-            </a:pPr>
-            <a:r>
-              <a:rPr lang="en-US" sz="1400" dirty="0">
-                <a:solidFill>
-                  <a:srgbClr val="E8D8A8"/>
-                </a:solidFill>
-                <a:latin typeface="Calibri" pitchFamily="34" charset="0"/>
-                <a:ea typeface="Calibri" pitchFamily="34" charset="-122"/>
-                <a:cs typeface="Calibri" pitchFamily="34" charset="-120"/>
-              </a:rPr>
-              <a:t>• 印刷中心：Venice、Paris、Rome、Nuremberg、London</a:t>
-            </a:r>
-            <a:endParaRPr lang="en-US" sz="1400" dirty="0"/>
-          </a:p>
-          <a:p>
-            <a:pPr indent="0" marL="0">
-              <a:spcAft>
-                <a:spcPts val="100"/>
-              </a:spcAft>
-              <a:buNone/>
-            </a:pPr>
-            <a:r>
-              <a:rPr lang="en-US" sz="1400" dirty="0">
-                <a:solidFill>
-                  <a:srgbClr val="E8D8A8"/>
-                </a:solidFill>
-                <a:latin typeface="Calibri" pitchFamily="34" charset="0"/>
-                <a:ea typeface="Calibri" pitchFamily="34" charset="-122"/>
-                <a:cs typeface="Calibri" pitchFamily="34" charset="-120"/>
-              </a:rPr>
-              <a:t>• 宗教改革借助印刷快速傳播新音樂類型</a:t>
+              <a:t>• 中心：Venice / Paris / Rome / Nuremberg / London</a:t>
             </a:r>
             <a:endParaRPr lang="en-US" sz="1400" dirty="0"/>
           </a:p>
@@ -3834,7 +3794,7 @@
                 <a:ea typeface="Calibri" pitchFamily="34" charset="-122"/>
                 <a:cs typeface="Calibri" pitchFamily="34" charset="-120"/>
               </a:rPr>
-              <a:t>Liber de arte contrapuncti (1477) · 12 部論著 · 新對位法典範</a:t>
+              <a:t>Liber de arte contrapuncti (1477) · 新對位法典範</a:t>
             </a:r>
             <a:endParaRPr lang="en-US" sz="1400" dirty="0"/>
           </a:p>
@@ -4118,7 +4078,7 @@
                 <a:ea typeface="Calibri" pitchFamily="34" charset="-122"/>
                 <a:cs typeface="Calibri" pitchFamily="34" charset="-120"/>
               </a:rPr>
-              <a:t>Toscanello in musica (1523) · 首位以義大利文寫作的理論家</a:t>
+              <a:t>Toscanello in musica (1523) · 首位以義大利文寫作</a:t>
             </a:r>
             <a:endParaRPr lang="en-US" sz="1400" dirty="0"/>
           </a:p>
@@ -4260,7 +4220,7 @@
                 <a:ea typeface="Calibri" pitchFamily="34" charset="-122"/>
                 <a:cs typeface="Calibri" pitchFamily="34" charset="-120"/>
               </a:rPr>
-              <a:t>Dodecachordon (1547) · 新增 Aeolian、Ionian 四個調式</a:t>
+              <a:t>Dodecachordon (1547) · 新增 Aeolian、Ionian 調式</a:t>
             </a:r>
             <a:endParaRPr lang="en-US" sz="1400" dirty="0"/>
           </a:p>
@@ -4402,7 +4362,7 @@
                 <a:ea typeface="Calibri" pitchFamily="34" charset="-122"/>
                 <a:cs typeface="Calibri" pitchFamily="34" charset="-120"/>
               </a:rPr>
-              <a:t>Le istitutioni harmoniche (1558) · 對位法與和聲理論的集大成者</a:t>
+              <a:t>Le istitutioni harmoniche (1558) · 對位與和聲集大成</a:t>
             </a:r>
             <a:endParaRPr lang="en-US" sz="1400" dirty="0"/>
           </a:p>
@@ -4544,7 +4504,7 @@
                 <a:ea typeface="Calibri" pitchFamily="34" charset="-122"/>
                 <a:cs typeface="Calibri" pitchFamily="34" charset="-120"/>
               </a:rPr>
-              <a:t>活字印刷術的完善者——改變知識傳播</a:t>
+              <a:t>活字印刷術完善者——改變知識傳播</a:t>
             </a:r>
             <a:endParaRPr lang="en-US" sz="1400" dirty="0"/>
           </a:p>
@@ -4686,7 +4646,7 @@
                 <a:ea typeface="Calibri" pitchFamily="34" charset="-122"/>
                 <a:cs typeface="Calibri" pitchFamily="34" charset="-120"/>
               </a:rPr>
-              <a:t>1501 威尼斯首本複音樂印刷集——Harmonice musices odhecaton</a:t>
+              <a:t>1501 威尼斯首本複音樂印刷集 (Odhecaton)</a:t>
             </a:r>
             <a:endParaRPr lang="en-US" sz="1400" dirty="0"/>
           </a:p>
@@ -4828,7 +4788,7 @@
                 <a:ea typeface="Calibri" pitchFamily="34" charset="-122"/>
                 <a:cs typeface="Calibri" pitchFamily="34" charset="-120"/>
               </a:rPr>
-              <a:t>單次壓印法巴黎推廣者——使樂譜便宜普及</a:t>
+              <a:t>巴黎推廣單次壓印法——樂譜便宜普及</a:t>
             </a:r>
             <a:endParaRPr lang="en-US" sz="1400" dirty="0"/>
           </a:p>
@@ -5778,7 +5738,7 @@
                 <a:ea typeface="Calibri" pitchFamily="34" charset="-122"/>
                 <a:cs typeface="Calibri" pitchFamily="34" charset="-120"/>
               </a:rPr>
-              <a:t>Columbus 抵達西印度群島 · Gaffurio Theorica</a:t>
+              <a:t>Columbus 抵達西印度群島</a:t>
             </a:r>
             <a:endParaRPr lang="en-US" sz="1400" dirty="0"/>
           </a:p>
@@ -5817,7 +5777,7 @@
                 <a:ea typeface="Georgia" pitchFamily="34" charset="-122"/>
                 <a:cs typeface="Georgia" pitchFamily="34" charset="-120"/>
               </a:rPr>
-              <a:t>1495</a:t>
+              <a:t>1492</a:t>
             </a:r>
             <a:endParaRPr lang="en-US" sz="1400" dirty="0"/>
           </a:p>
@@ -5856,7 +5816,7 @@
                 <a:ea typeface="Calibri" pitchFamily="34" charset="-122"/>
                 <a:cs typeface="Calibri" pitchFamily="34" charset="-120"/>
               </a:rPr>
-              <a:t>Leonardo da Vinci《最後的晚餐》</a:t>
+              <a:t>Gaffurio · Theorica musice</a:t>
             </a:r>
             <a:endParaRPr lang="en-US" sz="1400" dirty="0"/>
           </a:p>
@@ -5895,7 +5855,7 @@
                 <a:ea typeface="Georgia" pitchFamily="34" charset="-122"/>
                 <a:cs typeface="Georgia" pitchFamily="34" charset="-120"/>
               </a:rPr>
-              <a:t>1501</a:t>
+              <a:t>1495</a:t>
             </a:r>
             <a:endParaRPr lang="en-US" sz="1400" dirty="0"/>
           </a:p>
@@ -5934,7 +5894,7 @@
                 <a:ea typeface="Calibri" pitchFamily="34" charset="-122"/>
                 <a:cs typeface="Calibri" pitchFamily="34" charset="-120"/>
               </a:rPr>
-              <a:t>Petrucci 出版 Odhecaton</a:t>
+              <a:t>Leonardo da Vinci《最後的晚餐》</a:t>
             </a:r>
             <a:endParaRPr lang="en-US" sz="1400" dirty="0"/>
           </a:p>
@@ -5973,7 +5933,7 @@
                 <a:ea typeface="Georgia" pitchFamily="34" charset="-122"/>
                 <a:cs typeface="Georgia" pitchFamily="34" charset="-120"/>
               </a:rPr>
-              <a:t>1517</a:t>
+              <a:t>1501</a:t>
             </a:r>
             <a:endParaRPr lang="en-US" sz="1400" dirty="0"/>
           </a:p>
@@ -6012,7 +5972,7 @@
                 <a:ea typeface="Calibri" pitchFamily="34" charset="-122"/>
                 <a:cs typeface="Calibri" pitchFamily="34" charset="-120"/>
               </a:rPr>
-              <a:t>Luther 宗教改革開始</a:t>
+              <a:t>Petrucci 出版 Odhecaton</a:t>
             </a:r>
             <a:endParaRPr lang="en-US" sz="1400" dirty="0"/>
           </a:p>
@@ -6051,7 +6011,7 @@
                 <a:ea typeface="Georgia" pitchFamily="34" charset="-122"/>
                 <a:cs typeface="Georgia" pitchFamily="34" charset="-120"/>
               </a:rPr>
-              <a:t>1523</a:t>
+              <a:t>1517</a:t>
             </a:r>
             <a:endParaRPr lang="en-US" sz="1400" dirty="0"/>
           </a:p>
@@ -6090,7 +6050,7 @@
                 <a:ea typeface="Calibri" pitchFamily="34" charset="-122"/>
                 <a:cs typeface="Calibri" pitchFamily="34" charset="-120"/>
               </a:rPr>
-              <a:t>Pietro Aaron · Toscanello in musica</a:t>
+              <a:t>Luther 宗教改革開始</a:t>
             </a:r>
             <a:endParaRPr lang="en-US" sz="1400" dirty="0"/>
           </a:p>
@@ -6129,7 +6089,7 @@
                 <a:ea typeface="Georgia" pitchFamily="34" charset="-122"/>
                 <a:cs typeface="Georgia" pitchFamily="34" charset="-120"/>
               </a:rPr>
-              <a:t>1528</a:t>
+              <a:t>1523</a:t>
             </a:r>
             <a:endParaRPr lang="en-US" sz="1400" dirty="0"/>
           </a:p>
@@ -6168,7 +6128,7 @@
                 <a:ea typeface="Calibri" pitchFamily="34" charset="-122"/>
                 <a:cs typeface="Calibri" pitchFamily="34" charset="-120"/>
               </a:rPr>
-              <a:t>Attaingnant 單次壓印法</a:t>
+              <a:t>Pietro Aaron · Toscanello in musica</a:t>
             </a:r>
             <a:endParaRPr lang="en-US" sz="1400" dirty="0"/>
           </a:p>
@@ -6207,7 +6167,7 @@
                 <a:ea typeface="Georgia" pitchFamily="34" charset="-122"/>
                 <a:cs typeface="Georgia" pitchFamily="34" charset="-120"/>
               </a:rPr>
-              <a:t>1532</a:t>
+              <a:t>1528</a:t>
             </a:r>
             <a:endParaRPr lang="en-US" sz="1400" dirty="0"/>
           </a:p>
@@ -6246,7 +6206,7 @@
                 <a:ea typeface="Calibri" pitchFamily="34" charset="-122"/>
                 <a:cs typeface="Calibri" pitchFamily="34" charset="-120"/>
               </a:rPr>
-              <a:t>Machiavelli《君王論》出版</a:t>
+              <a:t>Attaingnant 單次壓印法</a:t>
             </a:r>
             <a:endParaRPr lang="en-US" sz="1400" dirty="0"/>
           </a:p>
@@ -6285,7 +6245,7 @@
                 <a:ea typeface="Georgia" pitchFamily="34" charset="-122"/>
                 <a:cs typeface="Georgia" pitchFamily="34" charset="-120"/>
               </a:rPr>
-              <a:t>1547</a:t>
+              <a:t>1532</a:t>
             </a:r>
             <a:endParaRPr lang="en-US" sz="1400" dirty="0"/>
           </a:p>
@@ -6324,7 +6284,7 @@
                 <a:ea typeface="Calibri" pitchFamily="34" charset="-122"/>
                 <a:cs typeface="Calibri" pitchFamily="34" charset="-120"/>
               </a:rPr>
-              <a:t>Glareanus · Dodecachordon</a:t>
+              <a:t>Machiavelli《君王論》出版</a:t>
             </a:r>
             <a:endParaRPr lang="en-US" sz="1400" dirty="0"/>
           </a:p>
@@ -6363,7 +6323,7 @@
                 <a:ea typeface="Georgia" pitchFamily="34" charset="-122"/>
                 <a:cs typeface="Georgia" pitchFamily="34" charset="-120"/>
               </a:rPr>
-              <a:t>1558</a:t>
+              <a:t>1547</a:t>
             </a:r>
             <a:endParaRPr lang="en-US" sz="1400" dirty="0"/>
           </a:p>
@@ -6402,7 +6362,7 @@
                 <a:ea typeface="Calibri" pitchFamily="34" charset="-122"/>
                 <a:cs typeface="Calibri" pitchFamily="34" charset="-120"/>
               </a:rPr>
-              <a:t>Zarlino · Le istitutioni harmoniche</a:t>
+              <a:t>Glareanus · Dodecachordon</a:t>
             </a:r>
             <a:endParaRPr lang="en-US" sz="1400" dirty="0"/>
           </a:p>
@@ -6441,6 +6401,84 @@
                 <a:ea typeface="Georgia" pitchFamily="34" charset="-122"/>
                 <a:cs typeface="Georgia" pitchFamily="34" charset="-120"/>
               </a:rPr>
+              <a:t>1558</a:t>
+            </a:r>
+            <a:endParaRPr lang="en-US" sz="1400" dirty="0"/>
+          </a:p>
+        </p:txBody>
+      </p:sp>
+      <p:sp>
+        <p:nvSpPr>
+          <p:cNvPr id="44" name="Text 42"/>
+          <p:cNvSpPr/>
+          <p:nvPr/>
+        </p:nvSpPr>
+        <p:spPr>
+          <a:xfrm>
+            <a:off x="1737360" y="4480560"/>
+            <a:ext cx="2834640" cy="320040"/>
+          </a:xfrm>
+          <a:prstGeom prst="rect">
+            <a:avLst/>
+          </a:prstGeom>
+          <a:noFill/>
+          <a:ln/>
+        </p:spPr>
+        <p:txBody>
+          <a:bodyPr wrap="square" rtlCol="0" anchor="t"/>
+          <a:lstStyle/>
+          <a:p>
+            <a:pPr indent="0" marL="0">
+              <a:buNone/>
+            </a:pPr>
+            <a:r>
+              <a:rPr lang="en-US" sz="1400" dirty="0">
+                <a:solidFill>
+                  <a:srgbClr val="E8D8A8"/>
+                </a:solidFill>
+                <a:latin typeface="Calibri" pitchFamily="34" charset="0"/>
+                <a:ea typeface="Calibri" pitchFamily="34" charset="-122"/>
+                <a:cs typeface="Calibri" pitchFamily="34" charset="-120"/>
+              </a:rPr>
+              <a:t>Zarlino · Le istitutioni harmoniche</a:t>
+            </a:r>
+            <a:endParaRPr lang="en-US" sz="1400" dirty="0"/>
+          </a:p>
+        </p:txBody>
+      </p:sp>
+      <p:sp>
+        <p:nvSpPr>
+          <p:cNvPr id="45" name="Text 43"/>
+          <p:cNvSpPr/>
+          <p:nvPr/>
+        </p:nvSpPr>
+        <p:spPr>
+          <a:xfrm>
+            <a:off x="4709160" y="4480560"/>
+            <a:ext cx="1371600" cy="320040"/>
+          </a:xfrm>
+          <a:prstGeom prst="rect">
+            <a:avLst/>
+          </a:prstGeom>
+          <a:noFill/>
+          <a:ln/>
+        </p:spPr>
+        <p:txBody>
+          <a:bodyPr wrap="square" lIns="0" tIns="0" rIns="0" bIns="0" rtlCol="0" anchor="ctr"/>
+          <a:lstStyle/>
+          <a:p>
+            <a:pPr indent="0" marL="0">
+              <a:buNone/>
+            </a:pPr>
+            <a:r>
+              <a:rPr lang="en-US" sz="1400" b="1" dirty="0">
+                <a:solidFill>
+                  <a:srgbClr val="C8A020"/>
+                </a:solidFill>
+                <a:latin typeface="Georgia" pitchFamily="34" charset="0"/>
+                <a:ea typeface="Georgia" pitchFamily="34" charset="-122"/>
+                <a:cs typeface="Georgia" pitchFamily="34" charset="-120"/>
+              </a:rPr>
               <a:t>1594</a:t>
             </a:r>
             <a:endParaRPr lang="en-US" sz="1400" dirty="0"/>
@@ -6449,13 +6487,13 @@
       </p:sp>
       <p:sp>
         <p:nvSpPr>
-          <p:cNvPr id="44" name="Text 42"/>
-          <p:cNvSpPr/>
-          <p:nvPr/>
-        </p:nvSpPr>
-        <p:spPr>
-          <a:xfrm>
-            <a:off x="1737360" y="4480560"/>
+          <p:cNvPr id="46" name="Text 44"/>
+          <p:cNvSpPr/>
+          <p:nvPr/>
+        </p:nvSpPr>
+        <p:spPr>
+          <a:xfrm>
+            <a:off x="6080760" y="4480560"/>
             <a:ext cx="2834640" cy="320040"/>
           </a:xfrm>
           <a:prstGeom prst="rect">
@@ -7639,7 +7677,7 @@
         <p:spPr>
           <a:xfrm>
             <a:off x="274320" y="1188720"/>
-            <a:ext cx="8595360" cy="2103120"/>
+            <a:ext cx="8595360" cy="1828800"/>
           </a:xfrm>
           <a:prstGeom prst="rect">
             <a:avLst/>
@@ -7697,8 +7735,8 @@
         </p:nvSpPr>
         <p:spPr>
           <a:xfrm>
-            <a:off x="457200" y="1554480"/>
-            <a:ext cx="3749040" cy="256032"/>
+            <a:off x="457200" y="1517904"/>
+            <a:ext cx="3749040" cy="237744"/>
           </a:xfrm>
           <a:prstGeom prst="rect">
             <a:avLst/>
@@ -7736,8 +7774,8 @@
         </p:nvSpPr>
         <p:spPr>
           <a:xfrm>
-            <a:off x="457200" y="1828800"/>
-            <a:ext cx="3749040" cy="256032"/>
+            <a:off x="457200" y="1755648"/>
+            <a:ext cx="3749040" cy="237744"/>
           </a:xfrm>
           <a:prstGeom prst="rect">
             <a:avLst/>
@@ -7775,8 +7813,8 @@
         </p:nvSpPr>
         <p:spPr>
           <a:xfrm>
-            <a:off x="457200" y="2103120"/>
-            <a:ext cx="3749040" cy="256032"/>
+            <a:off x="457200" y="1993392"/>
+            <a:ext cx="3749040" cy="237744"/>
           </a:xfrm>
           <a:prstGeom prst="rect">
             <a:avLst/>
@@ -7814,8 +7852,8 @@
         </p:nvSpPr>
         <p:spPr>
           <a:xfrm>
-            <a:off x="457200" y="2377440"/>
-            <a:ext cx="3749040" cy="256032"/>
+            <a:off x="457200" y="2231136"/>
+            <a:ext cx="3749040" cy="237744"/>
           </a:xfrm>
           <a:prstGeom prst="rect">
             <a:avLst/>
@@ -7853,8 +7891,8 @@
         </p:nvSpPr>
         <p:spPr>
           <a:xfrm>
-            <a:off x="457200" y="2651760"/>
-            <a:ext cx="3749040" cy="256032"/>
+            <a:off x="457200" y="2468880"/>
+            <a:ext cx="3749040" cy="237744"/>
           </a:xfrm>
           <a:prstGeom prst="rect">
             <a:avLst/>
@@ -7892,8 +7930,8 @@
         </p:nvSpPr>
         <p:spPr>
           <a:xfrm>
-            <a:off x="457200" y="2926080"/>
-            <a:ext cx="3749040" cy="256032"/>
+            <a:off x="457200" y="2706624"/>
+            <a:ext cx="3749040" cy="237744"/>
           </a:xfrm>
           <a:prstGeom prst="rect">
             <a:avLst/>
@@ -7931,8 +7969,8 @@
         </p:nvSpPr>
         <p:spPr>
           <a:xfrm>
-            <a:off x="4297680" y="1554480"/>
-            <a:ext cx="4526280" cy="256032"/>
+            <a:off x="4297680" y="1517904"/>
+            <a:ext cx="4526280" cy="237744"/>
           </a:xfrm>
           <a:prstGeom prst="rect">
             <a:avLst/>
@@ -7970,8 +8008,8 @@
         </p:nvSpPr>
         <p:spPr>
           <a:xfrm>
-            <a:off x="4297680" y="1828800"/>
-            <a:ext cx="4526280" cy="256032"/>
+            <a:off x="4297680" y="1755648"/>
+            <a:ext cx="4526280" cy="237744"/>
           </a:xfrm>
           <a:prstGeom prst="rect">
             <a:avLst/>
@@ -8009,8 +8047,8 @@
         </p:nvSpPr>
         <p:spPr>
           <a:xfrm>
-            <a:off x="4297680" y="2103120"/>
-            <a:ext cx="4526280" cy="256032"/>
+            <a:off x="4297680" y="1993392"/>
+            <a:ext cx="4526280" cy="237744"/>
           </a:xfrm>
           <a:prstGeom prst="rect">
             <a:avLst/>
@@ -8048,8 +8086,8 @@
         </p:nvSpPr>
         <p:spPr>
           <a:xfrm>
-            <a:off x="4297680" y="2377440"/>
-            <a:ext cx="4526280" cy="256032"/>
+            <a:off x="4297680" y="2231136"/>
+            <a:ext cx="4526280" cy="237744"/>
           </a:xfrm>
           <a:prstGeom prst="rect">
             <a:avLst/>
@@ -8087,8 +8125,8 @@
         </p:nvSpPr>
         <p:spPr>
           <a:xfrm>
-            <a:off x="4297680" y="2651760"/>
-            <a:ext cx="4526280" cy="256032"/>
+            <a:off x="4297680" y="2468880"/>
+            <a:ext cx="4526280" cy="237744"/>
           </a:xfrm>
           <a:prstGeom prst="rect">
             <a:avLst/>
@@ -8126,8 +8164,8 @@
         </p:nvSpPr>
         <p:spPr>
           <a:xfrm>
-            <a:off x="4297680" y="2926080"/>
-            <a:ext cx="4526280" cy="256032"/>
+            <a:off x="4297680" y="2706624"/>
+            <a:ext cx="4526280" cy="237744"/>
           </a:xfrm>
           <a:prstGeom prst="rect">
             <a:avLst/>
@@ -8165,8 +8203,8 @@
         </p:nvSpPr>
         <p:spPr>
           <a:xfrm>
-            <a:off x="274320" y="3383280"/>
-            <a:ext cx="8595360" cy="914400"/>
+            <a:off x="274320" y="3108960"/>
+            <a:ext cx="8595360" cy="1051560"/>
           </a:xfrm>
           <a:prstGeom prst="rect">
             <a:avLst/>
@@ -8185,7 +8223,7 @@
         </p:nvSpPr>
         <p:spPr>
           <a:xfrm>
-            <a:off x="411480" y="3438144"/>
+            <a:off x="411480" y="3163824"/>
             <a:ext cx="8321040" cy="274320"/>
           </a:xfrm>
           <a:prstGeom prst="rect">
@@ -8224,8 +8262,8 @@
         </p:nvSpPr>
         <p:spPr>
           <a:xfrm>
-            <a:off x="457200" y="3694176"/>
-            <a:ext cx="8321040" cy="594360"/>
+            <a:off x="457200" y="3438144"/>
+            <a:ext cx="8321040" cy="713232"/>
           </a:xfrm>
           <a:prstGeom prst="rect">
             <a:avLst/>
@@ -8297,8 +8335,8 @@
         </p:nvSpPr>
         <p:spPr>
           <a:xfrm>
-            <a:off x="274320" y="4343400"/>
-            <a:ext cx="8595360" cy="777240"/>
+            <a:off x="274320" y="4251960"/>
+            <a:ext cx="8595360" cy="731520"/>
           </a:xfrm>
           <a:prstGeom prst="rect">
             <a:avLst/>
@@ -8317,7 +8355,7 @@
         </p:nvSpPr>
         <p:spPr>
           <a:xfrm>
-            <a:off x="411480" y="4370832"/>
+            <a:off x="411480" y="4297680"/>
             <a:ext cx="8321040" cy="228600"/>
           </a:xfrm>
           <a:prstGeom prst="rect">
@@ -8356,8 +8394,8 @@
         </p:nvSpPr>
         <p:spPr>
           <a:xfrm>
-            <a:off x="457200" y="4599432"/>
-            <a:ext cx="8321040" cy="502920"/>
+            <a:off x="457200" y="4526280"/>
+            <a:ext cx="8321040" cy="438912"/>
           </a:xfrm>
           <a:prstGeom prst="rect">
             <a:avLst/>
@@ -10840,7 +10878,7 @@
         <p:spPr>
           <a:xfrm>
             <a:off x="6126480" y="1207008"/>
-            <a:ext cx="2743200" cy="365760"/>
+            <a:ext cx="2743200" cy="274320"/>
           </a:xfrm>
           <a:prstGeom prst="rect">
             <a:avLst/>
@@ -10864,7 +10902,7 @@
                 <a:ea typeface="Georgia" pitchFamily="34" charset="-122"/>
                 <a:cs typeface="Georgia" pitchFamily="34" charset="-120"/>
               </a:rPr>
-              <a:t>音樂中的對應 Musical Parallel</a:t>
+              <a:t>音樂對應 Music</a:t>
             </a:r>
             <a:endParaRPr lang="en-US" sz="1400" dirty="0"/>
           </a:p>
